--- a/2026/2026-09-11-AI-Updates.pptx
+++ b/2026/2026-09-11-AI-Updates.pptx
@@ -5,7 +5,7 @@
     <p:sldMasterId id="2147483661" r:id="rId1"/>
   </p:sldMasterIdLst>
   <p:notesMasterIdLst>
-    <p:notesMasterId r:id="rId27"/>
+    <p:notesMasterId r:id="rId28"/>
   </p:notesMasterIdLst>
   <p:sldIdLst>
     <p:sldId id="256" r:id="rId2"/>
@@ -33,16 +33,17 @@
     <p:sldId id="278" r:id="rId24"/>
     <p:sldId id="279" r:id="rId25"/>
     <p:sldId id="280" r:id="rId26"/>
+    <p:sldId id="281" r:id="rId27"/>
   </p:sldIdLst>
   <p:sldSz cx="9144000" cy="5143500" type="screen16x9"/>
   <p:notesSz cx="6858000" cy="9144000"/>
   <p:embeddedFontLst>
     <p:embeddedFont>
       <p:font typeface="Roboto Mono" pitchFamily="49" charset="0"/>
-      <p:regular r:id="rId28"/>
-      <p:bold r:id="rId29"/>
-      <p:italic r:id="rId30"/>
-      <p:boldItalic r:id="rId31"/>
+      <p:regular r:id="rId29"/>
+      <p:bold r:id="rId30"/>
+      <p:italic r:id="rId31"/>
+      <p:boldItalic r:id="rId32"/>
     </p:embeddedFont>
   </p:embeddedFontLst>
   <p:defaultTextStyle>
@@ -983,7 +984,7 @@
   <p:cSld>
     <p:spTree>
       <p:nvGrpSpPr>
-        <p:cNvPr id="1" name="Shape 143"/>
+        <p:cNvPr id="1" name="Shape 146"/>
         <p:cNvGrpSpPr/>
         <p:nvPr/>
       </p:nvGrpSpPr>
@@ -997,7 +998,7 @@
       </p:grpSpPr>
       <p:sp>
         <p:nvSpPr>
-          <p:cNvPr id="144" name="Google Shape;144;g3fa2ee64b1a_0_0:notes"/>
+          <p:cNvPr id="147" name="Google Shape;147;g3f53f467686_0_0:notes"/>
           <p:cNvSpPr>
             <a:spLocks noGrp="1" noRot="1" noChangeAspect="1"/>
           </p:cNvSpPr>
@@ -1048,7 +1049,7 @@
       </p:sp>
       <p:sp>
         <p:nvSpPr>
-          <p:cNvPr id="145" name="Google Shape;145;g3fa2ee64b1a_0_0:notes"/>
+          <p:cNvPr id="148" name="Google Shape;148;g3f53f467686_0_0:notes"/>
           <p:cNvSpPr txBox="1">
             <a:spLocks noGrp="1"/>
           </p:cNvSpPr>
@@ -1105,7 +1106,7 @@
   <p:cSld>
     <p:spTree>
       <p:nvGrpSpPr>
-        <p:cNvPr id="1" name="Shape 150"/>
+        <p:cNvPr id="1" name="Shape 153"/>
         <p:cNvGrpSpPr/>
         <p:nvPr/>
       </p:nvGrpSpPr>
@@ -1119,7 +1120,7 @@
       </p:grpSpPr>
       <p:sp>
         <p:nvSpPr>
-          <p:cNvPr id="151" name="Google Shape;151;g3fa2ee64b1a_0_15:notes"/>
+          <p:cNvPr id="154" name="Google Shape;154;g3fa2ee64b1a_0_0:notes"/>
           <p:cNvSpPr>
             <a:spLocks noGrp="1" noRot="1" noChangeAspect="1"/>
           </p:cNvSpPr>
@@ -1170,7 +1171,7 @@
       </p:sp>
       <p:sp>
         <p:nvSpPr>
-          <p:cNvPr id="152" name="Google Shape;152;g3fa2ee64b1a_0_15:notes"/>
+          <p:cNvPr id="155" name="Google Shape;155;g3fa2ee64b1a_0_0:notes"/>
           <p:cNvSpPr txBox="1">
             <a:spLocks noGrp="1"/>
           </p:cNvSpPr>
@@ -1227,7 +1228,7 @@
   <p:cSld>
     <p:spTree>
       <p:nvGrpSpPr>
-        <p:cNvPr id="1" name="Shape 159"/>
+        <p:cNvPr id="1" name="Shape 160"/>
         <p:cNvGrpSpPr/>
         <p:nvPr/>
       </p:nvGrpSpPr>
@@ -1241,7 +1242,7 @@
       </p:grpSpPr>
       <p:sp>
         <p:nvSpPr>
-          <p:cNvPr id="160" name="Google Shape;160;g3fa43287777_0_2:notes"/>
+          <p:cNvPr id="161" name="Google Shape;161;g3fa2ee64b1a_0_15:notes"/>
           <p:cNvSpPr>
             <a:spLocks noGrp="1" noRot="1" noChangeAspect="1"/>
           </p:cNvSpPr>
@@ -1292,7 +1293,7 @@
       </p:sp>
       <p:sp>
         <p:nvSpPr>
-          <p:cNvPr id="161" name="Google Shape;161;g3fa43287777_0_2:notes"/>
+          <p:cNvPr id="162" name="Google Shape;162;g3fa2ee64b1a_0_15:notes"/>
           <p:cNvSpPr txBox="1">
             <a:spLocks noGrp="1"/>
           </p:cNvSpPr>
@@ -1349,7 +1350,7 @@
   <p:cSld>
     <p:spTree>
       <p:nvGrpSpPr>
-        <p:cNvPr id="1" name="Shape 168"/>
+        <p:cNvPr id="1" name="Shape 169"/>
         <p:cNvGrpSpPr/>
         <p:nvPr/>
       </p:nvGrpSpPr>
@@ -1363,7 +1364,7 @@
       </p:grpSpPr>
       <p:sp>
         <p:nvSpPr>
-          <p:cNvPr id="169" name="Google Shape;169;g3fa9f3d362b_2_5:notes"/>
+          <p:cNvPr id="170" name="Google Shape;170;g3fa43287777_0_2:notes"/>
           <p:cNvSpPr>
             <a:spLocks noGrp="1" noRot="1" noChangeAspect="1"/>
           </p:cNvSpPr>
@@ -1414,7 +1415,7 @@
       </p:sp>
       <p:sp>
         <p:nvSpPr>
-          <p:cNvPr id="170" name="Google Shape;170;g3fa9f3d362b_2_5:notes"/>
+          <p:cNvPr id="171" name="Google Shape;171;g3fa43287777_0_2:notes"/>
           <p:cNvSpPr txBox="1">
             <a:spLocks noGrp="1"/>
           </p:cNvSpPr>
@@ -1471,7 +1472,7 @@
   <p:cSld>
     <p:spTree>
       <p:nvGrpSpPr>
-        <p:cNvPr id="1" name="Shape 179"/>
+        <p:cNvPr id="1" name="Shape 178"/>
         <p:cNvGrpSpPr/>
         <p:nvPr/>
       </p:nvGrpSpPr>
@@ -1485,7 +1486,7 @@
       </p:grpSpPr>
       <p:sp>
         <p:nvSpPr>
-          <p:cNvPr id="180" name="Google Shape;180;g3fa43287777_0_13:notes"/>
+          <p:cNvPr id="179" name="Google Shape;179;g3fa9f3d362b_2_5:notes"/>
           <p:cNvSpPr>
             <a:spLocks noGrp="1" noRot="1" noChangeAspect="1"/>
           </p:cNvSpPr>
@@ -1536,7 +1537,7 @@
       </p:sp>
       <p:sp>
         <p:nvSpPr>
-          <p:cNvPr id="181" name="Google Shape;181;g3fa43287777_0_13:notes"/>
+          <p:cNvPr id="180" name="Google Shape;180;g3fa9f3d362b_2_5:notes"/>
           <p:cNvSpPr txBox="1">
             <a:spLocks noGrp="1"/>
           </p:cNvSpPr>
@@ -1593,7 +1594,7 @@
   <p:cSld>
     <p:spTree>
       <p:nvGrpSpPr>
-        <p:cNvPr id="1" name="Shape 188"/>
+        <p:cNvPr id="1" name="Shape 189"/>
         <p:cNvGrpSpPr/>
         <p:nvPr/>
       </p:nvGrpSpPr>
@@ -1607,7 +1608,7 @@
       </p:grpSpPr>
       <p:sp>
         <p:nvSpPr>
-          <p:cNvPr id="189" name="Google Shape;189;g3fa2ee64b1a_0_7:notes"/>
+          <p:cNvPr id="190" name="Google Shape;190;g3fa43287777_0_13:notes"/>
           <p:cNvSpPr>
             <a:spLocks noGrp="1" noRot="1" noChangeAspect="1"/>
           </p:cNvSpPr>
@@ -1658,7 +1659,7 @@
       </p:sp>
       <p:sp>
         <p:nvSpPr>
-          <p:cNvPr id="190" name="Google Shape;190;g3fa2ee64b1a_0_7:notes"/>
+          <p:cNvPr id="191" name="Google Shape;191;g3fa43287777_0_13:notes"/>
           <p:cNvSpPr txBox="1">
             <a:spLocks noGrp="1"/>
           </p:cNvSpPr>
@@ -1715,7 +1716,7 @@
   <p:cSld>
     <p:spTree>
       <p:nvGrpSpPr>
-        <p:cNvPr id="1" name="Shape 195"/>
+        <p:cNvPr id="1" name="Shape 198"/>
         <p:cNvGrpSpPr/>
         <p:nvPr/>
       </p:nvGrpSpPr>
@@ -1729,7 +1730,7 @@
       </p:grpSpPr>
       <p:sp>
         <p:nvSpPr>
-          <p:cNvPr id="196" name="Google Shape;196;g3f8ba95dff5_1_0:notes"/>
+          <p:cNvPr id="199" name="Google Shape;199;g3fa2ee64b1a_0_7:notes"/>
           <p:cNvSpPr>
             <a:spLocks noGrp="1" noRot="1" noChangeAspect="1"/>
           </p:cNvSpPr>
@@ -1780,7 +1781,7 @@
       </p:sp>
       <p:sp>
         <p:nvSpPr>
-          <p:cNvPr id="197" name="Google Shape;197;g3f8ba95dff5_1_0:notes"/>
+          <p:cNvPr id="200" name="Google Shape;200;g3fa2ee64b1a_0_7:notes"/>
           <p:cNvSpPr txBox="1">
             <a:spLocks noGrp="1"/>
           </p:cNvSpPr>
@@ -1837,7 +1838,7 @@
   <p:cSld>
     <p:spTree>
       <p:nvGrpSpPr>
-        <p:cNvPr id="1" name="Shape 204"/>
+        <p:cNvPr id="1" name="Shape 205"/>
         <p:cNvGrpSpPr/>
         <p:nvPr/>
       </p:nvGrpSpPr>
@@ -1851,7 +1852,7 @@
       </p:grpSpPr>
       <p:sp>
         <p:nvSpPr>
-          <p:cNvPr id="205" name="Google Shape;205;g3f8be573847_0_1:notes"/>
+          <p:cNvPr id="206" name="Google Shape;206;g3f8ba95dff5_1_0:notes"/>
           <p:cNvSpPr>
             <a:spLocks noGrp="1" noRot="1" noChangeAspect="1"/>
           </p:cNvSpPr>
@@ -1902,7 +1903,7 @@
       </p:sp>
       <p:sp>
         <p:nvSpPr>
-          <p:cNvPr id="206" name="Google Shape;206;g3f8be573847_0_1:notes"/>
+          <p:cNvPr id="207" name="Google Shape;207;g3f8ba95dff5_1_0:notes"/>
           <p:cNvSpPr txBox="1">
             <a:spLocks noGrp="1"/>
           </p:cNvSpPr>
@@ -1959,7 +1960,7 @@
   <p:cSld>
     <p:spTree>
       <p:nvGrpSpPr>
-        <p:cNvPr id="1" name="Shape 213"/>
+        <p:cNvPr id="1" name="Shape 214"/>
         <p:cNvGrpSpPr/>
         <p:nvPr/>
       </p:nvGrpSpPr>
@@ -1973,7 +1974,7 @@
       </p:grpSpPr>
       <p:sp>
         <p:nvSpPr>
-          <p:cNvPr id="214" name="Google Shape;214;g3fa08be5e0b_0_1:notes"/>
+          <p:cNvPr id="215" name="Google Shape;215;g3f8be573847_0_1:notes"/>
           <p:cNvSpPr>
             <a:spLocks noGrp="1" noRot="1" noChangeAspect="1"/>
           </p:cNvSpPr>
@@ -2024,7 +2025,7 @@
       </p:sp>
       <p:sp>
         <p:nvSpPr>
-          <p:cNvPr id="215" name="Google Shape;215;g3fa08be5e0b_0_1:notes"/>
+          <p:cNvPr id="216" name="Google Shape;216;g3f8be573847_0_1:notes"/>
           <p:cNvSpPr txBox="1">
             <a:spLocks noGrp="1"/>
           </p:cNvSpPr>
@@ -2081,7 +2082,7 @@
   <p:cSld>
     <p:spTree>
       <p:nvGrpSpPr>
-        <p:cNvPr id="1" name="Shape 222"/>
+        <p:cNvPr id="1" name="Shape 223"/>
         <p:cNvGrpSpPr/>
         <p:nvPr/>
       </p:nvGrpSpPr>
@@ -2095,7 +2096,7 @@
       </p:grpSpPr>
       <p:sp>
         <p:nvSpPr>
-          <p:cNvPr id="223" name="Google Shape;223;g3fa2f927a9b_0_0:notes"/>
+          <p:cNvPr id="224" name="Google Shape;224;g3fa08be5e0b_0_1:notes"/>
           <p:cNvSpPr>
             <a:spLocks noGrp="1" noRot="1" noChangeAspect="1"/>
           </p:cNvSpPr>
@@ -2146,7 +2147,7 @@
       </p:sp>
       <p:sp>
         <p:nvSpPr>
-          <p:cNvPr id="224" name="Google Shape;224;g3fa2f927a9b_0_0:notes"/>
+          <p:cNvPr id="225" name="Google Shape;225;g3fa08be5e0b_0_1:notes"/>
           <p:cNvSpPr txBox="1">
             <a:spLocks noGrp="1"/>
           </p:cNvSpPr>
@@ -2203,7 +2204,7 @@
   <p:cSld>
     <p:spTree>
       <p:nvGrpSpPr>
-        <p:cNvPr id="1" name="Shape 70"/>
+        <p:cNvPr id="1" name="Shape 69"/>
         <p:cNvGrpSpPr/>
         <p:nvPr/>
       </p:nvGrpSpPr>
@@ -2217,7 +2218,7 @@
       </p:grpSpPr>
       <p:sp>
         <p:nvSpPr>
-          <p:cNvPr id="71" name="Google Shape;71;g3f9c68837c6_1_31:notes"/>
+          <p:cNvPr id="70" name="Google Shape;70;g3f9c68837c6_1_31:notes"/>
           <p:cNvSpPr>
             <a:spLocks noGrp="1" noRot="1" noChangeAspect="1"/>
           </p:cNvSpPr>
@@ -2268,7 +2269,7 @@
       </p:sp>
       <p:sp>
         <p:nvSpPr>
-          <p:cNvPr id="72" name="Google Shape;72;g3f9c68837c6_1_31:notes"/>
+          <p:cNvPr id="71" name="Google Shape;71;g3f9c68837c6_1_31:notes"/>
           <p:cNvSpPr txBox="1">
             <a:spLocks noGrp="1"/>
           </p:cNvSpPr>
@@ -2339,7 +2340,7 @@
       </p:grpSpPr>
       <p:sp>
         <p:nvSpPr>
-          <p:cNvPr id="233" name="Google Shape;233;g3fa2f927a9b_4_1:notes"/>
+          <p:cNvPr id="233" name="Google Shape;233;g3fa2f927a9b_0_0:notes"/>
           <p:cNvSpPr>
             <a:spLocks noGrp="1" noRot="1" noChangeAspect="1"/>
           </p:cNvSpPr>
@@ -2390,7 +2391,7 @@
       </p:sp>
       <p:sp>
         <p:nvSpPr>
-          <p:cNvPr id="234" name="Google Shape;234;g3fa2f927a9b_4_1:notes"/>
+          <p:cNvPr id="234" name="Google Shape;234;g3fa2f927a9b_0_0:notes"/>
           <p:cNvSpPr txBox="1">
             <a:spLocks noGrp="1"/>
           </p:cNvSpPr>
@@ -2447,7 +2448,7 @@
   <p:cSld>
     <p:spTree>
       <p:nvGrpSpPr>
-        <p:cNvPr id="1" name="Shape 241"/>
+        <p:cNvPr id="1" name="Shape 242"/>
         <p:cNvGrpSpPr/>
         <p:nvPr/>
       </p:nvGrpSpPr>
@@ -2461,7 +2462,7 @@
       </p:grpSpPr>
       <p:sp>
         <p:nvSpPr>
-          <p:cNvPr id="242" name="Google Shape;242;g3fa2f927997_0_0:notes"/>
+          <p:cNvPr id="243" name="Google Shape;243;g3fa2f927a9b_4_1:notes"/>
           <p:cNvSpPr>
             <a:spLocks noGrp="1" noRot="1" noChangeAspect="1"/>
           </p:cNvSpPr>
@@ -2512,7 +2513,7 @@
       </p:sp>
       <p:sp>
         <p:nvSpPr>
-          <p:cNvPr id="243" name="Google Shape;243;g3fa2f927997_0_0:notes"/>
+          <p:cNvPr id="244" name="Google Shape;244;g3fa2f927a9b_4_1:notes"/>
           <p:cNvSpPr txBox="1">
             <a:spLocks noGrp="1"/>
           </p:cNvSpPr>
@@ -2569,7 +2570,7 @@
   <p:cSld>
     <p:spTree>
       <p:nvGrpSpPr>
-        <p:cNvPr id="1" name="Shape 249"/>
+        <p:cNvPr id="1" name="Shape 251"/>
         <p:cNvGrpSpPr/>
         <p:nvPr/>
       </p:nvGrpSpPr>
@@ -2583,7 +2584,7 @@
       </p:grpSpPr>
       <p:sp>
         <p:nvSpPr>
-          <p:cNvPr id="250" name="Google Shape;250;g3fa4328c9aa_1_1:notes"/>
+          <p:cNvPr id="252" name="Google Shape;252;g3fa2f927997_0_0:notes"/>
           <p:cNvSpPr>
             <a:spLocks noGrp="1" noRot="1" noChangeAspect="1"/>
           </p:cNvSpPr>
@@ -2634,7 +2635,7 @@
       </p:sp>
       <p:sp>
         <p:nvSpPr>
-          <p:cNvPr id="251" name="Google Shape;251;g3fa4328c9aa_1_1:notes"/>
+          <p:cNvPr id="253" name="Google Shape;253;g3fa2f927997_0_0:notes"/>
           <p:cNvSpPr txBox="1">
             <a:spLocks noGrp="1"/>
           </p:cNvSpPr>
@@ -2691,7 +2692,7 @@
   <p:cSld>
     <p:spTree>
       <p:nvGrpSpPr>
-        <p:cNvPr id="1" name="Shape 256"/>
+        <p:cNvPr id="1" name="Shape 259"/>
         <p:cNvGrpSpPr/>
         <p:nvPr/>
       </p:nvGrpSpPr>
@@ -2705,7 +2706,7 @@
       </p:grpSpPr>
       <p:sp>
         <p:nvSpPr>
-          <p:cNvPr id="257" name="Google Shape;257;g3f9c68837c6_1_104:notes"/>
+          <p:cNvPr id="260" name="Google Shape;260;g3fa4328c9aa_1_1:notes"/>
           <p:cNvSpPr>
             <a:spLocks noGrp="1" noRot="1" noChangeAspect="1"/>
           </p:cNvSpPr>
@@ -2756,7 +2757,7 @@
       </p:sp>
       <p:sp>
         <p:nvSpPr>
-          <p:cNvPr id="258" name="Google Shape;258;g3f9c68837c6_1_104:notes"/>
+          <p:cNvPr id="261" name="Google Shape;261;g3fa4328c9aa_1_1:notes"/>
           <p:cNvSpPr txBox="1">
             <a:spLocks noGrp="1"/>
           </p:cNvSpPr>
@@ -2827,7 +2828,7 @@
       </p:grpSpPr>
       <p:sp>
         <p:nvSpPr>
-          <p:cNvPr id="267" name="Google Shape;267;g3d971967e09_0_22:notes"/>
+          <p:cNvPr id="267" name="Google Shape;267;g3f9c68837c6_1_104:notes"/>
           <p:cNvSpPr>
             <a:spLocks noGrp="1" noRot="1" noChangeAspect="1"/>
           </p:cNvSpPr>
@@ -2878,7 +2879,7 @@
       </p:sp>
       <p:sp>
         <p:nvSpPr>
-          <p:cNvPr id="268" name="Google Shape;268;g3d971967e09_0_22:notes"/>
+          <p:cNvPr id="268" name="Google Shape;268;g3f9c68837c6_1_104:notes"/>
           <p:cNvSpPr txBox="1">
             <a:spLocks noGrp="1"/>
           </p:cNvSpPr>
@@ -2949,7 +2950,129 @@
       </p:grpSpPr>
       <p:sp>
         <p:nvSpPr>
-          <p:cNvPr id="277" name="Google Shape;277;g3d971967e09_0_31:notes"/>
+          <p:cNvPr id="277" name="Google Shape;277;g3d971967e09_0_22:notes"/>
+          <p:cNvSpPr>
+            <a:spLocks noGrp="1" noRot="1" noChangeAspect="1"/>
+          </p:cNvSpPr>
+          <p:nvPr>
+            <p:ph type="sldImg" idx="2"/>
+          </p:nvPr>
+        </p:nvSpPr>
+        <p:spPr>
+          <a:xfrm>
+            <a:off x="381000" y="685800"/>
+            <a:ext cx="6096000" cy="3429000"/>
+          </a:xfrm>
+          <a:custGeom>
+            <a:avLst/>
+            <a:gdLst/>
+            <a:ahLst/>
+            <a:cxnLst/>
+            <a:rect l="l" t="t" r="r" b="b"/>
+            <a:pathLst>
+              <a:path w="120000" h="120000" extrusionOk="0">
+                <a:moveTo>
+                  <a:pt x="0" y="0"/>
+                </a:moveTo>
+                <a:lnTo>
+                  <a:pt x="120000" y="0"/>
+                </a:lnTo>
+                <a:lnTo>
+                  <a:pt x="120000" y="120000"/>
+                </a:lnTo>
+                <a:lnTo>
+                  <a:pt x="0" y="120000"/>
+                </a:lnTo>
+                <a:close/>
+              </a:path>
+            </a:pathLst>
+          </a:custGeom>
+          <a:noFill/>
+          <a:ln w="9525" cap="flat" cmpd="sng">
+            <a:solidFill>
+              <a:srgbClr val="000000"/>
+            </a:solidFill>
+            <a:prstDash val="solid"/>
+            <a:round/>
+            <a:headEnd type="none" w="sm" len="sm"/>
+            <a:tailEnd type="none" w="sm" len="sm"/>
+          </a:ln>
+        </p:spPr>
+      </p:sp>
+      <p:sp>
+        <p:nvSpPr>
+          <p:cNvPr id="278" name="Google Shape;278;g3d971967e09_0_22:notes"/>
+          <p:cNvSpPr txBox="1">
+            <a:spLocks noGrp="1"/>
+          </p:cNvSpPr>
+          <p:nvPr>
+            <p:ph type="body" idx="1"/>
+          </p:nvPr>
+        </p:nvSpPr>
+        <p:spPr>
+          <a:xfrm>
+            <a:off x="685800" y="4343400"/>
+            <a:ext cx="5486400" cy="4114800"/>
+          </a:xfrm>
+          <a:prstGeom prst="rect">
+            <a:avLst/>
+          </a:prstGeom>
+          <a:noFill/>
+          <a:ln>
+            <a:noFill/>
+          </a:ln>
+        </p:spPr>
+        <p:txBody>
+          <a:bodyPr spcFirstLastPara="1" wrap="square" lIns="91425" tIns="91425" rIns="91425" bIns="91425" anchor="t" anchorCtr="0">
+            <a:noAutofit/>
+          </a:bodyPr>
+          <a:lstStyle/>
+          <a:p>
+            <a:pPr marL="0" lvl="0" indent="0" algn="l" rtl="0">
+              <a:lnSpc>
+                <a:spcPct val="100000"/>
+              </a:lnSpc>
+              <a:spcBef>
+                <a:spcPts val="0"/>
+              </a:spcBef>
+              <a:spcAft>
+                <a:spcPts val="0"/>
+              </a:spcAft>
+              <a:buSzPts val="1100"/>
+              <a:buNone/>
+            </a:pPr>
+            <a:endParaRPr/>
+          </a:p>
+        </p:txBody>
+      </p:sp>
+    </p:spTree>
+  </p:cSld>
+  <p:clrMapOvr>
+    <a:masterClrMapping/>
+  </p:clrMapOvr>
+</p:notes>
+</file>
+
+<file path=ppt/notesSlides/notesSlide26.xml><?xml version="1.0" encoding="utf-8"?>
+<p:notes xmlns:a="http://schemas.openxmlformats.org/drawingml/2006/main" xmlns:r="http://schemas.openxmlformats.org/officeDocument/2006/relationships" xmlns:p="http://schemas.openxmlformats.org/presentationml/2006/main" showMasterSp="0" showMasterPhAnim="0">
+  <p:cSld>
+    <p:spTree>
+      <p:nvGrpSpPr>
+        <p:cNvPr id="1" name="Shape 286"/>
+        <p:cNvGrpSpPr/>
+        <p:nvPr/>
+      </p:nvGrpSpPr>
+      <p:grpSpPr>
+        <a:xfrm>
+          <a:off x="0" y="0"/>
+          <a:ext cx="0" cy="0"/>
+          <a:chOff x="0" y="0"/>
+          <a:chExt cx="0" cy="0"/>
+        </a:xfrm>
+      </p:grpSpPr>
+      <p:sp>
+        <p:nvSpPr>
+          <p:cNvPr id="287" name="Google Shape;287;g3d971967e09_0_31:notes"/>
           <p:cNvSpPr>
             <a:spLocks noGrp="1" noRot="1" noChangeAspect="1"/>
           </p:cNvSpPr>
@@ -3000,7 +3123,7 @@
       </p:sp>
       <p:sp>
         <p:nvSpPr>
-          <p:cNvPr id="278" name="Google Shape;278;g3d971967e09_0_31:notes"/>
+          <p:cNvPr id="288" name="Google Shape;288;g3d971967e09_0_31:notes"/>
           <p:cNvSpPr txBox="1">
             <a:spLocks noGrp="1"/>
           </p:cNvSpPr>
@@ -3057,7 +3180,7 @@
   <p:cSld>
     <p:spTree>
       <p:nvGrpSpPr>
-        <p:cNvPr id="1" name="Shape 83"/>
+        <p:cNvPr id="1" name="Shape 82"/>
         <p:cNvGrpSpPr/>
         <p:nvPr/>
       </p:nvGrpSpPr>
@@ -3071,7 +3194,7 @@
       </p:grpSpPr>
       <p:sp>
         <p:nvSpPr>
-          <p:cNvPr id="84" name="Google Shape;84;g3f9c68837c6_1_43:notes"/>
+          <p:cNvPr id="83" name="Google Shape;83;g3f9c68837c6_1_43:notes"/>
           <p:cNvSpPr>
             <a:spLocks noGrp="1" noRot="1" noChangeAspect="1"/>
           </p:cNvSpPr>
@@ -3122,7 +3245,7 @@
       </p:sp>
       <p:sp>
         <p:nvSpPr>
-          <p:cNvPr id="85" name="Google Shape;85;g3f9c68837c6_1_43:notes"/>
+          <p:cNvPr id="84" name="Google Shape;84;g3f9c68837c6_1_43:notes"/>
           <p:cNvSpPr txBox="1">
             <a:spLocks noGrp="1"/>
           </p:cNvSpPr>
@@ -3179,7 +3302,7 @@
   <p:cSld>
     <p:spTree>
       <p:nvGrpSpPr>
-        <p:cNvPr id="1" name="Shape 91"/>
+        <p:cNvPr id="1" name="Shape 90"/>
         <p:cNvGrpSpPr/>
         <p:nvPr/>
       </p:nvGrpSpPr>
@@ -3193,7 +3316,7 @@
       </p:grpSpPr>
       <p:sp>
         <p:nvSpPr>
-          <p:cNvPr id="92" name="Google Shape;92;g3fa39880284_0_0:notes"/>
+          <p:cNvPr id="91" name="Google Shape;91;g3fa39880284_0_0:notes"/>
           <p:cNvSpPr>
             <a:spLocks noGrp="1" noRot="1" noChangeAspect="1"/>
           </p:cNvSpPr>
@@ -3244,7 +3367,7 @@
       </p:sp>
       <p:sp>
         <p:nvSpPr>
-          <p:cNvPr id="93" name="Google Shape;93;g3fa39880284_0_0:notes"/>
+          <p:cNvPr id="92" name="Google Shape;92;g3fa39880284_0_0:notes"/>
           <p:cNvSpPr txBox="1">
             <a:spLocks noGrp="1"/>
           </p:cNvSpPr>
@@ -3301,7 +3424,7 @@
   <p:cSld>
     <p:spTree>
       <p:nvGrpSpPr>
-        <p:cNvPr id="1" name="Shape 100"/>
+        <p:cNvPr id="1" name="Shape 99"/>
         <p:cNvGrpSpPr/>
         <p:nvPr/>
       </p:nvGrpSpPr>
@@ -3315,7 +3438,7 @@
       </p:grpSpPr>
       <p:sp>
         <p:nvSpPr>
-          <p:cNvPr id="101" name="Google Shape;101;g3fa8c0fa4c4_0_0:notes"/>
+          <p:cNvPr id="100" name="Google Shape;100;g3fa8c0fa4c4_0_0:notes"/>
           <p:cNvSpPr>
             <a:spLocks noGrp="1" noRot="1" noChangeAspect="1"/>
           </p:cNvSpPr>
@@ -3366,7 +3489,7 @@
       </p:sp>
       <p:sp>
         <p:nvSpPr>
-          <p:cNvPr id="102" name="Google Shape;102;g3fa8c0fa4c4_0_0:notes"/>
+          <p:cNvPr id="101" name="Google Shape;101;g3fa8c0fa4c4_0_0:notes"/>
           <p:cNvSpPr txBox="1">
             <a:spLocks noGrp="1"/>
           </p:cNvSpPr>
@@ -3423,7 +3546,7 @@
   <p:cSld>
     <p:spTree>
       <p:nvGrpSpPr>
-        <p:cNvPr id="1" name="Shape 110"/>
+        <p:cNvPr id="1" name="Shape 109"/>
         <p:cNvGrpSpPr/>
         <p:nvPr/>
       </p:nvGrpSpPr>
@@ -3437,7 +3560,7 @@
       </p:grpSpPr>
       <p:sp>
         <p:nvSpPr>
-          <p:cNvPr id="111" name="Google Shape;111;g3f3fd832125_1_0:notes"/>
+          <p:cNvPr id="110" name="Google Shape;110;g3f3fd832125_1_0:notes"/>
           <p:cNvSpPr>
             <a:spLocks noGrp="1" noRot="1" noChangeAspect="1"/>
           </p:cNvSpPr>
@@ -3488,7 +3611,7 @@
       </p:sp>
       <p:sp>
         <p:nvSpPr>
-          <p:cNvPr id="112" name="Google Shape;112;g3f3fd832125_1_0:notes"/>
+          <p:cNvPr id="111" name="Google Shape;111;g3f3fd832125_1_0:notes"/>
           <p:cNvSpPr txBox="1">
             <a:spLocks noGrp="1"/>
           </p:cNvSpPr>
@@ -3545,7 +3668,7 @@
   <p:cSld>
     <p:spTree>
       <p:nvGrpSpPr>
-        <p:cNvPr id="1" name="Shape 118"/>
+        <p:cNvPr id="1" name="Shape 117"/>
         <p:cNvGrpSpPr/>
         <p:nvPr/>
       </p:nvGrpSpPr>
@@ -3559,7 +3682,7 @@
       </p:grpSpPr>
       <p:sp>
         <p:nvSpPr>
-          <p:cNvPr id="119" name="Google Shape;119;g3fa398801a7_0_0:notes"/>
+          <p:cNvPr id="118" name="Google Shape;118;g3fa398801a7_0_0:notes"/>
           <p:cNvSpPr>
             <a:spLocks noGrp="1" noRot="1" noChangeAspect="1"/>
           </p:cNvSpPr>
@@ -3610,7 +3733,7 @@
       </p:sp>
       <p:sp>
         <p:nvSpPr>
-          <p:cNvPr id="120" name="Google Shape;120;g3fa398801a7_0_0:notes"/>
+          <p:cNvPr id="119" name="Google Shape;119;g3fa398801a7_0_0:notes"/>
           <p:cNvSpPr txBox="1">
             <a:spLocks noGrp="1"/>
           </p:cNvSpPr>
@@ -3667,7 +3790,7 @@
   <p:cSld>
     <p:spTree>
       <p:nvGrpSpPr>
-        <p:cNvPr id="1" name="Shape 125"/>
+        <p:cNvPr id="1" name="Shape 126"/>
         <p:cNvGrpSpPr/>
         <p:nvPr/>
       </p:nvGrpSpPr>
@@ -3681,7 +3804,7 @@
       </p:grpSpPr>
       <p:sp>
         <p:nvSpPr>
-          <p:cNvPr id="126" name="Google Shape;126;g3fa96725244_1_0:notes"/>
+          <p:cNvPr id="127" name="Google Shape;127;g3fa96725244_1_0:notes"/>
           <p:cNvSpPr>
             <a:spLocks noGrp="1" noRot="1" noChangeAspect="1"/>
           </p:cNvSpPr>
@@ -3732,7 +3855,7 @@
       </p:sp>
       <p:sp>
         <p:nvSpPr>
-          <p:cNvPr id="127" name="Google Shape;127;g3fa96725244_1_0:notes"/>
+          <p:cNvPr id="128" name="Google Shape;128;g3fa96725244_1_0:notes"/>
           <p:cNvSpPr txBox="1">
             <a:spLocks noGrp="1"/>
           </p:cNvSpPr>
@@ -3789,7 +3912,7 @@
   <p:cSld>
     <p:spTree>
       <p:nvGrpSpPr>
-        <p:cNvPr id="1" name="Shape 136"/>
+        <p:cNvPr id="1" name="Shape 137"/>
         <p:cNvGrpSpPr/>
         <p:nvPr/>
       </p:nvGrpSpPr>
@@ -3803,7 +3926,7 @@
       </p:grpSpPr>
       <p:sp>
         <p:nvSpPr>
-          <p:cNvPr id="137" name="Google Shape;137;g3f53f467686_0_0:notes"/>
+          <p:cNvPr id="138" name="Google Shape;138;g3faa0e54241_5_2:notes"/>
           <p:cNvSpPr>
             <a:spLocks noGrp="1" noRot="1" noChangeAspect="1"/>
           </p:cNvSpPr>
@@ -3854,7 +3977,7 @@
       </p:sp>
       <p:sp>
         <p:nvSpPr>
-          <p:cNvPr id="138" name="Google Shape;138;g3f53f467686_0_0:notes"/>
+          <p:cNvPr id="139" name="Google Shape;139;g3faa0e54241_5_2:notes"/>
           <p:cNvSpPr txBox="1">
             <a:spLocks noGrp="1"/>
           </p:cNvSpPr>
@@ -13304,7 +13427,7 @@
         <p:spPr>
           <a:xfrm>
             <a:off x="100175" y="465928"/>
-            <a:ext cx="3307800" cy="2388900"/>
+            <a:ext cx="3307800" cy="2819700"/>
           </a:xfrm>
           <a:prstGeom prst="rect">
             <a:avLst/>
@@ -13675,6 +13798,46 @@
                 <a:cs typeface="Calibri"/>
                 <a:sym typeface="Calibri"/>
               </a:rPr>
+              <a:t>OpenAI ChatGPT Images 2.5</a:t>
+            </a:r>
+            <a:endParaRPr b="1">
+              <a:solidFill>
+                <a:srgbClr val="3C78D8"/>
+              </a:solidFill>
+              <a:latin typeface="Calibri"/>
+              <a:ea typeface="Calibri"/>
+              <a:cs typeface="Calibri"/>
+              <a:sym typeface="Calibri"/>
+            </a:endParaRPr>
+          </a:p>
+          <a:p>
+            <a:pPr marL="228600" marR="0" lvl="0" indent="-203200" algn="l" rtl="0">
+              <a:lnSpc>
+                <a:spcPct val="100000"/>
+              </a:lnSpc>
+              <a:spcBef>
+                <a:spcPts val="0"/>
+              </a:spcBef>
+              <a:spcAft>
+                <a:spcPts val="0"/>
+              </a:spcAft>
+              <a:buClr>
+                <a:srgbClr val="3C78D8"/>
+              </a:buClr>
+              <a:buSzPts val="1400"/>
+              <a:buFont typeface="Calibri"/>
+              <a:buChar char="●"/>
+            </a:pPr>
+            <a:r>
+              <a:rPr lang="en" b="1">
+                <a:solidFill>
+                  <a:srgbClr val="3C78D8"/>
+                </a:solidFill>
+                <a:latin typeface="Calibri"/>
+                <a:ea typeface="Calibri"/>
+                <a:cs typeface="Calibri"/>
+                <a:sym typeface="Calibri"/>
+              </a:rPr>
               <a:t>OpenAI solves Navier–Stokes Problem</a:t>
             </a:r>
             <a:endParaRPr b="1">
@@ -13756,6 +13919,46 @@
                 <a:sym typeface="Calibri"/>
               </a:rPr>
               <a:t>AI Safety Problem - auto-improvement</a:t>
+            </a:r>
+            <a:endParaRPr b="1">
+              <a:solidFill>
+                <a:srgbClr val="3C78D8"/>
+              </a:solidFill>
+              <a:latin typeface="Calibri"/>
+              <a:ea typeface="Calibri"/>
+              <a:cs typeface="Calibri"/>
+              <a:sym typeface="Calibri"/>
+            </a:endParaRPr>
+          </a:p>
+          <a:p>
+            <a:pPr marL="228600" marR="0" lvl="0" indent="-203200" algn="l" rtl="0">
+              <a:lnSpc>
+                <a:spcPct val="100000"/>
+              </a:lnSpc>
+              <a:spcBef>
+                <a:spcPts val="0"/>
+              </a:spcBef>
+              <a:spcAft>
+                <a:spcPts val="0"/>
+              </a:spcAft>
+              <a:buClr>
+                <a:srgbClr val="3C78D8"/>
+              </a:buClr>
+              <a:buSzPts val="1400"/>
+              <a:buFont typeface="Calibri"/>
+              <a:buChar char="●"/>
+            </a:pPr>
+            <a:r>
+              <a:rPr lang="en" b="1">
+                <a:solidFill>
+                  <a:srgbClr val="3C78D8"/>
+                </a:solidFill>
+                <a:latin typeface="Calibri"/>
+                <a:ea typeface="Calibri"/>
+                <a:cs typeface="Calibri"/>
+                <a:sym typeface="Calibri"/>
+              </a:rPr>
+              <a:t>Embodied AI</a:t>
             </a:r>
             <a:endParaRPr b="1">
               <a:solidFill>
@@ -13843,7 +14046,7 @@
         </p:nvSpPr>
         <p:spPr>
           <a:xfrm>
-            <a:off x="6425925" y="4352950"/>
+            <a:off x="3499425" y="4753000"/>
             <a:ext cx="2600700" cy="234000"/>
           </a:xfrm>
           <a:prstGeom prst="rect">
@@ -13978,8 +14181,8 @@
         </p:nvSpPr>
         <p:spPr>
           <a:xfrm>
-            <a:off x="3499425" y="1433700"/>
-            <a:ext cx="2853600" cy="3250800"/>
+            <a:off x="3499425" y="1025050"/>
+            <a:ext cx="2901300" cy="3466200"/>
           </a:xfrm>
           <a:prstGeom prst="rect">
             <a:avLst/>
@@ -14030,6 +14233,86 @@
                 <a:cs typeface="Calibri"/>
                 <a:sym typeface="Calibri"/>
               </a:rPr>
+              <a:t>Cursor - Your Cloud Agents</a:t>
+            </a:r>
+            <a:endParaRPr b="1">
+              <a:solidFill>
+                <a:srgbClr val="3C78D8"/>
+              </a:solidFill>
+              <a:latin typeface="Calibri"/>
+              <a:ea typeface="Calibri"/>
+              <a:cs typeface="Calibri"/>
+              <a:sym typeface="Calibri"/>
+            </a:endParaRPr>
+          </a:p>
+          <a:p>
+            <a:pPr marL="228600" marR="0" lvl="0" indent="-203200" algn="l" rtl="0">
+              <a:lnSpc>
+                <a:spcPct val="100000"/>
+              </a:lnSpc>
+              <a:spcBef>
+                <a:spcPts val="0"/>
+              </a:spcBef>
+              <a:spcAft>
+                <a:spcPts val="0"/>
+              </a:spcAft>
+              <a:buClr>
+                <a:srgbClr val="3C78D8"/>
+              </a:buClr>
+              <a:buSzPts val="1400"/>
+              <a:buFont typeface="Calibri"/>
+              <a:buChar char="●"/>
+            </a:pPr>
+            <a:r>
+              <a:rPr lang="en" b="1">
+                <a:solidFill>
+                  <a:srgbClr val="3C78D8"/>
+                </a:solidFill>
+                <a:latin typeface="Calibri"/>
+                <a:ea typeface="Calibri"/>
+                <a:cs typeface="Calibri"/>
+                <a:sym typeface="Calibri"/>
+              </a:rPr>
+              <a:t>Trump Restricts Chinese Infra Parts</a:t>
+            </a:r>
+            <a:endParaRPr b="1">
+              <a:solidFill>
+                <a:srgbClr val="3C78D8"/>
+              </a:solidFill>
+              <a:latin typeface="Calibri"/>
+              <a:ea typeface="Calibri"/>
+              <a:cs typeface="Calibri"/>
+              <a:sym typeface="Calibri"/>
+            </a:endParaRPr>
+          </a:p>
+          <a:p>
+            <a:pPr marL="228600" marR="0" lvl="0" indent="-203200" algn="l" rtl="0">
+              <a:lnSpc>
+                <a:spcPct val="100000"/>
+              </a:lnSpc>
+              <a:spcBef>
+                <a:spcPts val="0"/>
+              </a:spcBef>
+              <a:spcAft>
+                <a:spcPts val="0"/>
+              </a:spcAft>
+              <a:buClr>
+                <a:srgbClr val="3C78D8"/>
+              </a:buClr>
+              <a:buSzPts val="1400"/>
+              <a:buFont typeface="Calibri"/>
+              <a:buChar char="●"/>
+            </a:pPr>
+            <a:r>
+              <a:rPr lang="en" b="1">
+                <a:solidFill>
+                  <a:srgbClr val="3C78D8"/>
+                </a:solidFill>
+                <a:latin typeface="Calibri"/>
+                <a:ea typeface="Calibri"/>
+                <a:cs typeface="Calibri"/>
+                <a:sym typeface="Calibri"/>
+              </a:rPr>
               <a:t>AT&amp;T Uses Cheap China Models</a:t>
             </a:r>
             <a:endParaRPr b="1">
@@ -14552,34 +14835,6 @@
               </a:rPr>
               <a:t>GinAR Forecasting For Trading</a:t>
             </a:r>
-            <a:endParaRPr b="1">
-              <a:solidFill>
-                <a:srgbClr val="3C78D8"/>
-              </a:solidFill>
-              <a:latin typeface="Calibri"/>
-              <a:ea typeface="Calibri"/>
-              <a:cs typeface="Calibri"/>
-              <a:sym typeface="Calibri"/>
-            </a:endParaRPr>
-          </a:p>
-          <a:p>
-            <a:pPr marL="228600" marR="0" lvl="0" indent="-203200" algn="l" rtl="0">
-              <a:lnSpc>
-                <a:spcPct val="100000"/>
-              </a:lnSpc>
-              <a:spcBef>
-                <a:spcPts val="0"/>
-              </a:spcBef>
-              <a:spcAft>
-                <a:spcPts val="0"/>
-              </a:spcAft>
-              <a:buClr>
-                <a:srgbClr val="3C78D8"/>
-              </a:buClr>
-              <a:buSzPts val="1400"/>
-              <a:buFont typeface="Calibri"/>
-              <a:buChar char="●"/>
-            </a:pPr>
             <a:endParaRPr b="1">
               <a:solidFill>
                 <a:srgbClr val="3C78D8"/>
@@ -14600,8 +14855,8 @@
         </p:nvSpPr>
         <p:spPr>
           <a:xfrm>
-            <a:off x="100175" y="2952795"/>
-            <a:ext cx="3307800" cy="1957800"/>
+            <a:off x="118725" y="3395353"/>
+            <a:ext cx="3307800" cy="1527000"/>
           </a:xfrm>
           <a:prstGeom prst="rect">
             <a:avLst/>
@@ -14893,160 +15148,6 @@
                 <a:sym typeface="Calibri"/>
               </a:rPr>
               <a:t>Crusoe raises $3 Bln at $30 Bln Valuation</a:t>
-            </a:r>
-            <a:endParaRPr b="1">
-              <a:solidFill>
-                <a:srgbClr val="3C78D8"/>
-              </a:solidFill>
-              <a:latin typeface="Calibri"/>
-              <a:ea typeface="Calibri"/>
-              <a:cs typeface="Calibri"/>
-              <a:sym typeface="Calibri"/>
-            </a:endParaRPr>
-          </a:p>
-          <a:p>
-            <a:pPr marL="228600" marR="0" lvl="0" indent="-203200" algn="l" rtl="0">
-              <a:lnSpc>
-                <a:spcPct val="100000"/>
-              </a:lnSpc>
-              <a:spcBef>
-                <a:spcPts val="0"/>
-              </a:spcBef>
-              <a:spcAft>
-                <a:spcPts val="0"/>
-              </a:spcAft>
-              <a:buClr>
-                <a:srgbClr val="3C78D8"/>
-              </a:buClr>
-              <a:buSzPts val="1400"/>
-              <a:buFont typeface="Calibri"/>
-              <a:buChar char="●"/>
-            </a:pPr>
-            <a:r>
-              <a:rPr lang="en" b="1">
-                <a:solidFill>
-                  <a:srgbClr val="3C78D8"/>
-                </a:solidFill>
-                <a:latin typeface="Calibri"/>
-                <a:ea typeface="Calibri"/>
-                <a:cs typeface="Calibri"/>
-                <a:sym typeface="Calibri"/>
-              </a:rPr>
-              <a:t>Cursor - Your Self-Hosted Cloud Agents</a:t>
-            </a:r>
-            <a:endParaRPr b="1">
-              <a:solidFill>
-                <a:srgbClr val="3C78D8"/>
-              </a:solidFill>
-              <a:latin typeface="Calibri"/>
-              <a:ea typeface="Calibri"/>
-              <a:cs typeface="Calibri"/>
-              <a:sym typeface="Calibri"/>
-            </a:endParaRPr>
-          </a:p>
-          <a:p>
-            <a:pPr marL="228600" marR="0" lvl="0" indent="-203200" algn="l" rtl="0">
-              <a:lnSpc>
-                <a:spcPct val="100000"/>
-              </a:lnSpc>
-              <a:spcBef>
-                <a:spcPts val="0"/>
-              </a:spcBef>
-              <a:spcAft>
-                <a:spcPts val="0"/>
-              </a:spcAft>
-              <a:buClr>
-                <a:srgbClr val="3C78D8"/>
-              </a:buClr>
-              <a:buSzPts val="1400"/>
-              <a:buFont typeface="Calibri"/>
-              <a:buChar char="●"/>
-            </a:pPr>
-            <a:r>
-              <a:rPr lang="en" b="1">
-                <a:solidFill>
-                  <a:srgbClr val="3C78D8"/>
-                </a:solidFill>
-                <a:latin typeface="Calibri"/>
-                <a:ea typeface="Calibri"/>
-                <a:cs typeface="Calibri"/>
-                <a:sym typeface="Calibri"/>
-              </a:rPr>
-              <a:t>Trump Restricts Chinese Infra Parts</a:t>
-            </a:r>
-            <a:endParaRPr b="1">
-              <a:solidFill>
-                <a:srgbClr val="3C78D8"/>
-              </a:solidFill>
-              <a:latin typeface="Calibri"/>
-              <a:ea typeface="Calibri"/>
-              <a:cs typeface="Calibri"/>
-              <a:sym typeface="Calibri"/>
-            </a:endParaRPr>
-          </a:p>
-        </p:txBody>
-      </p:sp>
-      <p:sp>
-        <p:nvSpPr>
-          <p:cNvPr id="69" name="Google Shape;69;p15"/>
-          <p:cNvSpPr txBox="1"/>
-          <p:nvPr/>
-        </p:nvSpPr>
-        <p:spPr>
-          <a:xfrm>
-            <a:off x="6425925" y="1899125"/>
-            <a:ext cx="2600700" cy="234000"/>
-          </a:xfrm>
-          <a:prstGeom prst="rect">
-            <a:avLst/>
-          </a:prstGeom>
-          <a:solidFill>
-            <a:srgbClr val="FFF2CC"/>
-          </a:solidFill>
-          <a:ln w="9525" cap="flat" cmpd="sng">
-            <a:solidFill>
-              <a:srgbClr val="FF0000"/>
-            </a:solidFill>
-            <a:prstDash val="solid"/>
-            <a:round/>
-            <a:headEnd type="none" w="sm" len="sm"/>
-            <a:tailEnd type="none" w="sm" len="sm"/>
-          </a:ln>
-        </p:spPr>
-        <p:txBody>
-          <a:bodyPr spcFirstLastPara="1" wrap="square" lIns="9125" tIns="9125" rIns="9125" bIns="9125" anchor="t" anchorCtr="0">
-            <a:spAutoFit/>
-          </a:bodyPr>
-          <a:lstStyle/>
-          <a:p>
-            <a:pPr marL="228600" marR="0" lvl="0" indent="-203200" algn="l" rtl="0">
-              <a:lnSpc>
-                <a:spcPct val="100000"/>
-              </a:lnSpc>
-              <a:spcBef>
-                <a:spcPts val="0"/>
-              </a:spcBef>
-              <a:spcAft>
-                <a:spcPts val="0"/>
-              </a:spcAft>
-              <a:buClr>
-                <a:srgbClr val="3C78D8"/>
-              </a:buClr>
-              <a:buSzPts val="1400"/>
-              <a:buFont typeface="Calibri"/>
-              <a:buChar char="●"/>
-            </a:pPr>
-            <a:r>
-              <a:rPr lang="en" b="1">
-                <a:solidFill>
-                  <a:srgbClr val="3C78D8"/>
-                </a:solidFill>
-                <a:latin typeface="Calibri"/>
-                <a:ea typeface="Calibri"/>
-                <a:cs typeface="Calibri"/>
-                <a:sym typeface="Calibri"/>
-              </a:rPr>
-              <a:t>xxx</a:t>
             </a:r>
             <a:endParaRPr b="1">
               <a:solidFill>
@@ -15073,7 +15174,7 @@
   <p:cSld>
     <p:spTree>
       <p:nvGrpSpPr>
-        <p:cNvPr id="1" name="Shape 146"/>
+        <p:cNvPr id="1" name="Shape 149"/>
         <p:cNvGrpSpPr/>
         <p:nvPr/>
       </p:nvGrpSpPr>
@@ -15087,7 +15188,447 @@
       </p:grpSpPr>
       <p:sp>
         <p:nvSpPr>
-          <p:cNvPr id="147" name="Google Shape;147;p24"/>
+          <p:cNvPr id="150" name="Google Shape;150;p24"/>
+          <p:cNvSpPr txBox="1"/>
+          <p:nvPr/>
+        </p:nvSpPr>
+        <p:spPr>
+          <a:xfrm>
+            <a:off x="102375" y="478350"/>
+            <a:ext cx="4161900" cy="4186800"/>
+          </a:xfrm>
+          <a:prstGeom prst="rect">
+            <a:avLst/>
+          </a:prstGeom>
+          <a:solidFill>
+            <a:srgbClr val="FFF2CC"/>
+          </a:solidFill>
+          <a:ln w="9525" cap="flat" cmpd="sng">
+            <a:solidFill>
+              <a:srgbClr val="FF0000"/>
+            </a:solidFill>
+            <a:prstDash val="solid"/>
+            <a:round/>
+            <a:headEnd type="none" w="sm" len="sm"/>
+            <a:tailEnd type="none" w="sm" len="sm"/>
+          </a:ln>
+        </p:spPr>
+        <p:txBody>
+          <a:bodyPr spcFirstLastPara="1" wrap="square" lIns="91425" tIns="91425" rIns="91425" bIns="91425" anchor="t" anchorCtr="0">
+            <a:spAutoFit/>
+          </a:bodyPr>
+          <a:lstStyle/>
+          <a:p>
+            <a:pPr marL="0" marR="0" lvl="0" indent="0" algn="l" rtl="0">
+              <a:lnSpc>
+                <a:spcPct val="100000"/>
+              </a:lnSpc>
+              <a:spcBef>
+                <a:spcPts val="0"/>
+              </a:spcBef>
+              <a:spcAft>
+                <a:spcPts val="0"/>
+              </a:spcAft>
+              <a:buClr>
+                <a:schemeClr val="dk1"/>
+              </a:buClr>
+              <a:buSzPts val="2500"/>
+              <a:buFont typeface="Arial"/>
+              <a:buNone/>
+            </a:pPr>
+            <a:r>
+              <a:rPr lang="en" sz="2200">
+                <a:solidFill>
+                  <a:schemeClr val="dk1"/>
+                </a:solidFill>
+                <a:latin typeface="Calibri"/>
+                <a:ea typeface="Calibri"/>
+                <a:cs typeface="Calibri"/>
+                <a:sym typeface="Calibri"/>
+              </a:rPr>
+              <a:t>Weekly videos every Friday</a:t>
+            </a:r>
+            <a:endParaRPr sz="2200">
+              <a:solidFill>
+                <a:schemeClr val="dk1"/>
+              </a:solidFill>
+              <a:latin typeface="Calibri"/>
+              <a:ea typeface="Calibri"/>
+              <a:cs typeface="Calibri"/>
+              <a:sym typeface="Calibri"/>
+            </a:endParaRPr>
+          </a:p>
+          <a:p>
+            <a:pPr marL="0" lvl="0" indent="0" algn="l" rtl="0">
+              <a:spcBef>
+                <a:spcPts val="0"/>
+              </a:spcBef>
+              <a:spcAft>
+                <a:spcPts val="0"/>
+              </a:spcAft>
+              <a:buClr>
+                <a:schemeClr val="dk1"/>
+              </a:buClr>
+              <a:buSzPts val="2500"/>
+              <a:buFont typeface="Arial"/>
+              <a:buNone/>
+            </a:pPr>
+            <a:r>
+              <a:rPr lang="en" sz="2200">
+                <a:solidFill>
+                  <a:schemeClr val="dk1"/>
+                </a:solidFill>
+                <a:latin typeface="Calibri"/>
+                <a:ea typeface="Calibri"/>
+                <a:cs typeface="Calibri"/>
+                <a:sym typeface="Calibri"/>
+              </a:rPr>
+              <a:t>7.46K subscribers, 333 videos</a:t>
+            </a:r>
+            <a:endParaRPr sz="2200">
+              <a:solidFill>
+                <a:schemeClr val="dk1"/>
+              </a:solidFill>
+              <a:latin typeface="Calibri"/>
+              <a:ea typeface="Calibri"/>
+              <a:cs typeface="Calibri"/>
+              <a:sym typeface="Calibri"/>
+            </a:endParaRPr>
+          </a:p>
+          <a:p>
+            <a:pPr marL="0" marR="0" lvl="0" indent="0" algn="l" rtl="0">
+              <a:lnSpc>
+                <a:spcPct val="100000"/>
+              </a:lnSpc>
+              <a:spcBef>
+                <a:spcPts val="0"/>
+              </a:spcBef>
+              <a:spcAft>
+                <a:spcPts val="0"/>
+              </a:spcAft>
+              <a:buClr>
+                <a:schemeClr val="dk1"/>
+              </a:buClr>
+              <a:buSzPts val="2500"/>
+              <a:buFont typeface="Arial"/>
+              <a:buNone/>
+            </a:pPr>
+            <a:endParaRPr sz="2200">
+              <a:solidFill>
+                <a:schemeClr val="dk1"/>
+              </a:solidFill>
+              <a:latin typeface="Calibri"/>
+              <a:ea typeface="Calibri"/>
+              <a:cs typeface="Calibri"/>
+              <a:sym typeface="Calibri"/>
+            </a:endParaRPr>
+          </a:p>
+          <a:p>
+            <a:pPr marL="0" lvl="0" indent="0" algn="l" rtl="0">
+              <a:spcBef>
+                <a:spcPts val="0"/>
+              </a:spcBef>
+              <a:spcAft>
+                <a:spcPts val="0"/>
+              </a:spcAft>
+              <a:buClr>
+                <a:schemeClr val="dk1"/>
+              </a:buClr>
+              <a:buSzPts val="2500"/>
+              <a:buFont typeface="Arial"/>
+              <a:buNone/>
+            </a:pPr>
+            <a:r>
+              <a:rPr lang="en" sz="2200">
+                <a:solidFill>
+                  <a:schemeClr val="dk1"/>
+                </a:solidFill>
+                <a:latin typeface="Calibri"/>
+                <a:ea typeface="Calibri"/>
+                <a:cs typeface="Calibri"/>
+                <a:sym typeface="Calibri"/>
+              </a:rPr>
+              <a:t>1. Subscribe to this channel </a:t>
+            </a:r>
+            <a:r>
+              <a:rPr lang="en" sz="1800" b="1" u="sng">
+                <a:solidFill>
+                  <a:schemeClr val="accent5"/>
+                </a:solidFill>
+                <a:latin typeface="Calibri"/>
+                <a:ea typeface="Calibri"/>
+                <a:cs typeface="Calibri"/>
+                <a:sym typeface="Calibri"/>
+                <a:hlinkClick r:id="rId3">
+                  <a:extLst>
+                    <a:ext uri="{A12FA001-AC4F-418D-AE19-62706E023703}">
+                      <ahyp:hlinkClr xmlns:ahyp="http://schemas.microsoft.com/office/drawing/2018/hyperlinkcolor" val="tx"/>
+                    </a:ext>
+                  </a:extLst>
+                </a:hlinkClick>
+              </a:rPr>
+              <a:t>https://www.youtube.com/@lev-selector</a:t>
+            </a:r>
+            <a:r>
+              <a:rPr lang="en" sz="1800" b="1">
+                <a:solidFill>
+                  <a:schemeClr val="dk1"/>
+                </a:solidFill>
+                <a:latin typeface="Calibri"/>
+                <a:ea typeface="Calibri"/>
+                <a:cs typeface="Calibri"/>
+                <a:sym typeface="Calibri"/>
+              </a:rPr>
+              <a:t> </a:t>
+            </a:r>
+            <a:endParaRPr sz="1800" b="1">
+              <a:solidFill>
+                <a:schemeClr val="dk1"/>
+              </a:solidFill>
+              <a:latin typeface="Calibri"/>
+              <a:ea typeface="Calibri"/>
+              <a:cs typeface="Calibri"/>
+              <a:sym typeface="Calibri"/>
+            </a:endParaRPr>
+          </a:p>
+          <a:p>
+            <a:pPr marL="0" marR="0" lvl="0" indent="0" algn="l" rtl="0">
+              <a:lnSpc>
+                <a:spcPct val="100000"/>
+              </a:lnSpc>
+              <a:spcBef>
+                <a:spcPts val="0"/>
+              </a:spcBef>
+              <a:spcAft>
+                <a:spcPts val="0"/>
+              </a:spcAft>
+              <a:buClr>
+                <a:schemeClr val="dk1"/>
+              </a:buClr>
+              <a:buSzPts val="2500"/>
+              <a:buFont typeface="Arial"/>
+              <a:buNone/>
+            </a:pPr>
+            <a:endParaRPr sz="2200">
+              <a:solidFill>
+                <a:schemeClr val="dk1"/>
+              </a:solidFill>
+              <a:latin typeface="Calibri"/>
+              <a:ea typeface="Calibri"/>
+              <a:cs typeface="Calibri"/>
+              <a:sym typeface="Calibri"/>
+            </a:endParaRPr>
+          </a:p>
+          <a:p>
+            <a:pPr marL="0" marR="0" lvl="0" indent="0" algn="l" rtl="0">
+              <a:lnSpc>
+                <a:spcPct val="100000"/>
+              </a:lnSpc>
+              <a:spcBef>
+                <a:spcPts val="0"/>
+              </a:spcBef>
+              <a:spcAft>
+                <a:spcPts val="0"/>
+              </a:spcAft>
+              <a:buClr>
+                <a:schemeClr val="dk1"/>
+              </a:buClr>
+              <a:buSzPts val="2500"/>
+              <a:buFont typeface="Arial"/>
+              <a:buNone/>
+            </a:pPr>
+            <a:r>
+              <a:rPr lang="en" sz="2200">
+                <a:solidFill>
+                  <a:schemeClr val="dk1"/>
+                </a:solidFill>
+                <a:latin typeface="Calibri"/>
+                <a:ea typeface="Calibri"/>
+                <a:cs typeface="Calibri"/>
+                <a:sym typeface="Calibri"/>
+              </a:rPr>
+              <a:t>2. Download slides from GitHub using links under the videos</a:t>
+            </a:r>
+            <a:endParaRPr sz="2200">
+              <a:solidFill>
+                <a:schemeClr val="dk1"/>
+              </a:solidFill>
+              <a:latin typeface="Calibri"/>
+              <a:ea typeface="Calibri"/>
+              <a:cs typeface="Calibri"/>
+              <a:sym typeface="Calibri"/>
+            </a:endParaRPr>
+          </a:p>
+          <a:p>
+            <a:pPr marL="0" lvl="0" indent="0" algn="l" rtl="0">
+              <a:spcBef>
+                <a:spcPts val="0"/>
+              </a:spcBef>
+              <a:spcAft>
+                <a:spcPts val="0"/>
+              </a:spcAft>
+              <a:buClr>
+                <a:schemeClr val="dk1"/>
+              </a:buClr>
+              <a:buSzPts val="2500"/>
+              <a:buFont typeface="Arial"/>
+              <a:buNone/>
+            </a:pPr>
+            <a:endParaRPr sz="2200">
+              <a:solidFill>
+                <a:schemeClr val="dk1"/>
+              </a:solidFill>
+              <a:latin typeface="Calibri"/>
+              <a:ea typeface="Calibri"/>
+              <a:cs typeface="Calibri"/>
+              <a:sym typeface="Calibri"/>
+            </a:endParaRPr>
+          </a:p>
+          <a:p>
+            <a:pPr marL="0" lvl="0" indent="0" algn="l" rtl="0">
+              <a:spcBef>
+                <a:spcPts val="0"/>
+              </a:spcBef>
+              <a:spcAft>
+                <a:spcPts val="0"/>
+              </a:spcAft>
+              <a:buClr>
+                <a:schemeClr val="dk1"/>
+              </a:buClr>
+              <a:buSzPts val="2500"/>
+              <a:buFont typeface="Arial"/>
+              <a:buNone/>
+            </a:pPr>
+            <a:r>
+              <a:rPr lang="en" sz="2200" b="1">
+                <a:solidFill>
+                  <a:srgbClr val="FF0000"/>
+                </a:solidFill>
+                <a:latin typeface="Calibri"/>
+                <a:ea typeface="Calibri"/>
+                <a:cs typeface="Calibri"/>
+                <a:sym typeface="Calibri"/>
+              </a:rPr>
+              <a:t>3. Please pause the video - and answer the pinned question in comments under the video</a:t>
+            </a:r>
+            <a:endParaRPr sz="1800" b="1" i="0" u="none" strike="noStrike" cap="none">
+              <a:solidFill>
+                <a:srgbClr val="FF0000"/>
+              </a:solidFill>
+              <a:latin typeface="Calibri"/>
+              <a:ea typeface="Calibri"/>
+              <a:cs typeface="Calibri"/>
+              <a:sym typeface="Calibri"/>
+            </a:endParaRPr>
+          </a:p>
+        </p:txBody>
+      </p:sp>
+      <p:pic>
+        <p:nvPicPr>
+          <p:cNvPr id="151" name="Google Shape;151;p24"/>
+          <p:cNvPicPr preferRelativeResize="0"/>
+          <p:nvPr/>
+        </p:nvPicPr>
+        <p:blipFill>
+          <a:blip r:embed="rId4" cstate="email">
+            <a:alphaModFix/>
+            <a:extLst>
+              <a:ext uri="{28A0092B-C50C-407E-A947-70E740481C1C}">
+                <a14:useLocalDpi xmlns:a14="http://schemas.microsoft.com/office/drawing/2010/main"/>
+              </a:ext>
+            </a:extLst>
+          </a:blip>
+          <a:stretch>
+            <a:fillRect/>
+          </a:stretch>
+        </p:blipFill>
+        <p:spPr>
+          <a:xfrm>
+            <a:off x="4349500" y="263775"/>
+            <a:ext cx="2461825" cy="3154225"/>
+          </a:xfrm>
+          <a:prstGeom prst="rect">
+            <a:avLst/>
+          </a:prstGeom>
+          <a:noFill/>
+          <a:ln w="9525" cap="flat" cmpd="sng">
+            <a:solidFill>
+              <a:srgbClr val="FF0000"/>
+            </a:solidFill>
+            <a:prstDash val="solid"/>
+            <a:round/>
+            <a:headEnd type="none" w="sm" len="sm"/>
+            <a:tailEnd type="none" w="sm" len="sm"/>
+          </a:ln>
+        </p:spPr>
+      </p:pic>
+      <p:pic>
+        <p:nvPicPr>
+          <p:cNvPr id="152" name="Google Shape;152;p24"/>
+          <p:cNvPicPr preferRelativeResize="0"/>
+          <p:nvPr/>
+        </p:nvPicPr>
+        <p:blipFill>
+          <a:blip r:embed="rId5" cstate="email">
+            <a:alphaModFix/>
+            <a:extLst>
+              <a:ext uri="{28A0092B-C50C-407E-A947-70E740481C1C}">
+                <a14:useLocalDpi xmlns:a14="http://schemas.microsoft.com/office/drawing/2010/main"/>
+              </a:ext>
+            </a:extLst>
+          </a:blip>
+          <a:stretch>
+            <a:fillRect/>
+          </a:stretch>
+        </p:blipFill>
+        <p:spPr>
+          <a:xfrm>
+            <a:off x="6896550" y="2823825"/>
+            <a:ext cx="2160975" cy="2243351"/>
+          </a:xfrm>
+          <a:prstGeom prst="rect">
+            <a:avLst/>
+          </a:prstGeom>
+          <a:noFill/>
+          <a:ln w="9525" cap="flat" cmpd="sng">
+            <a:solidFill>
+              <a:srgbClr val="FF0000"/>
+            </a:solidFill>
+            <a:prstDash val="solid"/>
+            <a:round/>
+            <a:headEnd type="none" w="sm" len="sm"/>
+            <a:tailEnd type="none" w="sm" len="sm"/>
+          </a:ln>
+        </p:spPr>
+      </p:pic>
+    </p:spTree>
+  </p:cSld>
+  <p:clrMapOvr>
+    <a:masterClrMapping/>
+  </p:clrMapOvr>
+</p:sld>
+</file>
+
+<file path=ppt/slides/slide11.xml><?xml version="1.0" encoding="utf-8"?>
+<p:sld xmlns:a="http://schemas.openxmlformats.org/drawingml/2006/main" xmlns:r="http://schemas.openxmlformats.org/officeDocument/2006/relationships" xmlns:p="http://schemas.openxmlformats.org/presentationml/2006/main">
+  <p:cSld>
+    <p:spTree>
+      <p:nvGrpSpPr>
+        <p:cNvPr id="1" name="Shape 156"/>
+        <p:cNvGrpSpPr/>
+        <p:nvPr/>
+      </p:nvGrpSpPr>
+      <p:grpSpPr>
+        <a:xfrm>
+          <a:off x="0" y="0"/>
+          <a:ext cx="0" cy="0"/>
+          <a:chOff x="0" y="0"/>
+          <a:chExt cx="0" cy="0"/>
+        </a:xfrm>
+      </p:grpSpPr>
+      <p:sp>
+        <p:nvSpPr>
+          <p:cNvPr id="157" name="Google Shape;157;p25"/>
           <p:cNvSpPr txBox="1"/>
           <p:nvPr/>
         </p:nvSpPr>
@@ -15153,7 +15694,7 @@
       </p:sp>
       <p:sp>
         <p:nvSpPr>
-          <p:cNvPr id="148" name="Google Shape;148;p24"/>
+          <p:cNvPr id="158" name="Google Shape;158;p25"/>
           <p:cNvSpPr txBox="1"/>
           <p:nvPr/>
         </p:nvSpPr>
@@ -15594,7 +16135,7 @@
       </p:sp>
       <p:pic>
         <p:nvPicPr>
-          <p:cNvPr id="149" name="Google Shape;149;p24"/>
+          <p:cNvPr id="159" name="Google Shape;159;p25"/>
           <p:cNvPicPr preferRelativeResize="0"/>
           <p:nvPr/>
         </p:nvPicPr>
@@ -15639,12 +16180,12 @@
 </p:sld>
 </file>
 
-<file path=ppt/slides/slide11.xml><?xml version="1.0" encoding="utf-8"?>
+<file path=ppt/slides/slide12.xml><?xml version="1.0" encoding="utf-8"?>
 <p:sld xmlns:a="http://schemas.openxmlformats.org/drawingml/2006/main" xmlns:r="http://schemas.openxmlformats.org/officeDocument/2006/relationships" xmlns:p="http://schemas.openxmlformats.org/presentationml/2006/main">
   <p:cSld>
     <p:spTree>
       <p:nvGrpSpPr>
-        <p:cNvPr id="1" name="Shape 153"/>
+        <p:cNvPr id="1" name="Shape 163"/>
         <p:cNvGrpSpPr/>
         <p:nvPr/>
       </p:nvGrpSpPr>
@@ -15658,7 +16199,7 @@
       </p:grpSpPr>
       <p:sp>
         <p:nvSpPr>
-          <p:cNvPr id="154" name="Google Shape;154;p25"/>
+          <p:cNvPr id="164" name="Google Shape;164;p26"/>
           <p:cNvSpPr txBox="1"/>
           <p:nvPr/>
         </p:nvSpPr>
@@ -15724,7 +16265,7 @@
       </p:sp>
       <p:sp>
         <p:nvSpPr>
-          <p:cNvPr id="155" name="Google Shape;155;p25"/>
+          <p:cNvPr id="165" name="Google Shape;165;p26"/>
           <p:cNvSpPr txBox="1"/>
           <p:nvPr/>
         </p:nvSpPr>
@@ -16181,7 +16722,7 @@
       </p:sp>
       <p:sp>
         <p:nvSpPr>
-          <p:cNvPr id="156" name="Google Shape;156;p25"/>
+          <p:cNvPr id="166" name="Google Shape;166;p26"/>
           <p:cNvSpPr txBox="1"/>
           <p:nvPr/>
         </p:nvSpPr>
@@ -16588,7 +17129,7 @@
       </p:sp>
       <p:pic>
         <p:nvPicPr>
-          <p:cNvPr id="157" name="Google Shape;157;p25"/>
+          <p:cNvPr id="167" name="Google Shape;167;p26"/>
           <p:cNvPicPr preferRelativeResize="0"/>
           <p:nvPr/>
         </p:nvPicPr>
@@ -16627,7 +17168,7 @@
       </p:pic>
       <p:pic>
         <p:nvPicPr>
-          <p:cNvPr id="158" name="Google Shape;158;p25"/>
+          <p:cNvPr id="168" name="Google Shape;168;p26"/>
           <p:cNvPicPr preferRelativeResize="0"/>
           <p:nvPr/>
         </p:nvPicPr>
@@ -16672,12 +17213,12 @@
 </p:sld>
 </file>
 
-<file path=ppt/slides/slide12.xml><?xml version="1.0" encoding="utf-8"?>
+<file path=ppt/slides/slide13.xml><?xml version="1.0" encoding="utf-8"?>
 <p:sld xmlns:a="http://schemas.openxmlformats.org/drawingml/2006/main" xmlns:r="http://schemas.openxmlformats.org/officeDocument/2006/relationships" xmlns:p="http://schemas.openxmlformats.org/presentationml/2006/main">
   <p:cSld>
     <p:spTree>
       <p:nvGrpSpPr>
-        <p:cNvPr id="1" name="Shape 162"/>
+        <p:cNvPr id="1" name="Shape 172"/>
         <p:cNvGrpSpPr/>
         <p:nvPr/>
       </p:nvGrpSpPr>
@@ -16691,7 +17232,7 @@
       </p:grpSpPr>
       <p:sp>
         <p:nvSpPr>
-          <p:cNvPr id="163" name="Google Shape;163;p26"/>
+          <p:cNvPr id="173" name="Google Shape;173;p27"/>
           <p:cNvSpPr txBox="1"/>
           <p:nvPr/>
         </p:nvSpPr>
@@ -16757,7 +17298,7 @@
       </p:sp>
       <p:sp>
         <p:nvSpPr>
-          <p:cNvPr id="164" name="Google Shape;164;p26"/>
+          <p:cNvPr id="174" name="Google Shape;174;p27"/>
           <p:cNvSpPr txBox="1"/>
           <p:nvPr/>
         </p:nvSpPr>
@@ -17084,7 +17625,7 @@
       </p:sp>
       <p:sp>
         <p:nvSpPr>
-          <p:cNvPr id="165" name="Google Shape;165;p26"/>
+          <p:cNvPr id="175" name="Google Shape;175;p27"/>
           <p:cNvSpPr txBox="1"/>
           <p:nvPr/>
         </p:nvSpPr>
@@ -17278,7 +17819,7 @@
       </p:sp>
       <p:pic>
         <p:nvPicPr>
-          <p:cNvPr id="166" name="Google Shape;166;p26"/>
+          <p:cNvPr id="176" name="Google Shape;176;p27"/>
           <p:cNvPicPr preferRelativeResize="0"/>
           <p:nvPr/>
         </p:nvPicPr>
@@ -17317,7 +17858,7 @@
       </p:pic>
       <p:pic>
         <p:nvPicPr>
-          <p:cNvPr id="167" name="Google Shape;167;p26"/>
+          <p:cNvPr id="177" name="Google Shape;177;p27"/>
           <p:cNvPicPr preferRelativeResize="0"/>
           <p:nvPr/>
         </p:nvPicPr>
@@ -17362,12 +17903,12 @@
 </p:sld>
 </file>
 
-<file path=ppt/slides/slide13.xml><?xml version="1.0" encoding="utf-8"?>
+<file path=ppt/slides/slide14.xml><?xml version="1.0" encoding="utf-8"?>
 <p:sld xmlns:a="http://schemas.openxmlformats.org/drawingml/2006/main" xmlns:r="http://schemas.openxmlformats.org/officeDocument/2006/relationships" xmlns:p="http://schemas.openxmlformats.org/presentationml/2006/main">
   <p:cSld>
     <p:spTree>
       <p:nvGrpSpPr>
-        <p:cNvPr id="1" name="Shape 171"/>
+        <p:cNvPr id="1" name="Shape 181"/>
         <p:cNvGrpSpPr/>
         <p:nvPr/>
       </p:nvGrpSpPr>
@@ -17381,7 +17922,7 @@
       </p:grpSpPr>
       <p:sp>
         <p:nvSpPr>
-          <p:cNvPr id="172" name="Google Shape;172;p27"/>
+          <p:cNvPr id="182" name="Google Shape;182;p28"/>
           <p:cNvSpPr txBox="1"/>
           <p:nvPr/>
         </p:nvSpPr>
@@ -17447,7 +17988,7 @@
       </p:sp>
       <p:sp>
         <p:nvSpPr>
-          <p:cNvPr id="173" name="Google Shape;173;p27"/>
+          <p:cNvPr id="183" name="Google Shape;183;p28"/>
           <p:cNvSpPr txBox="1"/>
           <p:nvPr/>
         </p:nvSpPr>
@@ -17561,7 +18102,7 @@
       </p:sp>
       <p:sp>
         <p:nvSpPr>
-          <p:cNvPr id="174" name="Google Shape;174;p27"/>
+          <p:cNvPr id="184" name="Google Shape;184;p28"/>
           <p:cNvSpPr txBox="1"/>
           <p:nvPr/>
         </p:nvSpPr>
@@ -17675,7 +18216,7 @@
       </p:sp>
       <p:sp>
         <p:nvSpPr>
-          <p:cNvPr id="175" name="Google Shape;175;p27"/>
+          <p:cNvPr id="185" name="Google Shape;185;p28"/>
           <p:cNvSpPr txBox="1"/>
           <p:nvPr/>
         </p:nvSpPr>
@@ -17749,7 +18290,7 @@
       </p:sp>
       <p:pic>
         <p:nvPicPr>
-          <p:cNvPr id="176" name="Google Shape;176;p27"/>
+          <p:cNvPr id="186" name="Google Shape;186;p28"/>
           <p:cNvPicPr preferRelativeResize="0"/>
           <p:nvPr/>
         </p:nvPicPr>
@@ -17788,7 +18329,7 @@
       </p:pic>
       <p:pic>
         <p:nvPicPr>
-          <p:cNvPr id="177" name="Google Shape;177;p27"/>
+          <p:cNvPr id="187" name="Google Shape;187;p28"/>
           <p:cNvPicPr preferRelativeResize="0"/>
           <p:nvPr/>
         </p:nvPicPr>
@@ -17827,7 +18368,7 @@
       </p:pic>
       <p:pic>
         <p:nvPicPr>
-          <p:cNvPr id="178" name="Google Shape;178;p27"/>
+          <p:cNvPr id="188" name="Google Shape;188;p28"/>
           <p:cNvPicPr preferRelativeResize="0"/>
           <p:nvPr/>
         </p:nvPicPr>
@@ -17871,12 +18412,12 @@
 </p:sld>
 </file>
 
-<file path=ppt/slides/slide14.xml><?xml version="1.0" encoding="utf-8"?>
+<file path=ppt/slides/slide15.xml><?xml version="1.0" encoding="utf-8"?>
 <p:sld xmlns:a="http://schemas.openxmlformats.org/drawingml/2006/main" xmlns:r="http://schemas.openxmlformats.org/officeDocument/2006/relationships" xmlns:p="http://schemas.openxmlformats.org/presentationml/2006/main">
   <p:cSld>
     <p:spTree>
       <p:nvGrpSpPr>
-        <p:cNvPr id="1" name="Shape 182"/>
+        <p:cNvPr id="1" name="Shape 192"/>
         <p:cNvGrpSpPr/>
         <p:nvPr/>
       </p:nvGrpSpPr>
@@ -17890,7 +18431,7 @@
       </p:grpSpPr>
       <p:sp>
         <p:nvSpPr>
-          <p:cNvPr id="183" name="Google Shape;183;p28"/>
+          <p:cNvPr id="193" name="Google Shape;193;p29"/>
           <p:cNvSpPr txBox="1"/>
           <p:nvPr/>
         </p:nvSpPr>
@@ -17956,7 +18497,7 @@
       </p:sp>
       <p:sp>
         <p:nvSpPr>
-          <p:cNvPr id="184" name="Google Shape;184;p28"/>
+          <p:cNvPr id="194" name="Google Shape;194;p29"/>
           <p:cNvSpPr txBox="1"/>
           <p:nvPr/>
         </p:nvSpPr>
@@ -18202,7 +18743,7 @@
       </p:sp>
       <p:sp>
         <p:nvSpPr>
-          <p:cNvPr id="185" name="Google Shape;185;p28"/>
+          <p:cNvPr id="195" name="Google Shape;195;p29"/>
           <p:cNvSpPr txBox="1"/>
           <p:nvPr/>
         </p:nvSpPr>
@@ -18356,7 +18897,7 @@
       </p:sp>
       <p:pic>
         <p:nvPicPr>
-          <p:cNvPr id="186" name="Google Shape;186;p28"/>
+          <p:cNvPr id="196" name="Google Shape;196;p29"/>
           <p:cNvPicPr preferRelativeResize="0"/>
           <p:nvPr/>
         </p:nvPicPr>
@@ -18395,7 +18936,7 @@
       </p:pic>
       <p:pic>
         <p:nvPicPr>
-          <p:cNvPr id="187" name="Google Shape;187;p28"/>
+          <p:cNvPr id="197" name="Google Shape;197;p29"/>
           <p:cNvPicPr preferRelativeResize="0"/>
           <p:nvPr/>
         </p:nvPicPr>
@@ -18439,12 +18980,12 @@
 </p:sld>
 </file>
 
-<file path=ppt/slides/slide15.xml><?xml version="1.0" encoding="utf-8"?>
+<file path=ppt/slides/slide16.xml><?xml version="1.0" encoding="utf-8"?>
 <p:sld xmlns:a="http://schemas.openxmlformats.org/drawingml/2006/main" xmlns:r="http://schemas.openxmlformats.org/officeDocument/2006/relationships" xmlns:p="http://schemas.openxmlformats.org/presentationml/2006/main">
   <p:cSld>
     <p:spTree>
       <p:nvGrpSpPr>
-        <p:cNvPr id="1" name="Shape 191"/>
+        <p:cNvPr id="1" name="Shape 201"/>
         <p:cNvGrpSpPr/>
         <p:nvPr/>
       </p:nvGrpSpPr>
@@ -18458,7 +18999,7 @@
       </p:grpSpPr>
       <p:sp>
         <p:nvSpPr>
-          <p:cNvPr id="192" name="Google Shape;192;p29"/>
+          <p:cNvPr id="202" name="Google Shape;202;p30"/>
           <p:cNvSpPr txBox="1"/>
           <p:nvPr/>
         </p:nvSpPr>
@@ -18524,7 +19065,7 @@
       </p:sp>
       <p:sp>
         <p:nvSpPr>
-          <p:cNvPr id="193" name="Google Shape;193;p29"/>
+          <p:cNvPr id="203" name="Google Shape;203;p30"/>
           <p:cNvSpPr txBox="1"/>
           <p:nvPr/>
         </p:nvSpPr>
@@ -19114,7 +19655,7 @@
       </p:sp>
       <p:pic>
         <p:nvPicPr>
-          <p:cNvPr id="194" name="Google Shape;194;p29"/>
+          <p:cNvPr id="204" name="Google Shape;204;p30"/>
           <p:cNvPicPr preferRelativeResize="0"/>
           <p:nvPr/>
         </p:nvPicPr>
@@ -19159,12 +19700,12 @@
 </p:sld>
 </file>
 
-<file path=ppt/slides/slide16.xml><?xml version="1.0" encoding="utf-8"?>
+<file path=ppt/slides/slide17.xml><?xml version="1.0" encoding="utf-8"?>
 <p:sld xmlns:a="http://schemas.openxmlformats.org/drawingml/2006/main" xmlns:r="http://schemas.openxmlformats.org/officeDocument/2006/relationships" xmlns:p="http://schemas.openxmlformats.org/presentationml/2006/main">
   <p:cSld>
     <p:spTree>
       <p:nvGrpSpPr>
-        <p:cNvPr id="1" name="Shape 198"/>
+        <p:cNvPr id="1" name="Shape 208"/>
         <p:cNvGrpSpPr/>
         <p:nvPr/>
       </p:nvGrpSpPr>
@@ -19178,7 +19719,7 @@
       </p:grpSpPr>
       <p:sp>
         <p:nvSpPr>
-          <p:cNvPr id="199" name="Google Shape;199;p30"/>
+          <p:cNvPr id="209" name="Google Shape;209;p31"/>
           <p:cNvSpPr txBox="1"/>
           <p:nvPr/>
         </p:nvSpPr>
@@ -19244,7 +19785,7 @@
       </p:sp>
       <p:sp>
         <p:nvSpPr>
-          <p:cNvPr id="200" name="Google Shape;200;p30"/>
+          <p:cNvPr id="210" name="Google Shape;210;p31"/>
           <p:cNvSpPr txBox="1"/>
           <p:nvPr/>
         </p:nvSpPr>
@@ -19411,7 +19952,7 @@
       </p:sp>
       <p:sp>
         <p:nvSpPr>
-          <p:cNvPr id="201" name="Google Shape;201;p30"/>
+          <p:cNvPr id="211" name="Google Shape;211;p31"/>
           <p:cNvSpPr txBox="1"/>
           <p:nvPr/>
         </p:nvSpPr>
@@ -19725,7 +20266,7 @@
       </p:sp>
       <p:pic>
         <p:nvPicPr>
-          <p:cNvPr id="202" name="Google Shape;202;p30"/>
+          <p:cNvPr id="212" name="Google Shape;212;p31"/>
           <p:cNvPicPr preferRelativeResize="0"/>
           <p:nvPr/>
         </p:nvPicPr>
@@ -19759,7 +20300,7 @@
       </p:pic>
       <p:pic>
         <p:nvPicPr>
-          <p:cNvPr id="203" name="Google Shape;203;p30"/>
+          <p:cNvPr id="213" name="Google Shape;213;p31"/>
           <p:cNvPicPr preferRelativeResize="0"/>
           <p:nvPr/>
         </p:nvPicPr>
@@ -19804,12 +20345,12 @@
 </p:sld>
 </file>
 
-<file path=ppt/slides/slide17.xml><?xml version="1.0" encoding="utf-8"?>
+<file path=ppt/slides/slide18.xml><?xml version="1.0" encoding="utf-8"?>
 <p:sld xmlns:a="http://schemas.openxmlformats.org/drawingml/2006/main" xmlns:r="http://schemas.openxmlformats.org/officeDocument/2006/relationships" xmlns:p="http://schemas.openxmlformats.org/presentationml/2006/main">
   <p:cSld>
     <p:spTree>
       <p:nvGrpSpPr>
-        <p:cNvPr id="1" name="Shape 207"/>
+        <p:cNvPr id="1" name="Shape 217"/>
         <p:cNvGrpSpPr/>
         <p:nvPr/>
       </p:nvGrpSpPr>
@@ -19823,7 +20364,7 @@
       </p:grpSpPr>
       <p:sp>
         <p:nvSpPr>
-          <p:cNvPr id="208" name="Google Shape;208;p31"/>
+          <p:cNvPr id="218" name="Google Shape;218;p32"/>
           <p:cNvSpPr txBox="1"/>
           <p:nvPr/>
         </p:nvSpPr>
@@ -19889,7 +20430,7 @@
       </p:sp>
       <p:sp>
         <p:nvSpPr>
-          <p:cNvPr id="209" name="Google Shape;209;p31"/>
+          <p:cNvPr id="219" name="Google Shape;219;p32"/>
           <p:cNvSpPr txBox="1"/>
           <p:nvPr/>
         </p:nvSpPr>
@@ -20175,7 +20716,7 @@
       </p:sp>
       <p:sp>
         <p:nvSpPr>
-          <p:cNvPr id="210" name="Google Shape;210;p31"/>
+          <p:cNvPr id="220" name="Google Shape;220;p32"/>
           <p:cNvSpPr txBox="1"/>
           <p:nvPr/>
         </p:nvSpPr>
@@ -20661,7 +21202,7 @@
       </p:sp>
       <p:pic>
         <p:nvPicPr>
-          <p:cNvPr id="211" name="Google Shape;211;p31"/>
+          <p:cNvPr id="221" name="Google Shape;221;p32"/>
           <p:cNvPicPr preferRelativeResize="0"/>
           <p:nvPr/>
         </p:nvPicPr>
@@ -20700,7 +21241,7 @@
       </p:pic>
       <p:pic>
         <p:nvPicPr>
-          <p:cNvPr id="212" name="Google Shape;212;p31"/>
+          <p:cNvPr id="222" name="Google Shape;222;p32"/>
           <p:cNvPicPr preferRelativeResize="0"/>
           <p:nvPr/>
         </p:nvPicPr>
@@ -20744,12 +21285,12 @@
 </p:sld>
 </file>
 
-<file path=ppt/slides/slide18.xml><?xml version="1.0" encoding="utf-8"?>
+<file path=ppt/slides/slide19.xml><?xml version="1.0" encoding="utf-8"?>
 <p:sld xmlns:a="http://schemas.openxmlformats.org/drawingml/2006/main" xmlns:r="http://schemas.openxmlformats.org/officeDocument/2006/relationships" xmlns:p="http://schemas.openxmlformats.org/presentationml/2006/main">
   <p:cSld>
     <p:spTree>
       <p:nvGrpSpPr>
-        <p:cNvPr id="1" name="Shape 216"/>
+        <p:cNvPr id="1" name="Shape 226"/>
         <p:cNvGrpSpPr/>
         <p:nvPr/>
       </p:nvGrpSpPr>
@@ -20763,7 +21304,7 @@
       </p:grpSpPr>
       <p:sp>
         <p:nvSpPr>
-          <p:cNvPr id="217" name="Google Shape;217;p32"/>
+          <p:cNvPr id="227" name="Google Shape;227;p33"/>
           <p:cNvSpPr txBox="1"/>
           <p:nvPr/>
         </p:nvSpPr>
@@ -20829,7 +21370,7 @@
       </p:sp>
       <p:sp>
         <p:nvSpPr>
-          <p:cNvPr id="218" name="Google Shape;218;p32"/>
+          <p:cNvPr id="228" name="Google Shape;228;p33"/>
           <p:cNvSpPr txBox="1"/>
           <p:nvPr/>
         </p:nvSpPr>
@@ -21286,7 +21827,7 @@
       </p:sp>
       <p:sp>
         <p:nvSpPr>
-          <p:cNvPr id="219" name="Google Shape;219;p32"/>
+          <p:cNvPr id="229" name="Google Shape;229;p33"/>
           <p:cNvSpPr txBox="1"/>
           <p:nvPr/>
         </p:nvSpPr>
@@ -21573,7 +22114,7 @@
       </p:sp>
       <p:pic>
         <p:nvPicPr>
-          <p:cNvPr id="220" name="Google Shape;220;p32"/>
+          <p:cNvPr id="230" name="Google Shape;230;p33"/>
           <p:cNvPicPr preferRelativeResize="0"/>
           <p:nvPr/>
         </p:nvPicPr>
@@ -21612,7 +22153,7 @@
       </p:pic>
       <p:pic>
         <p:nvPicPr>
-          <p:cNvPr id="221" name="Google Shape;221;p32"/>
+          <p:cNvPr id="231" name="Google Shape;231;p33"/>
           <p:cNvPicPr preferRelativeResize="0"/>
           <p:nvPr/>
         </p:nvPicPr>
@@ -21657,12 +22198,12 @@
 </p:sld>
 </file>
 
-<file path=ppt/slides/slide19.xml><?xml version="1.0" encoding="utf-8"?>
+<file path=ppt/slides/slide2.xml><?xml version="1.0" encoding="utf-8"?>
 <p:sld xmlns:a="http://schemas.openxmlformats.org/drawingml/2006/main" xmlns:r="http://schemas.openxmlformats.org/officeDocument/2006/relationships" xmlns:p="http://schemas.openxmlformats.org/presentationml/2006/main">
   <p:cSld>
     <p:spTree>
       <p:nvGrpSpPr>
-        <p:cNvPr id="1" name="Shape 225"/>
+        <p:cNvPr id="1" name="Shape 72"/>
         <p:cNvGrpSpPr/>
         <p:nvPr/>
       </p:nvGrpSpPr>
@@ -21676,1070 +22217,7 @@
       </p:grpSpPr>
       <p:sp>
         <p:nvSpPr>
-          <p:cNvPr id="226" name="Google Shape;226;p33"/>
-          <p:cNvSpPr txBox="1"/>
-          <p:nvPr/>
-        </p:nvSpPr>
-        <p:spPr>
-          <a:xfrm>
-            <a:off x="81775" y="0"/>
-            <a:ext cx="3636000" cy="326400"/>
-          </a:xfrm>
-          <a:prstGeom prst="rect">
-            <a:avLst/>
-          </a:prstGeom>
-          <a:noFill/>
-          <a:ln>
-            <a:noFill/>
-          </a:ln>
-        </p:spPr>
-        <p:txBody>
-          <a:bodyPr spcFirstLastPara="1" wrap="square" lIns="9125" tIns="9125" rIns="9125" bIns="9125" anchor="t" anchorCtr="0">
-            <a:spAutoFit/>
-          </a:bodyPr>
-          <a:lstStyle/>
-          <a:p>
-            <a:pPr marL="0" marR="0" lvl="0" indent="0" algn="l" rtl="0">
-              <a:lnSpc>
-                <a:spcPct val="100000"/>
-              </a:lnSpc>
-              <a:spcBef>
-                <a:spcPts val="0"/>
-              </a:spcBef>
-              <a:spcAft>
-                <a:spcPts val="0"/>
-              </a:spcAft>
-              <a:buClr>
-                <a:schemeClr val="dk1"/>
-              </a:buClr>
-              <a:buSzPts val="1100"/>
-              <a:buFont typeface="Arial"/>
-              <a:buNone/>
-            </a:pPr>
-            <a:r>
-              <a:rPr lang="en" sz="2000" b="1">
-                <a:solidFill>
-                  <a:schemeClr val="dk1"/>
-                </a:solidFill>
-                <a:latin typeface="Calibri"/>
-                <a:ea typeface="Calibri"/>
-                <a:cs typeface="Calibri"/>
-                <a:sym typeface="Calibri"/>
-              </a:rPr>
-              <a:t>AI Updates</a:t>
-            </a:r>
-            <a:endParaRPr sz="2000" b="1">
-              <a:solidFill>
-                <a:schemeClr val="dk1"/>
-              </a:solidFill>
-              <a:latin typeface="Calibri"/>
-              <a:ea typeface="Calibri"/>
-              <a:cs typeface="Calibri"/>
-              <a:sym typeface="Calibri"/>
-            </a:endParaRPr>
-          </a:p>
-        </p:txBody>
-      </p:sp>
-      <p:sp>
-        <p:nvSpPr>
-          <p:cNvPr id="227" name="Google Shape;227;p33"/>
-          <p:cNvSpPr txBox="1"/>
-          <p:nvPr/>
-        </p:nvSpPr>
-        <p:spPr>
-          <a:xfrm>
-            <a:off x="81765" y="420370"/>
-            <a:ext cx="4425600" cy="2235000"/>
-          </a:xfrm>
-          <a:prstGeom prst="rect">
-            <a:avLst/>
-          </a:prstGeom>
-          <a:solidFill>
-            <a:srgbClr val="FFF2CC"/>
-          </a:solidFill>
-          <a:ln w="9525" cap="flat" cmpd="sng">
-            <a:solidFill>
-              <a:srgbClr val="FF0000"/>
-            </a:solidFill>
-            <a:prstDash val="solid"/>
-            <a:round/>
-            <a:headEnd type="none" w="sm" len="sm"/>
-            <a:tailEnd type="none" w="sm" len="sm"/>
-          </a:ln>
-        </p:spPr>
-        <p:txBody>
-          <a:bodyPr spcFirstLastPara="1" wrap="square" lIns="9125" tIns="9125" rIns="9125" bIns="9125" anchor="t" anchorCtr="0">
-            <a:spAutoFit/>
-          </a:bodyPr>
-          <a:lstStyle/>
-          <a:p>
-            <a:pPr marL="171450" marR="0" lvl="0" indent="-133350" algn="l" rtl="0">
-              <a:lnSpc>
-                <a:spcPct val="100000"/>
-              </a:lnSpc>
-              <a:spcBef>
-                <a:spcPts val="0"/>
-              </a:spcBef>
-              <a:spcAft>
-                <a:spcPts val="0"/>
-              </a:spcAft>
-              <a:buClr>
-                <a:srgbClr val="FF0000"/>
-              </a:buClr>
-              <a:buSzPts val="1200"/>
-              <a:buFont typeface="Calibri"/>
-              <a:buChar char="●"/>
-            </a:pPr>
-            <a:r>
-              <a:rPr lang="en" sz="1200" b="1">
-                <a:solidFill>
-                  <a:srgbClr val="FF0000"/>
-                </a:solidFill>
-                <a:latin typeface="Calibri"/>
-                <a:ea typeface="Calibri"/>
-                <a:cs typeface="Calibri"/>
-                <a:sym typeface="Calibri"/>
-              </a:rPr>
-              <a:t>Aram Studio v4 - Rust Transformer</a:t>
-            </a:r>
-            <a:endParaRPr sz="1200" b="1">
-              <a:solidFill>
-                <a:srgbClr val="FF0000"/>
-              </a:solidFill>
-              <a:latin typeface="Calibri"/>
-              <a:ea typeface="Calibri"/>
-              <a:cs typeface="Calibri"/>
-              <a:sym typeface="Calibri"/>
-            </a:endParaRPr>
-          </a:p>
-          <a:p>
-            <a:pPr marL="171450" marR="0" lvl="0" indent="-133350" algn="l" rtl="0">
-              <a:lnSpc>
-                <a:spcPct val="100000"/>
-              </a:lnSpc>
-              <a:spcBef>
-                <a:spcPts val="0"/>
-              </a:spcBef>
-              <a:spcAft>
-                <a:spcPts val="0"/>
-              </a:spcAft>
-              <a:buClr>
-                <a:schemeClr val="dk1"/>
-              </a:buClr>
-              <a:buSzPts val="1200"/>
-              <a:buFont typeface="Calibri"/>
-              <a:buChar char="●"/>
-            </a:pPr>
-            <a:r>
-              <a:rPr lang="en" sz="1200">
-                <a:solidFill>
-                  <a:schemeClr val="dk1"/>
-                </a:solidFill>
-                <a:latin typeface="Calibri"/>
-                <a:ea typeface="Calibri"/>
-                <a:cs typeface="Calibri"/>
-                <a:sym typeface="Calibri"/>
-              </a:rPr>
-              <a:t>Rust-first decoder-only transformer application avoids Python-runtime dependencies</a:t>
-            </a:r>
-            <a:endParaRPr sz="1200">
-              <a:solidFill>
-                <a:schemeClr val="dk1"/>
-              </a:solidFill>
-              <a:latin typeface="Calibri"/>
-              <a:ea typeface="Calibri"/>
-              <a:cs typeface="Calibri"/>
-              <a:sym typeface="Calibri"/>
-            </a:endParaRPr>
-          </a:p>
-          <a:p>
-            <a:pPr marL="171450" marR="0" lvl="0" indent="-133350" algn="l" rtl="0">
-              <a:lnSpc>
-                <a:spcPct val="100000"/>
-              </a:lnSpc>
-              <a:spcBef>
-                <a:spcPts val="0"/>
-              </a:spcBef>
-              <a:spcAft>
-                <a:spcPts val="0"/>
-              </a:spcAft>
-              <a:buClr>
-                <a:schemeClr val="dk1"/>
-              </a:buClr>
-              <a:buSzPts val="1200"/>
-              <a:buFont typeface="Calibri"/>
-              <a:buChar char="●"/>
-            </a:pPr>
-            <a:r>
-              <a:rPr lang="en" sz="1200">
-                <a:solidFill>
-                  <a:schemeClr val="dk1"/>
-                </a:solidFill>
-                <a:latin typeface="Calibri"/>
-                <a:ea typeface="Calibri"/>
-                <a:cs typeface="Calibri"/>
-                <a:sym typeface="Calibri"/>
-              </a:rPr>
-              <a:t>Adding audio, multi-node training, retrieval, model merging, sandboxed tools, bounded multi-agent orchestration, multi-tenant serving, red teaming, and model-card generation</a:t>
-            </a:r>
-            <a:endParaRPr sz="1200">
-              <a:solidFill>
-                <a:schemeClr val="dk1"/>
-              </a:solidFill>
-              <a:latin typeface="Calibri"/>
-              <a:ea typeface="Calibri"/>
-              <a:cs typeface="Calibri"/>
-              <a:sym typeface="Calibri"/>
-            </a:endParaRPr>
-          </a:p>
-          <a:p>
-            <a:pPr marL="171450" marR="0" lvl="0" indent="-133350" algn="l" rtl="0">
-              <a:lnSpc>
-                <a:spcPct val="100000"/>
-              </a:lnSpc>
-              <a:spcBef>
-                <a:spcPts val="0"/>
-              </a:spcBef>
-              <a:spcAft>
-                <a:spcPts val="0"/>
-              </a:spcAft>
-              <a:buClr>
-                <a:schemeClr val="dk1"/>
-              </a:buClr>
-              <a:buSzPts val="1200"/>
-              <a:buFont typeface="Calibri"/>
-              <a:buChar char="●"/>
-            </a:pPr>
-            <a:r>
-              <a:rPr lang="en" sz="1200">
-                <a:solidFill>
-                  <a:schemeClr val="dk1"/>
-                </a:solidFill>
-                <a:latin typeface="Calibri"/>
-                <a:ea typeface="Calibri"/>
-                <a:cs typeface="Calibri"/>
-                <a:sym typeface="Calibri"/>
-              </a:rPr>
-              <a:t>Released after 6 months, 4 major versions, 55 phases, and 21 Cargo workspace crates; source on GitHub</a:t>
-            </a:r>
-            <a:endParaRPr sz="1200">
-              <a:solidFill>
-                <a:schemeClr val="dk1"/>
-              </a:solidFill>
-              <a:latin typeface="Calibri"/>
-              <a:ea typeface="Calibri"/>
-              <a:cs typeface="Calibri"/>
-              <a:sym typeface="Calibri"/>
-            </a:endParaRPr>
-          </a:p>
-          <a:p>
-            <a:pPr marL="171450" marR="0" lvl="0" indent="-133350" algn="l" rtl="0">
-              <a:lnSpc>
-                <a:spcPct val="100000"/>
-              </a:lnSpc>
-              <a:spcBef>
-                <a:spcPts val="0"/>
-              </a:spcBef>
-              <a:spcAft>
-                <a:spcPts val="0"/>
-              </a:spcAft>
-              <a:buClr>
-                <a:schemeClr val="dk1"/>
-              </a:buClr>
-              <a:buSzPts val="1200"/>
-              <a:buFont typeface="Calibri"/>
-              <a:buChar char="●"/>
-            </a:pPr>
-            <a:r>
-              <a:rPr lang="en" sz="1200">
-                <a:solidFill>
-                  <a:schemeClr val="dk1"/>
-                </a:solidFill>
-                <a:latin typeface="Calibri"/>
-                <a:ea typeface="Calibri"/>
-                <a:cs typeface="Calibri"/>
-                <a:sym typeface="Calibri"/>
-              </a:rPr>
-              <a:t>Demonstrates a complete multimodal, safety-bounded LLM system</a:t>
-            </a:r>
-            <a:endParaRPr sz="1200">
-              <a:solidFill>
-                <a:schemeClr val="dk1"/>
-              </a:solidFill>
-              <a:latin typeface="Calibri"/>
-              <a:ea typeface="Calibri"/>
-              <a:cs typeface="Calibri"/>
-              <a:sym typeface="Calibri"/>
-            </a:endParaRPr>
-          </a:p>
-          <a:p>
-            <a:pPr marL="171450" marR="0" lvl="0" indent="-114300" algn="l" rtl="0">
-              <a:lnSpc>
-                <a:spcPct val="100000"/>
-              </a:lnSpc>
-              <a:spcBef>
-                <a:spcPts val="0"/>
-              </a:spcBef>
-              <a:spcAft>
-                <a:spcPts val="0"/>
-              </a:spcAft>
-              <a:buClr>
-                <a:schemeClr val="dk1"/>
-              </a:buClr>
-              <a:buSzPts val="900"/>
-              <a:buFont typeface="Calibri"/>
-              <a:buChar char="●"/>
-            </a:pPr>
-            <a:r>
-              <a:rPr lang="en" sz="900" u="sng">
-                <a:solidFill>
-                  <a:schemeClr val="hlink"/>
-                </a:solidFill>
-                <a:latin typeface="Calibri"/>
-                <a:ea typeface="Calibri"/>
-                <a:cs typeface="Calibri"/>
-                <a:sym typeface="Calibri"/>
-                <a:hlinkClick r:id="rId3"/>
-              </a:rPr>
-              <a:t>https://github.com/AarambhDevHub</a:t>
-            </a:r>
-            <a:endParaRPr sz="900">
-              <a:solidFill>
-                <a:schemeClr val="dk1"/>
-              </a:solidFill>
-              <a:latin typeface="Calibri"/>
-              <a:ea typeface="Calibri"/>
-              <a:cs typeface="Calibri"/>
-              <a:sym typeface="Calibri"/>
-            </a:endParaRPr>
-          </a:p>
-          <a:p>
-            <a:pPr marL="171450" marR="0" lvl="0" indent="-114300" algn="l" rtl="0">
-              <a:lnSpc>
-                <a:spcPct val="100000"/>
-              </a:lnSpc>
-              <a:spcBef>
-                <a:spcPts val="0"/>
-              </a:spcBef>
-              <a:spcAft>
-                <a:spcPts val="0"/>
-              </a:spcAft>
-              <a:buClr>
-                <a:schemeClr val="dk1"/>
-              </a:buClr>
-              <a:buSzPts val="900"/>
-              <a:buFont typeface="Calibri"/>
-              <a:buChar char="●"/>
-            </a:pPr>
-            <a:r>
-              <a:rPr lang="en" sz="900" u="sng">
-                <a:solidFill>
-                  <a:schemeClr val="hlink"/>
-                </a:solidFill>
-                <a:latin typeface="Calibri"/>
-                <a:ea typeface="Calibri"/>
-                <a:cs typeface="Calibri"/>
-                <a:sym typeface="Calibri"/>
-                <a:hlinkClick r:id="rId4"/>
-              </a:rPr>
-              <a:t>https://github.com/AarambhDevHub/aarambh-studio</a:t>
-            </a:r>
-            <a:endParaRPr sz="900">
-              <a:solidFill>
-                <a:schemeClr val="dk1"/>
-              </a:solidFill>
-              <a:latin typeface="Calibri"/>
-              <a:ea typeface="Calibri"/>
-              <a:cs typeface="Calibri"/>
-              <a:sym typeface="Calibri"/>
-            </a:endParaRPr>
-          </a:p>
-          <a:p>
-            <a:pPr marL="171450" marR="0" lvl="0" indent="-114300" algn="l" rtl="0">
-              <a:lnSpc>
-                <a:spcPct val="100000"/>
-              </a:lnSpc>
-              <a:spcBef>
-                <a:spcPts val="0"/>
-              </a:spcBef>
-              <a:spcAft>
-                <a:spcPts val="0"/>
-              </a:spcAft>
-              <a:buClr>
-                <a:schemeClr val="dk1"/>
-              </a:buClr>
-              <a:buSzPts val="900"/>
-              <a:buFont typeface="Calibri"/>
-              <a:buChar char="●"/>
-            </a:pPr>
-            <a:r>
-              <a:rPr lang="en" sz="900" u="sng">
-                <a:solidFill>
-                  <a:schemeClr val="hlink"/>
-                </a:solidFill>
-                <a:latin typeface="Calibri"/>
-                <a:ea typeface="Calibri"/>
-                <a:cs typeface="Calibri"/>
-                <a:sym typeface="Calibri"/>
-                <a:hlinkClick r:id="rId5"/>
-              </a:rPr>
-              <a:t>https://github.com/AarambhDevHub/aarambh-studio/tree/main/docs</a:t>
-            </a:r>
-            <a:r>
-              <a:rPr lang="en" sz="900">
-                <a:solidFill>
-                  <a:schemeClr val="dk1"/>
-                </a:solidFill>
-                <a:latin typeface="Calibri"/>
-                <a:ea typeface="Calibri"/>
-                <a:cs typeface="Calibri"/>
-                <a:sym typeface="Calibri"/>
-              </a:rPr>
-              <a:t> </a:t>
-            </a:r>
-            <a:endParaRPr sz="900">
-              <a:solidFill>
-                <a:schemeClr val="dk1"/>
-              </a:solidFill>
-              <a:latin typeface="Calibri"/>
-              <a:ea typeface="Calibri"/>
-              <a:cs typeface="Calibri"/>
-              <a:sym typeface="Calibri"/>
-            </a:endParaRPr>
-          </a:p>
-          <a:p>
-            <a:pPr marL="171450" marR="0" lvl="0" indent="-114300" algn="l" rtl="0">
-              <a:lnSpc>
-                <a:spcPct val="100000"/>
-              </a:lnSpc>
-              <a:spcBef>
-                <a:spcPts val="0"/>
-              </a:spcBef>
-              <a:spcAft>
-                <a:spcPts val="0"/>
-              </a:spcAft>
-              <a:buClr>
-                <a:schemeClr val="dk1"/>
-              </a:buClr>
-              <a:buSzPts val="900"/>
-              <a:buFont typeface="Calibri"/>
-              <a:buChar char="●"/>
-            </a:pPr>
-            <a:r>
-              <a:rPr lang="en" sz="900" u="sng">
-                <a:solidFill>
-                  <a:schemeClr val="hlink"/>
-                </a:solidFill>
-                <a:latin typeface="Calibri"/>
-                <a:ea typeface="Calibri"/>
-                <a:cs typeface="Calibri"/>
-                <a:sym typeface="Calibri"/>
-                <a:hlinkClick r:id="rId6"/>
-              </a:rPr>
-              <a:t>https://www.youtube.com/watch?v=Inkz4jzwICU</a:t>
-            </a:r>
-            <a:r>
-              <a:rPr lang="en" sz="900">
-                <a:solidFill>
-                  <a:schemeClr val="dk1"/>
-                </a:solidFill>
-                <a:latin typeface="Calibri"/>
-                <a:ea typeface="Calibri"/>
-                <a:cs typeface="Calibri"/>
-                <a:sym typeface="Calibri"/>
-              </a:rPr>
-              <a:t> </a:t>
-            </a:r>
-            <a:endParaRPr sz="900">
-              <a:solidFill>
-                <a:schemeClr val="dk1"/>
-              </a:solidFill>
-              <a:latin typeface="Calibri"/>
-              <a:ea typeface="Calibri"/>
-              <a:cs typeface="Calibri"/>
-              <a:sym typeface="Calibri"/>
-            </a:endParaRPr>
-          </a:p>
-        </p:txBody>
-      </p:sp>
-      <p:sp>
-        <p:nvSpPr>
-          <p:cNvPr id="228" name="Google Shape;228;p33"/>
-          <p:cNvSpPr txBox="1"/>
-          <p:nvPr/>
-        </p:nvSpPr>
-        <p:spPr>
-          <a:xfrm>
-            <a:off x="4624754" y="1887745"/>
-            <a:ext cx="4425600" cy="3158400"/>
-          </a:xfrm>
-          <a:prstGeom prst="rect">
-            <a:avLst/>
-          </a:prstGeom>
-          <a:solidFill>
-            <a:srgbClr val="FFF2CC"/>
-          </a:solidFill>
-          <a:ln w="9525" cap="flat" cmpd="sng">
-            <a:solidFill>
-              <a:srgbClr val="FF0000"/>
-            </a:solidFill>
-            <a:prstDash val="solid"/>
-            <a:round/>
-            <a:headEnd type="none" w="sm" len="sm"/>
-            <a:tailEnd type="none" w="sm" len="sm"/>
-          </a:ln>
-        </p:spPr>
-        <p:txBody>
-          <a:bodyPr spcFirstLastPara="1" wrap="square" lIns="9125" tIns="9125" rIns="9125" bIns="9125" anchor="t" anchorCtr="0">
-            <a:spAutoFit/>
-          </a:bodyPr>
-          <a:lstStyle/>
-          <a:p>
-            <a:pPr marL="171450" marR="0" lvl="0" indent="-133350" algn="l" rtl="0">
-              <a:lnSpc>
-                <a:spcPct val="100000"/>
-              </a:lnSpc>
-              <a:spcBef>
-                <a:spcPts val="0"/>
-              </a:spcBef>
-              <a:spcAft>
-                <a:spcPts val="0"/>
-              </a:spcAft>
-              <a:buClr>
-                <a:srgbClr val="FF0000"/>
-              </a:buClr>
-              <a:buSzPts val="1200"/>
-              <a:buFont typeface="Calibri"/>
-              <a:buChar char="●"/>
-            </a:pPr>
-            <a:r>
-              <a:rPr lang="en" sz="1200" b="1">
-                <a:solidFill>
-                  <a:srgbClr val="FF0000"/>
-                </a:solidFill>
-                <a:latin typeface="Calibri"/>
-                <a:ea typeface="Calibri"/>
-                <a:cs typeface="Calibri"/>
-                <a:sym typeface="Calibri"/>
-              </a:rPr>
-              <a:t>Google’s Reader-Controlled AI Search</a:t>
-            </a:r>
-            <a:endParaRPr sz="1200" b="1">
-              <a:solidFill>
-                <a:srgbClr val="FF0000"/>
-              </a:solidFill>
-              <a:latin typeface="Calibri"/>
-              <a:ea typeface="Calibri"/>
-              <a:cs typeface="Calibri"/>
-              <a:sym typeface="Calibri"/>
-            </a:endParaRPr>
-          </a:p>
-          <a:p>
-            <a:pPr marL="171450" marR="0" lvl="0" indent="-133350" algn="l" rtl="0">
-              <a:lnSpc>
-                <a:spcPct val="100000"/>
-              </a:lnSpc>
-              <a:spcBef>
-                <a:spcPts val="0"/>
-              </a:spcBef>
-              <a:spcAft>
-                <a:spcPts val="0"/>
-              </a:spcAft>
-              <a:buClr>
-                <a:schemeClr val="dk1"/>
-              </a:buClr>
-              <a:buSzPts val="1200"/>
-              <a:buFont typeface="Calibri"/>
-              <a:buChar char="●"/>
-            </a:pPr>
-            <a:r>
-              <a:rPr lang="en" sz="1200">
-                <a:solidFill>
-                  <a:schemeClr val="dk1"/>
-                </a:solidFill>
-                <a:latin typeface="Calibri"/>
-                <a:ea typeface="Calibri"/>
-                <a:cs typeface="Calibri"/>
-                <a:sym typeface="Calibri"/>
-              </a:rPr>
-              <a:t>Google launched an embeddable “Preferred Sources” button for publishers on August 20, 2026. A reader can click it on a site to add that domain or subdomain to their personal preferred-source list.</a:t>
-            </a:r>
-            <a:endParaRPr sz="1200">
-              <a:solidFill>
-                <a:schemeClr val="dk1"/>
-              </a:solidFill>
-              <a:latin typeface="Calibri"/>
-              <a:ea typeface="Calibri"/>
-              <a:cs typeface="Calibri"/>
-              <a:sym typeface="Calibri"/>
-            </a:endParaRPr>
-          </a:p>
-          <a:p>
-            <a:pPr marL="171450" marR="0" lvl="0" indent="-133350" algn="l" rtl="0">
-              <a:lnSpc>
-                <a:spcPct val="100000"/>
-              </a:lnSpc>
-              <a:spcBef>
-                <a:spcPts val="0"/>
-              </a:spcBef>
-              <a:spcAft>
-                <a:spcPts val="0"/>
-              </a:spcAft>
-              <a:buClr>
-                <a:schemeClr val="dk1"/>
-              </a:buClr>
-              <a:buSzPts val="1200"/>
-              <a:buFont typeface="Calibri"/>
-              <a:buChar char="●"/>
-            </a:pPr>
-            <a:r>
-              <a:rPr lang="en" sz="1200">
-                <a:solidFill>
-                  <a:schemeClr val="dk1"/>
-                </a:solidFill>
-                <a:latin typeface="Calibri"/>
-                <a:ea typeface="Calibri"/>
-                <a:cs typeface="Calibri"/>
-                <a:sym typeface="Calibri"/>
-              </a:rPr>
-              <a:t>The preference can affect relevant Google Top Stories, AI Overviews, and AI Mode results. Google returns the reader to the page after selection.</a:t>
-            </a:r>
-            <a:endParaRPr sz="1200">
-              <a:solidFill>
-                <a:schemeClr val="dk1"/>
-              </a:solidFill>
-              <a:latin typeface="Calibri"/>
-              <a:ea typeface="Calibri"/>
-              <a:cs typeface="Calibri"/>
-              <a:sym typeface="Calibri"/>
-            </a:endParaRPr>
-          </a:p>
-          <a:p>
-            <a:pPr marL="171450" marR="0" lvl="0" indent="-133350" algn="l" rtl="0">
-              <a:lnSpc>
-                <a:spcPct val="100000"/>
-              </a:lnSpc>
-              <a:spcBef>
-                <a:spcPts val="0"/>
-              </a:spcBef>
-              <a:spcAft>
-                <a:spcPts val="0"/>
-              </a:spcAft>
-              <a:buClr>
-                <a:schemeClr val="dk1"/>
-              </a:buClr>
-              <a:buSzPts val="1200"/>
-              <a:buFont typeface="Calibri"/>
-              <a:buChar char="●"/>
-            </a:pPr>
-            <a:r>
-              <a:rPr lang="en" sz="1200">
-                <a:solidFill>
-                  <a:schemeClr val="dk1"/>
-                </a:solidFill>
-                <a:latin typeface="Calibri"/>
-                <a:ea typeface="Calibri"/>
-                <a:cs typeface="Calibri"/>
-                <a:sym typeface="Calibri"/>
-              </a:rPr>
-              <a:t>Publishers have faced reduced referral traffic from AI-generated answers. The button lowers the friction of choosing trusted publishers, replacing buried settings with an on-page action.</a:t>
-            </a:r>
-            <a:endParaRPr sz="1200">
-              <a:solidFill>
-                <a:schemeClr val="dk1"/>
-              </a:solidFill>
-              <a:latin typeface="Calibri"/>
-              <a:ea typeface="Calibri"/>
-              <a:cs typeface="Calibri"/>
-              <a:sym typeface="Calibri"/>
-            </a:endParaRPr>
-          </a:p>
-          <a:p>
-            <a:pPr marL="171450" marR="0" lvl="0" indent="-133350" algn="l" rtl="0">
-              <a:lnSpc>
-                <a:spcPct val="100000"/>
-              </a:lnSpc>
-              <a:spcBef>
-                <a:spcPts val="0"/>
-              </a:spcBef>
-              <a:spcAft>
-                <a:spcPts val="0"/>
-              </a:spcAft>
-              <a:buClr>
-                <a:schemeClr val="dk1"/>
-              </a:buClr>
-              <a:buSzPts val="1200"/>
-              <a:buFont typeface="Calibri"/>
-              <a:buChar char="●"/>
-            </a:pPr>
-            <a:r>
-              <a:rPr lang="en" sz="1200">
-                <a:solidFill>
-                  <a:schemeClr val="dk1"/>
-                </a:solidFill>
-                <a:latin typeface="Calibri"/>
-                <a:ea typeface="Calibri"/>
-                <a:cs typeface="Calibri"/>
-                <a:sym typeface="Calibri"/>
-              </a:rPr>
-              <a:t>This is a loyalty tool, not a universal ranking boost</a:t>
-            </a:r>
-            <a:endParaRPr sz="1200">
-              <a:solidFill>
-                <a:schemeClr val="dk1"/>
-              </a:solidFill>
-              <a:latin typeface="Calibri"/>
-              <a:ea typeface="Calibri"/>
-              <a:cs typeface="Calibri"/>
-              <a:sym typeface="Calibri"/>
-            </a:endParaRPr>
-          </a:p>
-          <a:p>
-            <a:pPr marL="171450" marR="0" lvl="0" indent="-133350" algn="l" rtl="0">
-              <a:lnSpc>
-                <a:spcPct val="100000"/>
-              </a:lnSpc>
-              <a:spcBef>
-                <a:spcPts val="0"/>
-              </a:spcBef>
-              <a:spcAft>
-                <a:spcPts val="0"/>
-              </a:spcAft>
-              <a:buClr>
-                <a:schemeClr val="dk1"/>
-              </a:buClr>
-              <a:buSzPts val="1200"/>
-              <a:buFont typeface="Calibri"/>
-              <a:buChar char="●"/>
-            </a:pPr>
-            <a:r>
-              <a:rPr lang="en" sz="1200">
-                <a:solidFill>
-                  <a:schemeClr val="dk1"/>
-                </a:solidFill>
-                <a:latin typeface="Calibri"/>
-                <a:ea typeface="Calibri"/>
-                <a:cs typeface="Calibri"/>
-                <a:sym typeface="Calibri"/>
-              </a:rPr>
-              <a:t>Google also announced natural-language Discover-feed controls, allowing people to describe what they want more or less of, reinforcing personalized content selection.</a:t>
-            </a:r>
-            <a:endParaRPr sz="1200">
-              <a:solidFill>
-                <a:schemeClr val="dk1"/>
-              </a:solidFill>
-              <a:latin typeface="Calibri"/>
-              <a:ea typeface="Calibri"/>
-              <a:cs typeface="Calibri"/>
-              <a:sym typeface="Calibri"/>
-            </a:endParaRPr>
-          </a:p>
-          <a:p>
-            <a:pPr marL="171450" marR="0" lvl="0" indent="-114300" algn="l" rtl="0">
-              <a:lnSpc>
-                <a:spcPct val="100000"/>
-              </a:lnSpc>
-              <a:spcBef>
-                <a:spcPts val="0"/>
-              </a:spcBef>
-              <a:spcAft>
-                <a:spcPts val="0"/>
-              </a:spcAft>
-              <a:buClr>
-                <a:schemeClr val="dk1"/>
-              </a:buClr>
-              <a:buSzPts val="900"/>
-              <a:buFont typeface="Calibri"/>
-              <a:buChar char="●"/>
-            </a:pPr>
-            <a:r>
-              <a:rPr lang="en" sz="900" u="sng">
-                <a:solidFill>
-                  <a:schemeClr val="hlink"/>
-                </a:solidFill>
-                <a:latin typeface="Calibri"/>
-                <a:ea typeface="Calibri"/>
-                <a:cs typeface="Calibri"/>
-                <a:sym typeface="Calibri"/>
-                <a:hlinkClick r:id="rId7"/>
-              </a:rPr>
-              <a:t>https://developers.google.com/search/docs/specialty/news/preferred-sources</a:t>
-            </a:r>
-            <a:r>
-              <a:rPr lang="en" sz="900">
-                <a:solidFill>
-                  <a:schemeClr val="dk1"/>
-                </a:solidFill>
-                <a:latin typeface="Calibri"/>
-                <a:ea typeface="Calibri"/>
-                <a:cs typeface="Calibri"/>
-                <a:sym typeface="Calibri"/>
-              </a:rPr>
-              <a:t> </a:t>
-            </a:r>
-            <a:endParaRPr sz="900">
-              <a:solidFill>
-                <a:schemeClr val="dk1"/>
-              </a:solidFill>
-              <a:latin typeface="Calibri"/>
-              <a:ea typeface="Calibri"/>
-              <a:cs typeface="Calibri"/>
-              <a:sym typeface="Calibri"/>
-            </a:endParaRPr>
-          </a:p>
-          <a:p>
-            <a:pPr marL="171450" marR="0" lvl="0" indent="-114300" algn="l" rtl="0">
-              <a:lnSpc>
-                <a:spcPct val="100000"/>
-              </a:lnSpc>
-              <a:spcBef>
-                <a:spcPts val="0"/>
-              </a:spcBef>
-              <a:spcAft>
-                <a:spcPts val="0"/>
-              </a:spcAft>
-              <a:buClr>
-                <a:schemeClr val="dk1"/>
-              </a:buClr>
-              <a:buSzPts val="900"/>
-              <a:buFont typeface="Calibri"/>
-              <a:buChar char="●"/>
-            </a:pPr>
-            <a:r>
-              <a:rPr lang="en" sz="900" u="sng">
-                <a:solidFill>
-                  <a:schemeClr val="hlink"/>
-                </a:solidFill>
-                <a:latin typeface="Calibri"/>
-                <a:ea typeface="Calibri"/>
-                <a:cs typeface="Calibri"/>
-                <a:sym typeface="Calibri"/>
-                <a:hlinkClick r:id="rId8"/>
-              </a:rPr>
-              <a:t>https://blog.google/products-and-platforms/products/search/personalize-search-discover-news/</a:t>
-            </a:r>
-            <a:r>
-              <a:rPr lang="en" sz="900">
-                <a:solidFill>
-                  <a:schemeClr val="dk1"/>
-                </a:solidFill>
-                <a:latin typeface="Calibri"/>
-                <a:ea typeface="Calibri"/>
-                <a:cs typeface="Calibri"/>
-                <a:sym typeface="Calibri"/>
-              </a:rPr>
-              <a:t> </a:t>
-            </a:r>
-            <a:endParaRPr sz="900">
-              <a:solidFill>
-                <a:schemeClr val="dk1"/>
-              </a:solidFill>
-              <a:latin typeface="Calibri"/>
-              <a:ea typeface="Calibri"/>
-              <a:cs typeface="Calibri"/>
-              <a:sym typeface="Calibri"/>
-            </a:endParaRPr>
-          </a:p>
-          <a:p>
-            <a:pPr marL="171450" marR="0" lvl="0" indent="-114300" algn="l" rtl="0">
-              <a:lnSpc>
-                <a:spcPct val="100000"/>
-              </a:lnSpc>
-              <a:spcBef>
-                <a:spcPts val="0"/>
-              </a:spcBef>
-              <a:spcAft>
-                <a:spcPts val="0"/>
-              </a:spcAft>
-              <a:buClr>
-                <a:schemeClr val="dk1"/>
-              </a:buClr>
-              <a:buSzPts val="900"/>
-              <a:buFont typeface="Calibri"/>
-              <a:buChar char="●"/>
-            </a:pPr>
-            <a:r>
-              <a:rPr lang="en" sz="900" u="sng">
-                <a:solidFill>
-                  <a:schemeClr val="hlink"/>
-                </a:solidFill>
-                <a:latin typeface="Calibri"/>
-                <a:ea typeface="Calibri"/>
-                <a:cs typeface="Calibri"/>
-                <a:sym typeface="Calibri"/>
-                <a:hlinkClick r:id="rId9"/>
-              </a:rPr>
-              <a:t>https://www.youtube.com/watch?v=tix4tq7iUAE</a:t>
-            </a:r>
-            <a:r>
-              <a:rPr lang="en" sz="900">
-                <a:solidFill>
-                  <a:schemeClr val="dk1"/>
-                </a:solidFill>
-                <a:latin typeface="Calibri"/>
-                <a:ea typeface="Calibri"/>
-                <a:cs typeface="Calibri"/>
-                <a:sym typeface="Calibri"/>
-              </a:rPr>
-              <a:t> </a:t>
-            </a:r>
-            <a:endParaRPr sz="900">
-              <a:solidFill>
-                <a:schemeClr val="dk1"/>
-              </a:solidFill>
-              <a:latin typeface="Calibri"/>
-              <a:ea typeface="Calibri"/>
-              <a:cs typeface="Calibri"/>
-              <a:sym typeface="Calibri"/>
-            </a:endParaRPr>
-          </a:p>
-        </p:txBody>
-      </p:sp>
-      <p:pic>
-        <p:nvPicPr>
-          <p:cNvPr id="229" name="Google Shape;229;p33"/>
-          <p:cNvPicPr preferRelativeResize="0"/>
-          <p:nvPr/>
-        </p:nvPicPr>
-        <p:blipFill>
-          <a:blip r:embed="rId10" cstate="email">
-            <a:alphaModFix/>
-            <a:extLst>
-              <a:ext uri="{28A0092B-C50C-407E-A947-70E740481C1C}">
-                <a14:useLocalDpi xmlns:a14="http://schemas.microsoft.com/office/drawing/2010/main"/>
-              </a:ext>
-            </a:extLst>
-          </a:blip>
-          <a:stretch>
-            <a:fillRect/>
-          </a:stretch>
-        </p:blipFill>
-        <p:spPr>
-          <a:xfrm>
-            <a:off x="81775" y="2749350"/>
-            <a:ext cx="1031100" cy="1031100"/>
-          </a:xfrm>
-          <a:prstGeom prst="rect">
-            <a:avLst/>
-          </a:prstGeom>
-          <a:noFill/>
-          <a:ln w="9525" cap="flat" cmpd="sng">
-            <a:solidFill>
-              <a:srgbClr val="FF0000"/>
-            </a:solidFill>
-            <a:prstDash val="solid"/>
-            <a:round/>
-            <a:headEnd type="none" w="sm" len="sm"/>
-            <a:tailEnd type="none" w="sm" len="sm"/>
-          </a:ln>
-        </p:spPr>
-      </p:pic>
-      <p:pic>
-        <p:nvPicPr>
-          <p:cNvPr id="230" name="Google Shape;230;p33"/>
-          <p:cNvPicPr preferRelativeResize="0"/>
-          <p:nvPr/>
-        </p:nvPicPr>
-        <p:blipFill>
-          <a:blip r:embed="rId11" cstate="email">
-            <a:alphaModFix/>
-            <a:extLst>
-              <a:ext uri="{28A0092B-C50C-407E-A947-70E740481C1C}">
-                <a14:useLocalDpi xmlns:a14="http://schemas.microsoft.com/office/drawing/2010/main"/>
-              </a:ext>
-            </a:extLst>
-          </a:blip>
-          <a:stretch>
-            <a:fillRect/>
-          </a:stretch>
-        </p:blipFill>
-        <p:spPr>
-          <a:xfrm>
-            <a:off x="1307553" y="2749349"/>
-            <a:ext cx="3187024" cy="1031100"/>
-          </a:xfrm>
-          <a:prstGeom prst="rect">
-            <a:avLst/>
-          </a:prstGeom>
-          <a:noFill/>
-          <a:ln w="9525" cap="flat" cmpd="sng">
-            <a:solidFill>
-              <a:srgbClr val="FF0000"/>
-            </a:solidFill>
-            <a:prstDash val="solid"/>
-            <a:round/>
-            <a:headEnd type="none" w="sm" len="sm"/>
-            <a:tailEnd type="none" w="sm" len="sm"/>
-          </a:ln>
-        </p:spPr>
-      </p:pic>
-      <p:pic>
-        <p:nvPicPr>
-          <p:cNvPr id="231" name="Google Shape;231;p33"/>
-          <p:cNvPicPr preferRelativeResize="0"/>
-          <p:nvPr/>
-        </p:nvPicPr>
-        <p:blipFill>
-          <a:blip r:embed="rId12" cstate="email">
-            <a:alphaModFix/>
-            <a:extLst>
-              <a:ext uri="{28A0092B-C50C-407E-A947-70E740481C1C}">
-                <a14:useLocalDpi xmlns:a14="http://schemas.microsoft.com/office/drawing/2010/main"/>
-              </a:ext>
-            </a:extLst>
-          </a:blip>
-          <a:stretch>
-            <a:fillRect/>
-          </a:stretch>
-        </p:blipFill>
-        <p:spPr>
-          <a:xfrm>
-            <a:off x="5070950" y="522725"/>
-            <a:ext cx="3979400" cy="1259304"/>
-          </a:xfrm>
-          <a:prstGeom prst="rect">
-            <a:avLst/>
-          </a:prstGeom>
-          <a:noFill/>
-          <a:ln w="9525" cap="flat" cmpd="sng">
-            <a:solidFill>
-              <a:srgbClr val="FF0000"/>
-            </a:solidFill>
-            <a:prstDash val="solid"/>
-            <a:round/>
-            <a:headEnd type="none" w="sm" len="sm"/>
-            <a:tailEnd type="none" w="sm" len="sm"/>
-          </a:ln>
-        </p:spPr>
-      </p:pic>
-    </p:spTree>
-  </p:cSld>
-  <p:clrMapOvr>
-    <a:masterClrMapping/>
-  </p:clrMapOvr>
-</p:sld>
-</file>
-
-<file path=ppt/slides/slide2.xml><?xml version="1.0" encoding="utf-8"?>
-<p:sld xmlns:a="http://schemas.openxmlformats.org/drawingml/2006/main" xmlns:r="http://schemas.openxmlformats.org/officeDocument/2006/relationships" xmlns:p="http://schemas.openxmlformats.org/presentationml/2006/main">
-  <p:cSld>
-    <p:spTree>
-      <p:nvGrpSpPr>
-        <p:cNvPr id="1" name="Shape 73"/>
-        <p:cNvGrpSpPr/>
-        <p:nvPr/>
-      </p:nvGrpSpPr>
-      <p:grpSpPr>
-        <a:xfrm>
-          <a:off x="0" y="0"/>
-          <a:ext cx="0" cy="0"/>
-          <a:chOff x="0" y="0"/>
-          <a:chExt cx="0" cy="0"/>
-        </a:xfrm>
-      </p:grpSpPr>
-      <p:sp>
-        <p:nvSpPr>
-          <p:cNvPr id="74" name="Google Shape;74;p16"/>
+          <p:cNvPr id="73" name="Google Shape;73;p16"/>
           <p:cNvSpPr txBox="1"/>
           <p:nvPr/>
         </p:nvSpPr>
@@ -22866,7 +22344,7 @@
       </p:sp>
       <p:sp>
         <p:nvSpPr>
-          <p:cNvPr id="75" name="Google Shape;75;p16"/>
+          <p:cNvPr id="74" name="Google Shape;74;p16"/>
           <p:cNvSpPr txBox="1"/>
           <p:nvPr/>
         </p:nvSpPr>
@@ -22932,7 +22410,7 @@
       </p:sp>
       <p:sp>
         <p:nvSpPr>
-          <p:cNvPr id="76" name="Google Shape;76;p16"/>
+          <p:cNvPr id="75" name="Google Shape;75;p16"/>
           <p:cNvSpPr txBox="1"/>
           <p:nvPr/>
         </p:nvSpPr>
@@ -23031,7 +22509,7 @@
       </p:sp>
       <p:sp>
         <p:nvSpPr>
-          <p:cNvPr id="77" name="Google Shape;77;p16"/>
+          <p:cNvPr id="76" name="Google Shape;76;p16"/>
           <p:cNvSpPr txBox="1"/>
           <p:nvPr/>
         </p:nvSpPr>
@@ -23130,7 +22608,7 @@
       </p:sp>
       <p:sp>
         <p:nvSpPr>
-          <p:cNvPr id="78" name="Google Shape;78;p16"/>
+          <p:cNvPr id="77" name="Google Shape;77;p16"/>
           <p:cNvSpPr txBox="1"/>
           <p:nvPr/>
         </p:nvSpPr>
@@ -23193,7 +22671,7 @@
       </p:sp>
       <p:graphicFrame>
         <p:nvGraphicFramePr>
-          <p:cNvPr id="79" name="Google Shape;79;p16"/>
+          <p:cNvPr id="78" name="Google Shape;78;p16"/>
           <p:cNvGraphicFramePr/>
           <p:nvPr/>
         </p:nvGraphicFramePr>
@@ -23206,7 +22684,7 @@
             <a:tbl>
               <a:tblPr>
                 <a:noFill/>
-                <a:tableStyleId>{1375A450-00DE-425E-814D-EC6F9158F1F2}</a:tableStyleId>
+                <a:tableStyleId>{6A2A2DBF-347B-4BC5-956E-641FE63D007A}</a:tableStyleId>
               </a:tblPr>
               <a:tblGrid>
                 <a:gridCol w="219050">
@@ -23562,7 +23040,7 @@
       </p:graphicFrame>
       <p:sp>
         <p:nvSpPr>
-          <p:cNvPr id="80" name="Google Shape;80;p16"/>
+          <p:cNvPr id="79" name="Google Shape;79;p16"/>
           <p:cNvSpPr txBox="1"/>
           <p:nvPr/>
         </p:nvSpPr>
@@ -24081,7 +23559,7 @@
       </p:sp>
       <p:graphicFrame>
         <p:nvGraphicFramePr>
-          <p:cNvPr id="81" name="Google Shape;81;p16"/>
+          <p:cNvPr id="80" name="Google Shape;80;p16"/>
           <p:cNvGraphicFramePr/>
           <p:nvPr/>
         </p:nvGraphicFramePr>
@@ -24094,7 +23572,7 @@
             <a:tbl>
               <a:tblPr>
                 <a:noFill/>
-                <a:tableStyleId>{1375A450-00DE-425E-814D-EC6F9158F1F2}</a:tableStyleId>
+                <a:tableStyleId>{6A2A2DBF-347B-4BC5-956E-641FE63D007A}</a:tableStyleId>
               </a:tblPr>
               <a:tblGrid>
                 <a:gridCol w="276225">
@@ -30401,7 +29879,7 @@
       </p:graphicFrame>
       <p:graphicFrame>
         <p:nvGraphicFramePr>
-          <p:cNvPr id="82" name="Google Shape;82;p16"/>
+          <p:cNvPr id="81" name="Google Shape;81;p16"/>
           <p:cNvGraphicFramePr/>
           <p:nvPr/>
         </p:nvGraphicFramePr>
@@ -30414,7 +29892,7 @@
             <a:tbl>
               <a:tblPr>
                 <a:noFill/>
-                <a:tableStyleId>{1375A450-00DE-425E-814D-EC6F9158F1F2}</a:tableStyleId>
+                <a:tableStyleId>{6A2A2DBF-347B-4BC5-956E-641FE63D007A}</a:tableStyleId>
               </a:tblPr>
               <a:tblGrid>
                 <a:gridCol w="276225">
@@ -36819,6 +36297,1069 @@
         <p:spPr>
           <a:xfrm>
             <a:off x="81765" y="420370"/>
+            <a:ext cx="4425600" cy="2235000"/>
+          </a:xfrm>
+          <a:prstGeom prst="rect">
+            <a:avLst/>
+          </a:prstGeom>
+          <a:solidFill>
+            <a:srgbClr val="FFF2CC"/>
+          </a:solidFill>
+          <a:ln w="9525" cap="flat" cmpd="sng">
+            <a:solidFill>
+              <a:srgbClr val="FF0000"/>
+            </a:solidFill>
+            <a:prstDash val="solid"/>
+            <a:round/>
+            <a:headEnd type="none" w="sm" len="sm"/>
+            <a:tailEnd type="none" w="sm" len="sm"/>
+          </a:ln>
+        </p:spPr>
+        <p:txBody>
+          <a:bodyPr spcFirstLastPara="1" wrap="square" lIns="9125" tIns="9125" rIns="9125" bIns="9125" anchor="t" anchorCtr="0">
+            <a:spAutoFit/>
+          </a:bodyPr>
+          <a:lstStyle/>
+          <a:p>
+            <a:pPr marL="171450" marR="0" lvl="0" indent="-133350" algn="l" rtl="0">
+              <a:lnSpc>
+                <a:spcPct val="100000"/>
+              </a:lnSpc>
+              <a:spcBef>
+                <a:spcPts val="0"/>
+              </a:spcBef>
+              <a:spcAft>
+                <a:spcPts val="0"/>
+              </a:spcAft>
+              <a:buClr>
+                <a:srgbClr val="FF0000"/>
+              </a:buClr>
+              <a:buSzPts val="1200"/>
+              <a:buFont typeface="Calibri"/>
+              <a:buChar char="●"/>
+            </a:pPr>
+            <a:r>
+              <a:rPr lang="en" sz="1200" b="1">
+                <a:solidFill>
+                  <a:srgbClr val="FF0000"/>
+                </a:solidFill>
+                <a:latin typeface="Calibri"/>
+                <a:ea typeface="Calibri"/>
+                <a:cs typeface="Calibri"/>
+                <a:sym typeface="Calibri"/>
+              </a:rPr>
+              <a:t>Aram Studio v4 - Rust Transformer</a:t>
+            </a:r>
+            <a:endParaRPr sz="1200" b="1">
+              <a:solidFill>
+                <a:srgbClr val="FF0000"/>
+              </a:solidFill>
+              <a:latin typeface="Calibri"/>
+              <a:ea typeface="Calibri"/>
+              <a:cs typeface="Calibri"/>
+              <a:sym typeface="Calibri"/>
+            </a:endParaRPr>
+          </a:p>
+          <a:p>
+            <a:pPr marL="171450" marR="0" lvl="0" indent="-133350" algn="l" rtl="0">
+              <a:lnSpc>
+                <a:spcPct val="100000"/>
+              </a:lnSpc>
+              <a:spcBef>
+                <a:spcPts val="0"/>
+              </a:spcBef>
+              <a:spcAft>
+                <a:spcPts val="0"/>
+              </a:spcAft>
+              <a:buClr>
+                <a:schemeClr val="dk1"/>
+              </a:buClr>
+              <a:buSzPts val="1200"/>
+              <a:buFont typeface="Calibri"/>
+              <a:buChar char="●"/>
+            </a:pPr>
+            <a:r>
+              <a:rPr lang="en" sz="1200">
+                <a:solidFill>
+                  <a:schemeClr val="dk1"/>
+                </a:solidFill>
+                <a:latin typeface="Calibri"/>
+                <a:ea typeface="Calibri"/>
+                <a:cs typeface="Calibri"/>
+                <a:sym typeface="Calibri"/>
+              </a:rPr>
+              <a:t>Rust-first decoder-only transformer application avoids Python-runtime dependencies</a:t>
+            </a:r>
+            <a:endParaRPr sz="1200">
+              <a:solidFill>
+                <a:schemeClr val="dk1"/>
+              </a:solidFill>
+              <a:latin typeface="Calibri"/>
+              <a:ea typeface="Calibri"/>
+              <a:cs typeface="Calibri"/>
+              <a:sym typeface="Calibri"/>
+            </a:endParaRPr>
+          </a:p>
+          <a:p>
+            <a:pPr marL="171450" marR="0" lvl="0" indent="-133350" algn="l" rtl="0">
+              <a:lnSpc>
+                <a:spcPct val="100000"/>
+              </a:lnSpc>
+              <a:spcBef>
+                <a:spcPts val="0"/>
+              </a:spcBef>
+              <a:spcAft>
+                <a:spcPts val="0"/>
+              </a:spcAft>
+              <a:buClr>
+                <a:schemeClr val="dk1"/>
+              </a:buClr>
+              <a:buSzPts val="1200"/>
+              <a:buFont typeface="Calibri"/>
+              <a:buChar char="●"/>
+            </a:pPr>
+            <a:r>
+              <a:rPr lang="en" sz="1200">
+                <a:solidFill>
+                  <a:schemeClr val="dk1"/>
+                </a:solidFill>
+                <a:latin typeface="Calibri"/>
+                <a:ea typeface="Calibri"/>
+                <a:cs typeface="Calibri"/>
+                <a:sym typeface="Calibri"/>
+              </a:rPr>
+              <a:t>Adding audio, multi-node training, retrieval, model merging, sandboxed tools, bounded multi-agent orchestration, multi-tenant serving, red teaming, and model-card generation</a:t>
+            </a:r>
+            <a:endParaRPr sz="1200">
+              <a:solidFill>
+                <a:schemeClr val="dk1"/>
+              </a:solidFill>
+              <a:latin typeface="Calibri"/>
+              <a:ea typeface="Calibri"/>
+              <a:cs typeface="Calibri"/>
+              <a:sym typeface="Calibri"/>
+            </a:endParaRPr>
+          </a:p>
+          <a:p>
+            <a:pPr marL="171450" marR="0" lvl="0" indent="-133350" algn="l" rtl="0">
+              <a:lnSpc>
+                <a:spcPct val="100000"/>
+              </a:lnSpc>
+              <a:spcBef>
+                <a:spcPts val="0"/>
+              </a:spcBef>
+              <a:spcAft>
+                <a:spcPts val="0"/>
+              </a:spcAft>
+              <a:buClr>
+                <a:schemeClr val="dk1"/>
+              </a:buClr>
+              <a:buSzPts val="1200"/>
+              <a:buFont typeface="Calibri"/>
+              <a:buChar char="●"/>
+            </a:pPr>
+            <a:r>
+              <a:rPr lang="en" sz="1200">
+                <a:solidFill>
+                  <a:schemeClr val="dk1"/>
+                </a:solidFill>
+                <a:latin typeface="Calibri"/>
+                <a:ea typeface="Calibri"/>
+                <a:cs typeface="Calibri"/>
+                <a:sym typeface="Calibri"/>
+              </a:rPr>
+              <a:t>Released after 6 months, 4 major versions, 55 phases, and 21 Cargo workspace crates; source on GitHub</a:t>
+            </a:r>
+            <a:endParaRPr sz="1200">
+              <a:solidFill>
+                <a:schemeClr val="dk1"/>
+              </a:solidFill>
+              <a:latin typeface="Calibri"/>
+              <a:ea typeface="Calibri"/>
+              <a:cs typeface="Calibri"/>
+              <a:sym typeface="Calibri"/>
+            </a:endParaRPr>
+          </a:p>
+          <a:p>
+            <a:pPr marL="171450" marR="0" lvl="0" indent="-133350" algn="l" rtl="0">
+              <a:lnSpc>
+                <a:spcPct val="100000"/>
+              </a:lnSpc>
+              <a:spcBef>
+                <a:spcPts val="0"/>
+              </a:spcBef>
+              <a:spcAft>
+                <a:spcPts val="0"/>
+              </a:spcAft>
+              <a:buClr>
+                <a:schemeClr val="dk1"/>
+              </a:buClr>
+              <a:buSzPts val="1200"/>
+              <a:buFont typeface="Calibri"/>
+              <a:buChar char="●"/>
+            </a:pPr>
+            <a:r>
+              <a:rPr lang="en" sz="1200">
+                <a:solidFill>
+                  <a:schemeClr val="dk1"/>
+                </a:solidFill>
+                <a:latin typeface="Calibri"/>
+                <a:ea typeface="Calibri"/>
+                <a:cs typeface="Calibri"/>
+                <a:sym typeface="Calibri"/>
+              </a:rPr>
+              <a:t>Demonstrates a complete multimodal, safety-bounded LLM system</a:t>
+            </a:r>
+            <a:endParaRPr sz="1200">
+              <a:solidFill>
+                <a:schemeClr val="dk1"/>
+              </a:solidFill>
+              <a:latin typeface="Calibri"/>
+              <a:ea typeface="Calibri"/>
+              <a:cs typeface="Calibri"/>
+              <a:sym typeface="Calibri"/>
+            </a:endParaRPr>
+          </a:p>
+          <a:p>
+            <a:pPr marL="171450" marR="0" lvl="0" indent="-114300" algn="l" rtl="0">
+              <a:lnSpc>
+                <a:spcPct val="100000"/>
+              </a:lnSpc>
+              <a:spcBef>
+                <a:spcPts val="0"/>
+              </a:spcBef>
+              <a:spcAft>
+                <a:spcPts val="0"/>
+              </a:spcAft>
+              <a:buClr>
+                <a:schemeClr val="dk1"/>
+              </a:buClr>
+              <a:buSzPts val="900"/>
+              <a:buFont typeface="Calibri"/>
+              <a:buChar char="●"/>
+            </a:pPr>
+            <a:r>
+              <a:rPr lang="en" sz="900" u="sng">
+                <a:solidFill>
+                  <a:schemeClr val="hlink"/>
+                </a:solidFill>
+                <a:latin typeface="Calibri"/>
+                <a:ea typeface="Calibri"/>
+                <a:cs typeface="Calibri"/>
+                <a:sym typeface="Calibri"/>
+                <a:hlinkClick r:id="rId3"/>
+              </a:rPr>
+              <a:t>https://github.com/AarambhDevHub</a:t>
+            </a:r>
+            <a:endParaRPr sz="900">
+              <a:solidFill>
+                <a:schemeClr val="dk1"/>
+              </a:solidFill>
+              <a:latin typeface="Calibri"/>
+              <a:ea typeface="Calibri"/>
+              <a:cs typeface="Calibri"/>
+              <a:sym typeface="Calibri"/>
+            </a:endParaRPr>
+          </a:p>
+          <a:p>
+            <a:pPr marL="171450" marR="0" lvl="0" indent="-114300" algn="l" rtl="0">
+              <a:lnSpc>
+                <a:spcPct val="100000"/>
+              </a:lnSpc>
+              <a:spcBef>
+                <a:spcPts val="0"/>
+              </a:spcBef>
+              <a:spcAft>
+                <a:spcPts val="0"/>
+              </a:spcAft>
+              <a:buClr>
+                <a:schemeClr val="dk1"/>
+              </a:buClr>
+              <a:buSzPts val="900"/>
+              <a:buFont typeface="Calibri"/>
+              <a:buChar char="●"/>
+            </a:pPr>
+            <a:r>
+              <a:rPr lang="en" sz="900" u="sng">
+                <a:solidFill>
+                  <a:schemeClr val="hlink"/>
+                </a:solidFill>
+                <a:latin typeface="Calibri"/>
+                <a:ea typeface="Calibri"/>
+                <a:cs typeface="Calibri"/>
+                <a:sym typeface="Calibri"/>
+                <a:hlinkClick r:id="rId4"/>
+              </a:rPr>
+              <a:t>https://github.com/AarambhDevHub/aarambh-studio</a:t>
+            </a:r>
+            <a:endParaRPr sz="900">
+              <a:solidFill>
+                <a:schemeClr val="dk1"/>
+              </a:solidFill>
+              <a:latin typeface="Calibri"/>
+              <a:ea typeface="Calibri"/>
+              <a:cs typeface="Calibri"/>
+              <a:sym typeface="Calibri"/>
+            </a:endParaRPr>
+          </a:p>
+          <a:p>
+            <a:pPr marL="171450" marR="0" lvl="0" indent="-114300" algn="l" rtl="0">
+              <a:lnSpc>
+                <a:spcPct val="100000"/>
+              </a:lnSpc>
+              <a:spcBef>
+                <a:spcPts val="0"/>
+              </a:spcBef>
+              <a:spcAft>
+                <a:spcPts val="0"/>
+              </a:spcAft>
+              <a:buClr>
+                <a:schemeClr val="dk1"/>
+              </a:buClr>
+              <a:buSzPts val="900"/>
+              <a:buFont typeface="Calibri"/>
+              <a:buChar char="●"/>
+            </a:pPr>
+            <a:r>
+              <a:rPr lang="en" sz="900" u="sng">
+                <a:solidFill>
+                  <a:schemeClr val="hlink"/>
+                </a:solidFill>
+                <a:latin typeface="Calibri"/>
+                <a:ea typeface="Calibri"/>
+                <a:cs typeface="Calibri"/>
+                <a:sym typeface="Calibri"/>
+                <a:hlinkClick r:id="rId5"/>
+              </a:rPr>
+              <a:t>https://github.com/AarambhDevHub/aarambh-studio/tree/main/docs</a:t>
+            </a:r>
+            <a:r>
+              <a:rPr lang="en" sz="900">
+                <a:solidFill>
+                  <a:schemeClr val="dk1"/>
+                </a:solidFill>
+                <a:latin typeface="Calibri"/>
+                <a:ea typeface="Calibri"/>
+                <a:cs typeface="Calibri"/>
+                <a:sym typeface="Calibri"/>
+              </a:rPr>
+              <a:t> </a:t>
+            </a:r>
+            <a:endParaRPr sz="900">
+              <a:solidFill>
+                <a:schemeClr val="dk1"/>
+              </a:solidFill>
+              <a:latin typeface="Calibri"/>
+              <a:ea typeface="Calibri"/>
+              <a:cs typeface="Calibri"/>
+              <a:sym typeface="Calibri"/>
+            </a:endParaRPr>
+          </a:p>
+          <a:p>
+            <a:pPr marL="171450" marR="0" lvl="0" indent="-114300" algn="l" rtl="0">
+              <a:lnSpc>
+                <a:spcPct val="100000"/>
+              </a:lnSpc>
+              <a:spcBef>
+                <a:spcPts val="0"/>
+              </a:spcBef>
+              <a:spcAft>
+                <a:spcPts val="0"/>
+              </a:spcAft>
+              <a:buClr>
+                <a:schemeClr val="dk1"/>
+              </a:buClr>
+              <a:buSzPts val="900"/>
+              <a:buFont typeface="Calibri"/>
+              <a:buChar char="●"/>
+            </a:pPr>
+            <a:r>
+              <a:rPr lang="en" sz="900" u="sng">
+                <a:solidFill>
+                  <a:schemeClr val="hlink"/>
+                </a:solidFill>
+                <a:latin typeface="Calibri"/>
+                <a:ea typeface="Calibri"/>
+                <a:cs typeface="Calibri"/>
+                <a:sym typeface="Calibri"/>
+                <a:hlinkClick r:id="rId6"/>
+              </a:rPr>
+              <a:t>https://www.youtube.com/watch?v=Inkz4jzwICU</a:t>
+            </a:r>
+            <a:r>
+              <a:rPr lang="en" sz="900">
+                <a:solidFill>
+                  <a:schemeClr val="dk1"/>
+                </a:solidFill>
+                <a:latin typeface="Calibri"/>
+                <a:ea typeface="Calibri"/>
+                <a:cs typeface="Calibri"/>
+                <a:sym typeface="Calibri"/>
+              </a:rPr>
+              <a:t> </a:t>
+            </a:r>
+            <a:endParaRPr sz="900">
+              <a:solidFill>
+                <a:schemeClr val="dk1"/>
+              </a:solidFill>
+              <a:latin typeface="Calibri"/>
+              <a:ea typeface="Calibri"/>
+              <a:cs typeface="Calibri"/>
+              <a:sym typeface="Calibri"/>
+            </a:endParaRPr>
+          </a:p>
+        </p:txBody>
+      </p:sp>
+      <p:sp>
+        <p:nvSpPr>
+          <p:cNvPr id="238" name="Google Shape;238;p34"/>
+          <p:cNvSpPr txBox="1"/>
+          <p:nvPr/>
+        </p:nvSpPr>
+        <p:spPr>
+          <a:xfrm>
+            <a:off x="4624754" y="1887745"/>
+            <a:ext cx="4425600" cy="3158400"/>
+          </a:xfrm>
+          <a:prstGeom prst="rect">
+            <a:avLst/>
+          </a:prstGeom>
+          <a:solidFill>
+            <a:srgbClr val="FFF2CC"/>
+          </a:solidFill>
+          <a:ln w="9525" cap="flat" cmpd="sng">
+            <a:solidFill>
+              <a:srgbClr val="FF0000"/>
+            </a:solidFill>
+            <a:prstDash val="solid"/>
+            <a:round/>
+            <a:headEnd type="none" w="sm" len="sm"/>
+            <a:tailEnd type="none" w="sm" len="sm"/>
+          </a:ln>
+        </p:spPr>
+        <p:txBody>
+          <a:bodyPr spcFirstLastPara="1" wrap="square" lIns="9125" tIns="9125" rIns="9125" bIns="9125" anchor="t" anchorCtr="0">
+            <a:spAutoFit/>
+          </a:bodyPr>
+          <a:lstStyle/>
+          <a:p>
+            <a:pPr marL="171450" marR="0" lvl="0" indent="-133350" algn="l" rtl="0">
+              <a:lnSpc>
+                <a:spcPct val="100000"/>
+              </a:lnSpc>
+              <a:spcBef>
+                <a:spcPts val="0"/>
+              </a:spcBef>
+              <a:spcAft>
+                <a:spcPts val="0"/>
+              </a:spcAft>
+              <a:buClr>
+                <a:srgbClr val="FF0000"/>
+              </a:buClr>
+              <a:buSzPts val="1200"/>
+              <a:buFont typeface="Calibri"/>
+              <a:buChar char="●"/>
+            </a:pPr>
+            <a:r>
+              <a:rPr lang="en" sz="1200" b="1">
+                <a:solidFill>
+                  <a:srgbClr val="FF0000"/>
+                </a:solidFill>
+                <a:latin typeface="Calibri"/>
+                <a:ea typeface="Calibri"/>
+                <a:cs typeface="Calibri"/>
+                <a:sym typeface="Calibri"/>
+              </a:rPr>
+              <a:t>Google’s Reader-Controlled AI Search</a:t>
+            </a:r>
+            <a:endParaRPr sz="1200" b="1">
+              <a:solidFill>
+                <a:srgbClr val="FF0000"/>
+              </a:solidFill>
+              <a:latin typeface="Calibri"/>
+              <a:ea typeface="Calibri"/>
+              <a:cs typeface="Calibri"/>
+              <a:sym typeface="Calibri"/>
+            </a:endParaRPr>
+          </a:p>
+          <a:p>
+            <a:pPr marL="171450" marR="0" lvl="0" indent="-133350" algn="l" rtl="0">
+              <a:lnSpc>
+                <a:spcPct val="100000"/>
+              </a:lnSpc>
+              <a:spcBef>
+                <a:spcPts val="0"/>
+              </a:spcBef>
+              <a:spcAft>
+                <a:spcPts val="0"/>
+              </a:spcAft>
+              <a:buClr>
+                <a:schemeClr val="dk1"/>
+              </a:buClr>
+              <a:buSzPts val="1200"/>
+              <a:buFont typeface="Calibri"/>
+              <a:buChar char="●"/>
+            </a:pPr>
+            <a:r>
+              <a:rPr lang="en" sz="1200">
+                <a:solidFill>
+                  <a:schemeClr val="dk1"/>
+                </a:solidFill>
+                <a:latin typeface="Calibri"/>
+                <a:ea typeface="Calibri"/>
+                <a:cs typeface="Calibri"/>
+                <a:sym typeface="Calibri"/>
+              </a:rPr>
+              <a:t>Google launched an embeddable “Preferred Sources” button for publishers on August 20, 2026. A reader can click it on a site to add that domain or subdomain to their personal preferred-source list.</a:t>
+            </a:r>
+            <a:endParaRPr sz="1200">
+              <a:solidFill>
+                <a:schemeClr val="dk1"/>
+              </a:solidFill>
+              <a:latin typeface="Calibri"/>
+              <a:ea typeface="Calibri"/>
+              <a:cs typeface="Calibri"/>
+              <a:sym typeface="Calibri"/>
+            </a:endParaRPr>
+          </a:p>
+          <a:p>
+            <a:pPr marL="171450" marR="0" lvl="0" indent="-133350" algn="l" rtl="0">
+              <a:lnSpc>
+                <a:spcPct val="100000"/>
+              </a:lnSpc>
+              <a:spcBef>
+                <a:spcPts val="0"/>
+              </a:spcBef>
+              <a:spcAft>
+                <a:spcPts val="0"/>
+              </a:spcAft>
+              <a:buClr>
+                <a:schemeClr val="dk1"/>
+              </a:buClr>
+              <a:buSzPts val="1200"/>
+              <a:buFont typeface="Calibri"/>
+              <a:buChar char="●"/>
+            </a:pPr>
+            <a:r>
+              <a:rPr lang="en" sz="1200">
+                <a:solidFill>
+                  <a:schemeClr val="dk1"/>
+                </a:solidFill>
+                <a:latin typeface="Calibri"/>
+                <a:ea typeface="Calibri"/>
+                <a:cs typeface="Calibri"/>
+                <a:sym typeface="Calibri"/>
+              </a:rPr>
+              <a:t>The preference can affect relevant Google Top Stories, AI Overviews, and AI Mode results. Google returns the reader to the page after selection.</a:t>
+            </a:r>
+            <a:endParaRPr sz="1200">
+              <a:solidFill>
+                <a:schemeClr val="dk1"/>
+              </a:solidFill>
+              <a:latin typeface="Calibri"/>
+              <a:ea typeface="Calibri"/>
+              <a:cs typeface="Calibri"/>
+              <a:sym typeface="Calibri"/>
+            </a:endParaRPr>
+          </a:p>
+          <a:p>
+            <a:pPr marL="171450" marR="0" lvl="0" indent="-133350" algn="l" rtl="0">
+              <a:lnSpc>
+                <a:spcPct val="100000"/>
+              </a:lnSpc>
+              <a:spcBef>
+                <a:spcPts val="0"/>
+              </a:spcBef>
+              <a:spcAft>
+                <a:spcPts val="0"/>
+              </a:spcAft>
+              <a:buClr>
+                <a:schemeClr val="dk1"/>
+              </a:buClr>
+              <a:buSzPts val="1200"/>
+              <a:buFont typeface="Calibri"/>
+              <a:buChar char="●"/>
+            </a:pPr>
+            <a:r>
+              <a:rPr lang="en" sz="1200">
+                <a:solidFill>
+                  <a:schemeClr val="dk1"/>
+                </a:solidFill>
+                <a:latin typeface="Calibri"/>
+                <a:ea typeface="Calibri"/>
+                <a:cs typeface="Calibri"/>
+                <a:sym typeface="Calibri"/>
+              </a:rPr>
+              <a:t>Publishers have faced reduced referral traffic from AI-generated answers. The button lowers the friction of choosing trusted publishers, replacing buried settings with an on-page action.</a:t>
+            </a:r>
+            <a:endParaRPr sz="1200">
+              <a:solidFill>
+                <a:schemeClr val="dk1"/>
+              </a:solidFill>
+              <a:latin typeface="Calibri"/>
+              <a:ea typeface="Calibri"/>
+              <a:cs typeface="Calibri"/>
+              <a:sym typeface="Calibri"/>
+            </a:endParaRPr>
+          </a:p>
+          <a:p>
+            <a:pPr marL="171450" marR="0" lvl="0" indent="-133350" algn="l" rtl="0">
+              <a:lnSpc>
+                <a:spcPct val="100000"/>
+              </a:lnSpc>
+              <a:spcBef>
+                <a:spcPts val="0"/>
+              </a:spcBef>
+              <a:spcAft>
+                <a:spcPts val="0"/>
+              </a:spcAft>
+              <a:buClr>
+                <a:schemeClr val="dk1"/>
+              </a:buClr>
+              <a:buSzPts val="1200"/>
+              <a:buFont typeface="Calibri"/>
+              <a:buChar char="●"/>
+            </a:pPr>
+            <a:r>
+              <a:rPr lang="en" sz="1200">
+                <a:solidFill>
+                  <a:schemeClr val="dk1"/>
+                </a:solidFill>
+                <a:latin typeface="Calibri"/>
+                <a:ea typeface="Calibri"/>
+                <a:cs typeface="Calibri"/>
+                <a:sym typeface="Calibri"/>
+              </a:rPr>
+              <a:t>This is a loyalty tool, not a universal ranking boost</a:t>
+            </a:r>
+            <a:endParaRPr sz="1200">
+              <a:solidFill>
+                <a:schemeClr val="dk1"/>
+              </a:solidFill>
+              <a:latin typeface="Calibri"/>
+              <a:ea typeface="Calibri"/>
+              <a:cs typeface="Calibri"/>
+              <a:sym typeface="Calibri"/>
+            </a:endParaRPr>
+          </a:p>
+          <a:p>
+            <a:pPr marL="171450" marR="0" lvl="0" indent="-133350" algn="l" rtl="0">
+              <a:lnSpc>
+                <a:spcPct val="100000"/>
+              </a:lnSpc>
+              <a:spcBef>
+                <a:spcPts val="0"/>
+              </a:spcBef>
+              <a:spcAft>
+                <a:spcPts val="0"/>
+              </a:spcAft>
+              <a:buClr>
+                <a:schemeClr val="dk1"/>
+              </a:buClr>
+              <a:buSzPts val="1200"/>
+              <a:buFont typeface="Calibri"/>
+              <a:buChar char="●"/>
+            </a:pPr>
+            <a:r>
+              <a:rPr lang="en" sz="1200">
+                <a:solidFill>
+                  <a:schemeClr val="dk1"/>
+                </a:solidFill>
+                <a:latin typeface="Calibri"/>
+                <a:ea typeface="Calibri"/>
+                <a:cs typeface="Calibri"/>
+                <a:sym typeface="Calibri"/>
+              </a:rPr>
+              <a:t>Google also announced natural-language Discover-feed controls, allowing people to describe what they want more or less of, reinforcing personalized content selection.</a:t>
+            </a:r>
+            <a:endParaRPr sz="1200">
+              <a:solidFill>
+                <a:schemeClr val="dk1"/>
+              </a:solidFill>
+              <a:latin typeface="Calibri"/>
+              <a:ea typeface="Calibri"/>
+              <a:cs typeface="Calibri"/>
+              <a:sym typeface="Calibri"/>
+            </a:endParaRPr>
+          </a:p>
+          <a:p>
+            <a:pPr marL="171450" marR="0" lvl="0" indent="-114300" algn="l" rtl="0">
+              <a:lnSpc>
+                <a:spcPct val="100000"/>
+              </a:lnSpc>
+              <a:spcBef>
+                <a:spcPts val="0"/>
+              </a:spcBef>
+              <a:spcAft>
+                <a:spcPts val="0"/>
+              </a:spcAft>
+              <a:buClr>
+                <a:schemeClr val="dk1"/>
+              </a:buClr>
+              <a:buSzPts val="900"/>
+              <a:buFont typeface="Calibri"/>
+              <a:buChar char="●"/>
+            </a:pPr>
+            <a:r>
+              <a:rPr lang="en" sz="900" u="sng">
+                <a:solidFill>
+                  <a:schemeClr val="hlink"/>
+                </a:solidFill>
+                <a:latin typeface="Calibri"/>
+                <a:ea typeface="Calibri"/>
+                <a:cs typeface="Calibri"/>
+                <a:sym typeface="Calibri"/>
+                <a:hlinkClick r:id="rId7"/>
+              </a:rPr>
+              <a:t>https://developers.google.com/search/docs/specialty/news/preferred-sources</a:t>
+            </a:r>
+            <a:r>
+              <a:rPr lang="en" sz="900">
+                <a:solidFill>
+                  <a:schemeClr val="dk1"/>
+                </a:solidFill>
+                <a:latin typeface="Calibri"/>
+                <a:ea typeface="Calibri"/>
+                <a:cs typeface="Calibri"/>
+                <a:sym typeface="Calibri"/>
+              </a:rPr>
+              <a:t> </a:t>
+            </a:r>
+            <a:endParaRPr sz="900">
+              <a:solidFill>
+                <a:schemeClr val="dk1"/>
+              </a:solidFill>
+              <a:latin typeface="Calibri"/>
+              <a:ea typeface="Calibri"/>
+              <a:cs typeface="Calibri"/>
+              <a:sym typeface="Calibri"/>
+            </a:endParaRPr>
+          </a:p>
+          <a:p>
+            <a:pPr marL="171450" marR="0" lvl="0" indent="-114300" algn="l" rtl="0">
+              <a:lnSpc>
+                <a:spcPct val="100000"/>
+              </a:lnSpc>
+              <a:spcBef>
+                <a:spcPts val="0"/>
+              </a:spcBef>
+              <a:spcAft>
+                <a:spcPts val="0"/>
+              </a:spcAft>
+              <a:buClr>
+                <a:schemeClr val="dk1"/>
+              </a:buClr>
+              <a:buSzPts val="900"/>
+              <a:buFont typeface="Calibri"/>
+              <a:buChar char="●"/>
+            </a:pPr>
+            <a:r>
+              <a:rPr lang="en" sz="900" u="sng">
+                <a:solidFill>
+                  <a:schemeClr val="hlink"/>
+                </a:solidFill>
+                <a:latin typeface="Calibri"/>
+                <a:ea typeface="Calibri"/>
+                <a:cs typeface="Calibri"/>
+                <a:sym typeface="Calibri"/>
+                <a:hlinkClick r:id="rId8"/>
+              </a:rPr>
+              <a:t>https://blog.google/products-and-platforms/products/search/personalize-search-discover-news/</a:t>
+            </a:r>
+            <a:r>
+              <a:rPr lang="en" sz="900">
+                <a:solidFill>
+                  <a:schemeClr val="dk1"/>
+                </a:solidFill>
+                <a:latin typeface="Calibri"/>
+                <a:ea typeface="Calibri"/>
+                <a:cs typeface="Calibri"/>
+                <a:sym typeface="Calibri"/>
+              </a:rPr>
+              <a:t> </a:t>
+            </a:r>
+            <a:endParaRPr sz="900">
+              <a:solidFill>
+                <a:schemeClr val="dk1"/>
+              </a:solidFill>
+              <a:latin typeface="Calibri"/>
+              <a:ea typeface="Calibri"/>
+              <a:cs typeface="Calibri"/>
+              <a:sym typeface="Calibri"/>
+            </a:endParaRPr>
+          </a:p>
+          <a:p>
+            <a:pPr marL="171450" marR="0" lvl="0" indent="-114300" algn="l" rtl="0">
+              <a:lnSpc>
+                <a:spcPct val="100000"/>
+              </a:lnSpc>
+              <a:spcBef>
+                <a:spcPts val="0"/>
+              </a:spcBef>
+              <a:spcAft>
+                <a:spcPts val="0"/>
+              </a:spcAft>
+              <a:buClr>
+                <a:schemeClr val="dk1"/>
+              </a:buClr>
+              <a:buSzPts val="900"/>
+              <a:buFont typeface="Calibri"/>
+              <a:buChar char="●"/>
+            </a:pPr>
+            <a:r>
+              <a:rPr lang="en" sz="900" u="sng">
+                <a:solidFill>
+                  <a:schemeClr val="hlink"/>
+                </a:solidFill>
+                <a:latin typeface="Calibri"/>
+                <a:ea typeface="Calibri"/>
+                <a:cs typeface="Calibri"/>
+                <a:sym typeface="Calibri"/>
+                <a:hlinkClick r:id="rId9"/>
+              </a:rPr>
+              <a:t>https://www.youtube.com/watch?v=tix4tq7iUAE</a:t>
+            </a:r>
+            <a:r>
+              <a:rPr lang="en" sz="900">
+                <a:solidFill>
+                  <a:schemeClr val="dk1"/>
+                </a:solidFill>
+                <a:latin typeface="Calibri"/>
+                <a:ea typeface="Calibri"/>
+                <a:cs typeface="Calibri"/>
+                <a:sym typeface="Calibri"/>
+              </a:rPr>
+              <a:t> </a:t>
+            </a:r>
+            <a:endParaRPr sz="900">
+              <a:solidFill>
+                <a:schemeClr val="dk1"/>
+              </a:solidFill>
+              <a:latin typeface="Calibri"/>
+              <a:ea typeface="Calibri"/>
+              <a:cs typeface="Calibri"/>
+              <a:sym typeface="Calibri"/>
+            </a:endParaRPr>
+          </a:p>
+        </p:txBody>
+      </p:sp>
+      <p:pic>
+        <p:nvPicPr>
+          <p:cNvPr id="239" name="Google Shape;239;p34"/>
+          <p:cNvPicPr preferRelativeResize="0"/>
+          <p:nvPr/>
+        </p:nvPicPr>
+        <p:blipFill>
+          <a:blip r:embed="rId10" cstate="email">
+            <a:alphaModFix/>
+            <a:extLst>
+              <a:ext uri="{28A0092B-C50C-407E-A947-70E740481C1C}">
+                <a14:useLocalDpi xmlns:a14="http://schemas.microsoft.com/office/drawing/2010/main"/>
+              </a:ext>
+            </a:extLst>
+          </a:blip>
+          <a:stretch>
+            <a:fillRect/>
+          </a:stretch>
+        </p:blipFill>
+        <p:spPr>
+          <a:xfrm>
+            <a:off x="81775" y="2749350"/>
+            <a:ext cx="1031100" cy="1031100"/>
+          </a:xfrm>
+          <a:prstGeom prst="rect">
+            <a:avLst/>
+          </a:prstGeom>
+          <a:noFill/>
+          <a:ln w="9525" cap="flat" cmpd="sng">
+            <a:solidFill>
+              <a:srgbClr val="FF0000"/>
+            </a:solidFill>
+            <a:prstDash val="solid"/>
+            <a:round/>
+            <a:headEnd type="none" w="sm" len="sm"/>
+            <a:tailEnd type="none" w="sm" len="sm"/>
+          </a:ln>
+        </p:spPr>
+      </p:pic>
+      <p:pic>
+        <p:nvPicPr>
+          <p:cNvPr id="240" name="Google Shape;240;p34"/>
+          <p:cNvPicPr preferRelativeResize="0"/>
+          <p:nvPr/>
+        </p:nvPicPr>
+        <p:blipFill>
+          <a:blip r:embed="rId11" cstate="email">
+            <a:alphaModFix/>
+            <a:extLst>
+              <a:ext uri="{28A0092B-C50C-407E-A947-70E740481C1C}">
+                <a14:useLocalDpi xmlns:a14="http://schemas.microsoft.com/office/drawing/2010/main"/>
+              </a:ext>
+            </a:extLst>
+          </a:blip>
+          <a:stretch>
+            <a:fillRect/>
+          </a:stretch>
+        </p:blipFill>
+        <p:spPr>
+          <a:xfrm>
+            <a:off x="1307553" y="2749349"/>
+            <a:ext cx="3187024" cy="1031100"/>
+          </a:xfrm>
+          <a:prstGeom prst="rect">
+            <a:avLst/>
+          </a:prstGeom>
+          <a:noFill/>
+          <a:ln w="9525" cap="flat" cmpd="sng">
+            <a:solidFill>
+              <a:srgbClr val="FF0000"/>
+            </a:solidFill>
+            <a:prstDash val="solid"/>
+            <a:round/>
+            <a:headEnd type="none" w="sm" len="sm"/>
+            <a:tailEnd type="none" w="sm" len="sm"/>
+          </a:ln>
+        </p:spPr>
+      </p:pic>
+      <p:pic>
+        <p:nvPicPr>
+          <p:cNvPr id="241" name="Google Shape;241;p34"/>
+          <p:cNvPicPr preferRelativeResize="0"/>
+          <p:nvPr/>
+        </p:nvPicPr>
+        <p:blipFill>
+          <a:blip r:embed="rId12" cstate="email">
+            <a:alphaModFix/>
+            <a:extLst>
+              <a:ext uri="{28A0092B-C50C-407E-A947-70E740481C1C}">
+                <a14:useLocalDpi xmlns:a14="http://schemas.microsoft.com/office/drawing/2010/main"/>
+              </a:ext>
+            </a:extLst>
+          </a:blip>
+          <a:stretch>
+            <a:fillRect/>
+          </a:stretch>
+        </p:blipFill>
+        <p:spPr>
+          <a:xfrm>
+            <a:off x="5070950" y="522725"/>
+            <a:ext cx="3979400" cy="1259304"/>
+          </a:xfrm>
+          <a:prstGeom prst="rect">
+            <a:avLst/>
+          </a:prstGeom>
+          <a:noFill/>
+          <a:ln w="9525" cap="flat" cmpd="sng">
+            <a:solidFill>
+              <a:srgbClr val="FF0000"/>
+            </a:solidFill>
+            <a:prstDash val="solid"/>
+            <a:round/>
+            <a:headEnd type="none" w="sm" len="sm"/>
+            <a:tailEnd type="none" w="sm" len="sm"/>
+          </a:ln>
+        </p:spPr>
+      </p:pic>
+    </p:spTree>
+  </p:cSld>
+  <p:clrMapOvr>
+    <a:masterClrMapping/>
+  </p:clrMapOvr>
+</p:sld>
+</file>
+
+<file path=ppt/slides/slide21.xml><?xml version="1.0" encoding="utf-8"?>
+<p:sld xmlns:a="http://schemas.openxmlformats.org/drawingml/2006/main" xmlns:r="http://schemas.openxmlformats.org/officeDocument/2006/relationships" xmlns:p="http://schemas.openxmlformats.org/presentationml/2006/main">
+  <p:cSld>
+    <p:spTree>
+      <p:nvGrpSpPr>
+        <p:cNvPr id="1" name="Shape 245"/>
+        <p:cNvGrpSpPr/>
+        <p:nvPr/>
+      </p:nvGrpSpPr>
+      <p:grpSpPr>
+        <a:xfrm>
+          <a:off x="0" y="0"/>
+          <a:ext cx="0" cy="0"/>
+          <a:chOff x="0" y="0"/>
+          <a:chExt cx="0" cy="0"/>
+        </a:xfrm>
+      </p:grpSpPr>
+      <p:sp>
+        <p:nvSpPr>
+          <p:cNvPr id="246" name="Google Shape;246;p35"/>
+          <p:cNvSpPr txBox="1"/>
+          <p:nvPr/>
+        </p:nvSpPr>
+        <p:spPr>
+          <a:xfrm>
+            <a:off x="81775" y="0"/>
+            <a:ext cx="3636000" cy="326400"/>
+          </a:xfrm>
+          <a:prstGeom prst="rect">
+            <a:avLst/>
+          </a:prstGeom>
+          <a:noFill/>
+          <a:ln>
+            <a:noFill/>
+          </a:ln>
+        </p:spPr>
+        <p:txBody>
+          <a:bodyPr spcFirstLastPara="1" wrap="square" lIns="9125" tIns="9125" rIns="9125" bIns="9125" anchor="t" anchorCtr="0">
+            <a:spAutoFit/>
+          </a:bodyPr>
+          <a:lstStyle/>
+          <a:p>
+            <a:pPr marL="0" marR="0" lvl="0" indent="0" algn="l" rtl="0">
+              <a:lnSpc>
+                <a:spcPct val="100000"/>
+              </a:lnSpc>
+              <a:spcBef>
+                <a:spcPts val="0"/>
+              </a:spcBef>
+              <a:spcAft>
+                <a:spcPts val="0"/>
+              </a:spcAft>
+              <a:buClr>
+                <a:schemeClr val="dk1"/>
+              </a:buClr>
+              <a:buSzPts val="1100"/>
+              <a:buFont typeface="Arial"/>
+              <a:buNone/>
+            </a:pPr>
+            <a:r>
+              <a:rPr lang="en" sz="2000" b="1">
+                <a:solidFill>
+                  <a:schemeClr val="dk1"/>
+                </a:solidFill>
+                <a:latin typeface="Calibri"/>
+                <a:ea typeface="Calibri"/>
+                <a:cs typeface="Calibri"/>
+                <a:sym typeface="Calibri"/>
+              </a:rPr>
+              <a:t>AI Updates</a:t>
+            </a:r>
+            <a:endParaRPr sz="2000" b="1">
+              <a:solidFill>
+                <a:schemeClr val="dk1"/>
+              </a:solidFill>
+              <a:latin typeface="Calibri"/>
+              <a:ea typeface="Calibri"/>
+              <a:cs typeface="Calibri"/>
+              <a:sym typeface="Calibri"/>
+            </a:endParaRPr>
+          </a:p>
+        </p:txBody>
+      </p:sp>
+      <p:sp>
+        <p:nvSpPr>
+          <p:cNvPr id="247" name="Google Shape;247;p35"/>
+          <p:cNvSpPr txBox="1"/>
+          <p:nvPr/>
+        </p:nvSpPr>
+        <p:spPr>
+          <a:xfrm>
+            <a:off x="81765" y="420370"/>
             <a:ext cx="4425600" cy="2327400"/>
           </a:xfrm>
           <a:prstGeom prst="rect">
@@ -37192,7 +37733,7 @@
       </p:sp>
       <p:pic>
         <p:nvPicPr>
-          <p:cNvPr id="238" name="Google Shape;238;p34"/>
+          <p:cNvPr id="248" name="Google Shape;248;p35"/>
           <p:cNvPicPr preferRelativeResize="0"/>
           <p:nvPr/>
         </p:nvPicPr>
@@ -37231,7 +37772,7 @@
       </p:pic>
       <p:sp>
         <p:nvSpPr>
-          <p:cNvPr id="239" name="Google Shape;239;p34"/>
+          <p:cNvPr id="249" name="Google Shape;249;p35"/>
           <p:cNvSpPr txBox="1"/>
           <p:nvPr/>
         </p:nvSpPr>
@@ -37556,7 +38097,7 @@
       </p:sp>
       <p:pic>
         <p:nvPicPr>
-          <p:cNvPr id="240" name="Google Shape;240;p34"/>
+          <p:cNvPr id="250" name="Google Shape;250;p35"/>
           <p:cNvPicPr preferRelativeResize="0"/>
           <p:nvPr/>
         </p:nvPicPr>
@@ -37601,12 +38142,12 @@
 </p:sld>
 </file>
 
-<file path=ppt/slides/slide21.xml><?xml version="1.0" encoding="utf-8"?>
+<file path=ppt/slides/slide22.xml><?xml version="1.0" encoding="utf-8"?>
 <p:sld xmlns:a="http://schemas.openxmlformats.org/drawingml/2006/main" xmlns:r="http://schemas.openxmlformats.org/officeDocument/2006/relationships" xmlns:p="http://schemas.openxmlformats.org/presentationml/2006/main">
   <p:cSld>
     <p:spTree>
       <p:nvGrpSpPr>
-        <p:cNvPr id="1" name="Shape 244"/>
+        <p:cNvPr id="1" name="Shape 254"/>
         <p:cNvGrpSpPr/>
         <p:nvPr/>
       </p:nvGrpSpPr>
@@ -37620,7 +38161,7 @@
       </p:grpSpPr>
       <p:sp>
         <p:nvSpPr>
-          <p:cNvPr id="245" name="Google Shape;245;p35"/>
+          <p:cNvPr id="255" name="Google Shape;255;p36"/>
           <p:cNvSpPr txBox="1"/>
           <p:nvPr/>
         </p:nvSpPr>
@@ -37686,7 +38227,7 @@
       </p:sp>
       <p:sp>
         <p:nvSpPr>
-          <p:cNvPr id="246" name="Google Shape;246;p35"/>
+          <p:cNvPr id="256" name="Google Shape;256;p36"/>
           <p:cNvSpPr txBox="1"/>
           <p:nvPr/>
         </p:nvSpPr>
@@ -38181,7 +38722,7 @@
       </p:sp>
       <p:pic>
         <p:nvPicPr>
-          <p:cNvPr id="247" name="Google Shape;247;p35"/>
+          <p:cNvPr id="257" name="Google Shape;257;p36"/>
           <p:cNvPicPr preferRelativeResize="0"/>
           <p:nvPr/>
         </p:nvPicPr>
@@ -38220,7 +38761,7 @@
       </p:pic>
       <p:pic>
         <p:nvPicPr>
-          <p:cNvPr id="248" name="Google Shape;248;p35"/>
+          <p:cNvPr id="258" name="Google Shape;258;p36"/>
           <p:cNvPicPr preferRelativeResize="0"/>
           <p:nvPr/>
         </p:nvPicPr>
@@ -38265,12 +38806,12 @@
 </p:sld>
 </file>
 
-<file path=ppt/slides/slide22.xml><?xml version="1.0" encoding="utf-8"?>
+<file path=ppt/slides/slide23.xml><?xml version="1.0" encoding="utf-8"?>
 <p:sld xmlns:a="http://schemas.openxmlformats.org/drawingml/2006/main" xmlns:r="http://schemas.openxmlformats.org/officeDocument/2006/relationships" xmlns:p="http://schemas.openxmlformats.org/presentationml/2006/main">
   <p:cSld>
     <p:spTree>
       <p:nvGrpSpPr>
-        <p:cNvPr id="1" name="Shape 252"/>
+        <p:cNvPr id="1" name="Shape 262"/>
         <p:cNvGrpSpPr/>
         <p:nvPr/>
       </p:nvGrpSpPr>
@@ -38284,7 +38825,7 @@
       </p:grpSpPr>
       <p:sp>
         <p:nvSpPr>
-          <p:cNvPr id="253" name="Google Shape;253;p36"/>
+          <p:cNvPr id="263" name="Google Shape;263;p37"/>
           <p:cNvSpPr txBox="1"/>
           <p:nvPr/>
         </p:nvSpPr>
@@ -38350,7 +38891,7 @@
       </p:sp>
       <p:sp>
         <p:nvSpPr>
-          <p:cNvPr id="254" name="Google Shape;254;p36"/>
+          <p:cNvPr id="264" name="Google Shape;264;p37"/>
           <p:cNvSpPr txBox="1"/>
           <p:nvPr/>
         </p:nvSpPr>
@@ -38797,7 +39338,7 @@
       </p:sp>
       <p:pic>
         <p:nvPicPr>
-          <p:cNvPr id="255" name="Google Shape;255;p36"/>
+          <p:cNvPr id="265" name="Google Shape;265;p37"/>
           <p:cNvPicPr preferRelativeResize="0"/>
           <p:nvPr/>
         </p:nvPicPr>
@@ -38836,12 +39377,12 @@
 </p:sld>
 </file>
 
-<file path=ppt/slides/slide23.xml><?xml version="1.0" encoding="utf-8"?>
+<file path=ppt/slides/slide24.xml><?xml version="1.0" encoding="utf-8"?>
 <p:sld xmlns:a="http://schemas.openxmlformats.org/drawingml/2006/main" xmlns:r="http://schemas.openxmlformats.org/officeDocument/2006/relationships" xmlns:p="http://schemas.openxmlformats.org/presentationml/2006/main">
   <p:cSld>
     <p:spTree>
       <p:nvGrpSpPr>
-        <p:cNvPr id="1" name="Shape 259"/>
+        <p:cNvPr id="1" name="Shape 269"/>
         <p:cNvGrpSpPr/>
         <p:nvPr/>
       </p:nvGrpSpPr>
@@ -38855,7 +39396,7 @@
       </p:grpSpPr>
       <p:sp>
         <p:nvSpPr>
-          <p:cNvPr id="260" name="Google Shape;260;p37"/>
+          <p:cNvPr id="270" name="Google Shape;270;p38"/>
           <p:cNvSpPr txBox="1"/>
           <p:nvPr/>
         </p:nvSpPr>
@@ -38921,7 +39462,7 @@
       </p:sp>
       <p:sp>
         <p:nvSpPr>
-          <p:cNvPr id="261" name="Google Shape;261;p37"/>
+          <p:cNvPr id="271" name="Google Shape;271;p38"/>
           <p:cNvSpPr txBox="1"/>
           <p:nvPr/>
         </p:nvSpPr>
@@ -39049,7 +39590,7 @@
       </p:sp>
       <p:sp>
         <p:nvSpPr>
-          <p:cNvPr id="262" name="Google Shape;262;p37"/>
+          <p:cNvPr id="272" name="Google Shape;272;p38"/>
           <p:cNvSpPr txBox="1"/>
           <p:nvPr/>
         </p:nvSpPr>
@@ -39319,7 +39860,7 @@
       </p:sp>
       <p:sp>
         <p:nvSpPr>
-          <p:cNvPr id="263" name="Google Shape;263;p37"/>
+          <p:cNvPr id="273" name="Google Shape;273;p38"/>
           <p:cNvSpPr txBox="1"/>
           <p:nvPr/>
         </p:nvSpPr>
@@ -39580,7 +40121,7 @@
       </p:sp>
       <p:pic>
         <p:nvPicPr>
-          <p:cNvPr id="264" name="Google Shape;264;p37"/>
+          <p:cNvPr id="274" name="Google Shape;274;p38"/>
           <p:cNvPicPr preferRelativeResize="0"/>
           <p:nvPr/>
         </p:nvPicPr>
@@ -39619,7 +40160,7 @@
       </p:pic>
       <p:pic>
         <p:nvPicPr>
-          <p:cNvPr id="265" name="Google Shape;265;p37"/>
+          <p:cNvPr id="275" name="Google Shape;275;p38"/>
           <p:cNvPicPr preferRelativeResize="0"/>
           <p:nvPr/>
         </p:nvPicPr>
@@ -39664,12 +40205,12 @@
 </p:sld>
 </file>
 
-<file path=ppt/slides/slide24.xml><?xml version="1.0" encoding="utf-8"?>
+<file path=ppt/slides/slide25.xml><?xml version="1.0" encoding="utf-8"?>
 <p:sld xmlns:a="http://schemas.openxmlformats.org/drawingml/2006/main" xmlns:r="http://schemas.openxmlformats.org/officeDocument/2006/relationships" xmlns:p="http://schemas.openxmlformats.org/presentationml/2006/main">
   <p:cSld>
     <p:spTree>
       <p:nvGrpSpPr>
-        <p:cNvPr id="1" name="Shape 269"/>
+        <p:cNvPr id="1" name="Shape 279"/>
         <p:cNvGrpSpPr/>
         <p:nvPr/>
       </p:nvGrpSpPr>
@@ -39683,7 +40224,7 @@
       </p:grpSpPr>
       <p:pic>
         <p:nvPicPr>
-          <p:cNvPr id="270" name="Google Shape;270;p38"/>
+          <p:cNvPr id="280" name="Google Shape;280;p39"/>
           <p:cNvPicPr preferRelativeResize="0"/>
           <p:nvPr/>
         </p:nvPicPr>
@@ -39715,7 +40256,7 @@
       </p:pic>
       <p:sp>
         <p:nvSpPr>
-          <p:cNvPr id="271" name="Google Shape;271;p38"/>
+          <p:cNvPr id="281" name="Google Shape;281;p39"/>
           <p:cNvSpPr txBox="1"/>
           <p:nvPr/>
         </p:nvSpPr>
@@ -39781,7 +40322,7 @@
       </p:sp>
       <p:sp>
         <p:nvSpPr>
-          <p:cNvPr id="272" name="Google Shape;272;p38"/>
+          <p:cNvPr id="282" name="Google Shape;282;p39"/>
           <p:cNvSpPr txBox="1"/>
           <p:nvPr/>
         </p:nvSpPr>
@@ -40211,7 +40752,7 @@
       </p:sp>
       <p:pic>
         <p:nvPicPr>
-          <p:cNvPr id="273" name="Google Shape;273;p38"/>
+          <p:cNvPr id="283" name="Google Shape;283;p39"/>
           <p:cNvPicPr preferRelativeResize="0"/>
           <p:nvPr/>
         </p:nvPicPr>
@@ -40243,7 +40784,7 @@
       </p:pic>
       <p:sp>
         <p:nvSpPr>
-          <p:cNvPr id="274" name="Google Shape;274;p38"/>
+          <p:cNvPr id="284" name="Google Shape;284;p39"/>
           <p:cNvSpPr txBox="1"/>
           <p:nvPr/>
         </p:nvSpPr>
@@ -40322,7 +40863,7 @@
       </p:sp>
       <p:sp>
         <p:nvSpPr>
-          <p:cNvPr id="275" name="Google Shape;275;p38"/>
+          <p:cNvPr id="285" name="Google Shape;285;p39"/>
           <p:cNvSpPr txBox="1"/>
           <p:nvPr/>
         </p:nvSpPr>
@@ -40394,12 +40935,12 @@
 </p:sld>
 </file>
 
-<file path=ppt/slides/slide25.xml><?xml version="1.0" encoding="utf-8"?>
+<file path=ppt/slides/slide26.xml><?xml version="1.0" encoding="utf-8"?>
 <p:sld xmlns:a="http://schemas.openxmlformats.org/drawingml/2006/main" xmlns:r="http://schemas.openxmlformats.org/officeDocument/2006/relationships" xmlns:p="http://schemas.openxmlformats.org/presentationml/2006/main">
   <p:cSld>
     <p:spTree>
       <p:nvGrpSpPr>
-        <p:cNvPr id="1" name="Shape 279"/>
+        <p:cNvPr id="1" name="Shape 289"/>
         <p:cNvGrpSpPr/>
         <p:nvPr/>
       </p:nvGrpSpPr>
@@ -40413,7 +40954,7 @@
       </p:grpSpPr>
       <p:sp>
         <p:nvSpPr>
-          <p:cNvPr id="280" name="Google Shape;280;p39"/>
+          <p:cNvPr id="290" name="Google Shape;290;p40"/>
           <p:cNvSpPr txBox="1"/>
           <p:nvPr/>
         </p:nvSpPr>
@@ -40490,7 +41031,7 @@
   <p:cSld>
     <p:spTree>
       <p:nvGrpSpPr>
-        <p:cNvPr id="1" name="Shape 86"/>
+        <p:cNvPr id="1" name="Shape 85"/>
         <p:cNvGrpSpPr/>
         <p:nvPr/>
       </p:nvGrpSpPr>
@@ -40504,7 +41045,7 @@
       </p:grpSpPr>
       <p:sp>
         <p:nvSpPr>
-          <p:cNvPr id="87" name="Google Shape;87;p17"/>
+          <p:cNvPr id="86" name="Google Shape;86;p17"/>
           <p:cNvSpPr txBox="1"/>
           <p:nvPr/>
         </p:nvSpPr>
@@ -40570,7 +41111,7 @@
       </p:sp>
       <p:sp>
         <p:nvSpPr>
-          <p:cNvPr id="88" name="Google Shape;88;p17"/>
+          <p:cNvPr id="87" name="Google Shape;87;p17"/>
           <p:cNvSpPr txBox="1"/>
           <p:nvPr/>
         </p:nvSpPr>
@@ -40682,7 +41223,7 @@
       </p:sp>
       <p:sp>
         <p:nvSpPr>
-          <p:cNvPr id="89" name="Google Shape;89;p17"/>
+          <p:cNvPr id="88" name="Google Shape;88;p17"/>
           <p:cNvSpPr txBox="1"/>
           <p:nvPr/>
         </p:nvSpPr>
@@ -40751,7 +41292,7 @@
       </p:sp>
       <p:pic>
         <p:nvPicPr>
-          <p:cNvPr id="90" name="Google Shape;90;p17"/>
+          <p:cNvPr id="89" name="Google Shape;89;p17"/>
           <p:cNvPicPr preferRelativeResize="0"/>
           <p:nvPr/>
         </p:nvPicPr>
@@ -40801,7 +41342,7 @@
   <p:cSld>
     <p:spTree>
       <p:nvGrpSpPr>
-        <p:cNvPr id="1" name="Shape 94"/>
+        <p:cNvPr id="1" name="Shape 93"/>
         <p:cNvGrpSpPr/>
         <p:nvPr/>
       </p:nvGrpSpPr>
@@ -40815,7 +41356,7 @@
       </p:grpSpPr>
       <p:sp>
         <p:nvSpPr>
-          <p:cNvPr id="95" name="Google Shape;95;p18"/>
+          <p:cNvPr id="94" name="Google Shape;94;p18"/>
           <p:cNvSpPr txBox="1"/>
           <p:nvPr/>
         </p:nvSpPr>
@@ -40881,7 +41422,7 @@
       </p:sp>
       <p:sp>
         <p:nvSpPr>
-          <p:cNvPr id="96" name="Google Shape;96;p18"/>
+          <p:cNvPr id="95" name="Google Shape;95;p18"/>
           <p:cNvSpPr txBox="1"/>
           <p:nvPr/>
         </p:nvSpPr>
@@ -41195,7 +41736,7 @@
       </p:sp>
       <p:pic>
         <p:nvPicPr>
-          <p:cNvPr id="97" name="Google Shape;97;p18"/>
+          <p:cNvPr id="96" name="Google Shape;96;p18"/>
           <p:cNvPicPr preferRelativeResize="0"/>
           <p:nvPr/>
         </p:nvPicPr>
@@ -41234,7 +41775,7 @@
       </p:pic>
       <p:sp>
         <p:nvSpPr>
-          <p:cNvPr id="98" name="Google Shape;98;p18"/>
+          <p:cNvPr id="97" name="Google Shape;97;p18"/>
           <p:cNvSpPr txBox="1"/>
           <p:nvPr/>
         </p:nvSpPr>
@@ -41468,7 +42009,7 @@
       </p:sp>
       <p:pic>
         <p:nvPicPr>
-          <p:cNvPr id="99" name="Google Shape;99;p18"/>
+          <p:cNvPr id="98" name="Google Shape;98;p18"/>
           <p:cNvPicPr preferRelativeResize="0"/>
           <p:nvPr/>
         </p:nvPicPr>
@@ -41518,7 +42059,7 @@
   <p:cSld>
     <p:spTree>
       <p:nvGrpSpPr>
-        <p:cNvPr id="1" name="Shape 103"/>
+        <p:cNvPr id="1" name="Shape 102"/>
         <p:cNvGrpSpPr/>
         <p:nvPr/>
       </p:nvGrpSpPr>
@@ -41532,7 +42073,7 @@
       </p:grpSpPr>
       <p:sp>
         <p:nvSpPr>
-          <p:cNvPr id="104" name="Google Shape;104;p19"/>
+          <p:cNvPr id="103" name="Google Shape;103;p19"/>
           <p:cNvSpPr txBox="1"/>
           <p:nvPr/>
         </p:nvSpPr>
@@ -41598,7 +42139,7 @@
       </p:sp>
       <p:sp>
         <p:nvSpPr>
-          <p:cNvPr id="105" name="Google Shape;105;p19"/>
+          <p:cNvPr id="104" name="Google Shape;104;p19"/>
           <p:cNvSpPr txBox="1"/>
           <p:nvPr/>
         </p:nvSpPr>
@@ -41792,7 +42333,7 @@
       </p:sp>
       <p:sp>
         <p:nvSpPr>
-          <p:cNvPr id="106" name="Google Shape;106;p19"/>
+          <p:cNvPr id="105" name="Google Shape;105;p19"/>
           <p:cNvSpPr txBox="1"/>
           <p:nvPr/>
         </p:nvSpPr>
@@ -42331,7 +42872,7 @@
       </p:sp>
       <p:pic>
         <p:nvPicPr>
-          <p:cNvPr id="107" name="Google Shape;107;p19"/>
+          <p:cNvPr id="106" name="Google Shape;106;p19"/>
           <p:cNvPicPr preferRelativeResize="0"/>
           <p:nvPr/>
         </p:nvPicPr>
@@ -42370,7 +42911,7 @@
       </p:pic>
       <p:pic>
         <p:nvPicPr>
-          <p:cNvPr id="108" name="Google Shape;108;p19"/>
+          <p:cNvPr id="107" name="Google Shape;107;p19"/>
           <p:cNvPicPr preferRelativeResize="0"/>
           <p:nvPr/>
         </p:nvPicPr>
@@ -42409,7 +42950,7 @@
       </p:pic>
       <p:pic>
         <p:nvPicPr>
-          <p:cNvPr id="109" name="Google Shape;109;p19"/>
+          <p:cNvPr id="108" name="Google Shape;108;p19"/>
           <p:cNvPicPr preferRelativeResize="0"/>
           <p:nvPr/>
         </p:nvPicPr>
@@ -42459,7 +43000,7 @@
   <p:cSld>
     <p:spTree>
       <p:nvGrpSpPr>
-        <p:cNvPr id="1" name="Shape 113"/>
+        <p:cNvPr id="1" name="Shape 112"/>
         <p:cNvGrpSpPr/>
         <p:nvPr/>
       </p:nvGrpSpPr>
@@ -42473,7 +43014,7 @@
       </p:grpSpPr>
       <p:sp>
         <p:nvSpPr>
-          <p:cNvPr id="114" name="Google Shape;114;p20"/>
+          <p:cNvPr id="113" name="Google Shape;113;p20"/>
           <p:cNvSpPr txBox="1"/>
           <p:nvPr/>
         </p:nvSpPr>
@@ -42539,7 +43080,7 @@
       </p:sp>
       <p:sp>
         <p:nvSpPr>
-          <p:cNvPr id="115" name="Google Shape;115;p20"/>
+          <p:cNvPr id="114" name="Google Shape;114;p20"/>
           <p:cNvSpPr txBox="1"/>
           <p:nvPr/>
         </p:nvSpPr>
@@ -43026,7 +43567,7 @@
       </p:sp>
       <p:pic>
         <p:nvPicPr>
-          <p:cNvPr id="116" name="Google Shape;116;p20"/>
+          <p:cNvPr id="115" name="Google Shape;115;p20"/>
           <p:cNvPicPr preferRelativeResize="0"/>
           <p:nvPr/>
         </p:nvPicPr>
@@ -43065,7 +43606,7 @@
       </p:pic>
       <p:pic>
         <p:nvPicPr>
-          <p:cNvPr id="117" name="Google Shape;117;p20"/>
+          <p:cNvPr id="116" name="Google Shape;116;p20"/>
           <p:cNvPicPr preferRelativeResize="0"/>
           <p:nvPr/>
         </p:nvPicPr>
@@ -43115,7 +43656,7 @@
   <p:cSld>
     <p:spTree>
       <p:nvGrpSpPr>
-        <p:cNvPr id="1" name="Shape 121"/>
+        <p:cNvPr id="1" name="Shape 120"/>
         <p:cNvGrpSpPr/>
         <p:nvPr/>
       </p:nvGrpSpPr>
@@ -43129,7 +43670,7 @@
       </p:grpSpPr>
       <p:sp>
         <p:nvSpPr>
-          <p:cNvPr id="122" name="Google Shape;122;p21"/>
+          <p:cNvPr id="121" name="Google Shape;121;p21"/>
           <p:cNvSpPr txBox="1"/>
           <p:nvPr/>
         </p:nvSpPr>
@@ -43195,13 +43736,13 @@
       </p:sp>
       <p:sp>
         <p:nvSpPr>
-          <p:cNvPr id="123" name="Google Shape;123;p21"/>
+          <p:cNvPr id="122" name="Google Shape;122;p21"/>
           <p:cNvSpPr txBox="1"/>
           <p:nvPr/>
         </p:nvSpPr>
         <p:spPr>
           <a:xfrm>
-            <a:off x="81775" y="759837"/>
+            <a:off x="78212" y="427162"/>
             <a:ext cx="3910200" cy="3250800"/>
           </a:xfrm>
           <a:prstGeom prst="rect">
@@ -43727,7 +44268,7 @@
       </p:sp>
       <p:pic>
         <p:nvPicPr>
-          <p:cNvPr id="124" name="Google Shape;124;p21"/>
+          <p:cNvPr id="123" name="Google Shape;123;p21"/>
           <p:cNvPicPr preferRelativeResize="0"/>
           <p:nvPr/>
         </p:nvPicPr>
@@ -43746,8 +44287,281 @@
         </p:blipFill>
         <p:spPr>
           <a:xfrm>
-            <a:off x="4068750" y="966349"/>
-            <a:ext cx="5000601" cy="2814324"/>
+            <a:off x="81776" y="3778700"/>
+            <a:ext cx="2506286" cy="1410526"/>
+          </a:xfrm>
+          <a:prstGeom prst="rect">
+            <a:avLst/>
+          </a:prstGeom>
+          <a:noFill/>
+          <a:ln w="9525" cap="flat" cmpd="sng">
+            <a:solidFill>
+              <a:srgbClr val="FF0000"/>
+            </a:solidFill>
+            <a:prstDash val="solid"/>
+            <a:round/>
+            <a:headEnd type="none" w="sm" len="sm"/>
+            <a:tailEnd type="none" w="sm" len="sm"/>
+          </a:ln>
+        </p:spPr>
+      </p:pic>
+      <p:sp>
+        <p:nvSpPr>
+          <p:cNvPr id="124" name="Google Shape;124;p21"/>
+          <p:cNvSpPr txBox="1"/>
+          <p:nvPr/>
+        </p:nvSpPr>
+        <p:spPr>
+          <a:xfrm>
+            <a:off x="4196672" y="3369925"/>
+            <a:ext cx="4858500" cy="1680900"/>
+          </a:xfrm>
+          <a:prstGeom prst="rect">
+            <a:avLst/>
+          </a:prstGeom>
+          <a:solidFill>
+            <a:srgbClr val="FFF2CC"/>
+          </a:solidFill>
+          <a:ln w="9525" cap="flat" cmpd="sng">
+            <a:solidFill>
+              <a:srgbClr val="FF0000"/>
+            </a:solidFill>
+            <a:prstDash val="solid"/>
+            <a:round/>
+            <a:headEnd type="none" w="sm" len="sm"/>
+            <a:tailEnd type="none" w="sm" len="sm"/>
+          </a:ln>
+        </p:spPr>
+        <p:txBody>
+          <a:bodyPr spcFirstLastPara="1" wrap="square" lIns="9125" tIns="9125" rIns="9125" bIns="9125" anchor="t" anchorCtr="0">
+            <a:spAutoFit/>
+          </a:bodyPr>
+          <a:lstStyle/>
+          <a:p>
+            <a:pPr marL="171450" marR="0" lvl="0" indent="-133350" algn="l" rtl="0">
+              <a:lnSpc>
+                <a:spcPct val="100000"/>
+              </a:lnSpc>
+              <a:spcBef>
+                <a:spcPts val="0"/>
+              </a:spcBef>
+              <a:spcAft>
+                <a:spcPts val="0"/>
+              </a:spcAft>
+              <a:buClr>
+                <a:srgbClr val="FF0000"/>
+              </a:buClr>
+              <a:buSzPts val="1200"/>
+              <a:buFont typeface="Calibri"/>
+              <a:buChar char="●"/>
+            </a:pPr>
+            <a:r>
+              <a:rPr lang="en" sz="1200" b="1">
+                <a:solidFill>
+                  <a:srgbClr val="FF0000"/>
+                </a:solidFill>
+                <a:latin typeface="Calibri"/>
+                <a:ea typeface="Calibri"/>
+                <a:cs typeface="Calibri"/>
+                <a:sym typeface="Calibri"/>
+              </a:rPr>
+              <a:t>OpenAI ChatGPT Images 2.5 </a:t>
+            </a:r>
+            <a:endParaRPr sz="1200" b="1">
+              <a:solidFill>
+                <a:srgbClr val="FF0000"/>
+              </a:solidFill>
+              <a:latin typeface="Calibri"/>
+              <a:ea typeface="Calibri"/>
+              <a:cs typeface="Calibri"/>
+              <a:sym typeface="Calibri"/>
+            </a:endParaRPr>
+          </a:p>
+          <a:p>
+            <a:pPr marL="171450" marR="0" lvl="0" indent="-133350" algn="l" rtl="0">
+              <a:lnSpc>
+                <a:spcPct val="100000"/>
+              </a:lnSpc>
+              <a:spcBef>
+                <a:spcPts val="0"/>
+              </a:spcBef>
+              <a:spcAft>
+                <a:spcPts val="0"/>
+              </a:spcAft>
+              <a:buClr>
+                <a:schemeClr val="dk1"/>
+              </a:buClr>
+              <a:buSzPts val="1200"/>
+              <a:buFont typeface="Calibri"/>
+              <a:buChar char="●"/>
+            </a:pPr>
+            <a:r>
+              <a:rPr lang="en" sz="1200">
+                <a:solidFill>
+                  <a:schemeClr val="dk1"/>
+                </a:solidFill>
+                <a:latin typeface="Calibri"/>
+                <a:ea typeface="Calibri"/>
+                <a:cs typeface="Calibri"/>
+                <a:sym typeface="Calibri"/>
+              </a:rPr>
+              <a:t>Alreadhy works in browser Chat</a:t>
+            </a:r>
+            <a:endParaRPr sz="1200">
+              <a:solidFill>
+                <a:schemeClr val="dk1"/>
+              </a:solidFill>
+              <a:latin typeface="Calibri"/>
+              <a:ea typeface="Calibri"/>
+              <a:cs typeface="Calibri"/>
+              <a:sym typeface="Calibri"/>
+            </a:endParaRPr>
+          </a:p>
+          <a:p>
+            <a:pPr marL="171450" marR="0" lvl="0" indent="-133350" algn="l" rtl="0">
+              <a:lnSpc>
+                <a:spcPct val="100000"/>
+              </a:lnSpc>
+              <a:spcBef>
+                <a:spcPts val="0"/>
+              </a:spcBef>
+              <a:spcAft>
+                <a:spcPts val="0"/>
+              </a:spcAft>
+              <a:buClr>
+                <a:schemeClr val="dk1"/>
+              </a:buClr>
+              <a:buSzPts val="1200"/>
+              <a:buFont typeface="Calibri"/>
+              <a:buChar char="●"/>
+            </a:pPr>
+            <a:r>
+              <a:rPr lang="en" sz="1200">
+                <a:solidFill>
+                  <a:schemeClr val="dk1"/>
+                </a:solidFill>
+                <a:latin typeface="Calibri"/>
+                <a:ea typeface="Calibri"/>
+                <a:cs typeface="Calibri"/>
+                <a:sym typeface="Calibri"/>
+              </a:rPr>
+              <a:t>Sharper details, more natural lighting and textures; better preservation of people or objects in reference images; More reliable multi-turn image edits (retaining key details and style)</a:t>
+            </a:r>
+            <a:endParaRPr sz="1200">
+              <a:solidFill>
+                <a:schemeClr val="dk1"/>
+              </a:solidFill>
+              <a:latin typeface="Calibri"/>
+              <a:ea typeface="Calibri"/>
+              <a:cs typeface="Calibri"/>
+              <a:sym typeface="Calibri"/>
+            </a:endParaRPr>
+          </a:p>
+          <a:p>
+            <a:pPr marL="171450" marR="0" lvl="0" indent="-133350" algn="l" rtl="0">
+              <a:lnSpc>
+                <a:spcPct val="100000"/>
+              </a:lnSpc>
+              <a:spcBef>
+                <a:spcPts val="0"/>
+              </a:spcBef>
+              <a:spcAft>
+                <a:spcPts val="0"/>
+              </a:spcAft>
+              <a:buClr>
+                <a:schemeClr val="dk1"/>
+              </a:buClr>
+              <a:buSzPts val="1200"/>
+              <a:buFont typeface="Calibri"/>
+              <a:buChar char="●"/>
+            </a:pPr>
+            <a:r>
+              <a:rPr lang="en" sz="1200">
+                <a:solidFill>
+                  <a:schemeClr val="dk1"/>
+                </a:solidFill>
+                <a:latin typeface="Calibri"/>
+                <a:ea typeface="Calibri"/>
+                <a:cs typeface="Calibri"/>
+                <a:sym typeface="Calibri"/>
+              </a:rPr>
+              <a:t>A Sketch feature: on mobile, type @ and select Sketch, draw an idea, then describe the image you want.</a:t>
+            </a:r>
+            <a:endParaRPr sz="1200">
+              <a:solidFill>
+                <a:schemeClr val="dk1"/>
+              </a:solidFill>
+              <a:latin typeface="Calibri"/>
+              <a:ea typeface="Calibri"/>
+              <a:cs typeface="Calibri"/>
+              <a:sym typeface="Calibri"/>
+            </a:endParaRPr>
+          </a:p>
+          <a:p>
+            <a:pPr marL="171450" marR="0" lvl="0" indent="-133350" algn="l" rtl="0">
+              <a:lnSpc>
+                <a:spcPct val="100000"/>
+              </a:lnSpc>
+              <a:spcBef>
+                <a:spcPts val="0"/>
+              </a:spcBef>
+              <a:spcAft>
+                <a:spcPts val="0"/>
+              </a:spcAft>
+              <a:buClr>
+                <a:schemeClr val="dk1"/>
+              </a:buClr>
+              <a:buSzPts val="1200"/>
+              <a:buFont typeface="Calibri"/>
+              <a:buChar char="●"/>
+            </a:pPr>
+            <a:r>
+              <a:rPr lang="en" sz="1200">
+                <a:solidFill>
+                  <a:schemeClr val="dk1"/>
+                </a:solidFill>
+                <a:latin typeface="Calibri"/>
+                <a:ea typeface="Calibri"/>
+                <a:cs typeface="Calibri"/>
+                <a:sym typeface="Calibri"/>
+              </a:rPr>
+              <a:t>Templates for guided creation workflows such as logos, posters, and other formats</a:t>
+            </a:r>
+            <a:endParaRPr sz="1200">
+              <a:solidFill>
+                <a:schemeClr val="dk1"/>
+              </a:solidFill>
+              <a:latin typeface="Calibri"/>
+              <a:ea typeface="Calibri"/>
+              <a:cs typeface="Calibri"/>
+              <a:sym typeface="Calibri"/>
+            </a:endParaRPr>
+          </a:p>
+        </p:txBody>
+      </p:sp>
+      <p:pic>
+        <p:nvPicPr>
+          <p:cNvPr id="125" name="Google Shape;125;p21"/>
+          <p:cNvPicPr preferRelativeResize="0"/>
+          <p:nvPr/>
+        </p:nvPicPr>
+        <p:blipFill>
+          <a:blip r:embed="rId6" cstate="email">
+            <a:alphaModFix/>
+            <a:extLst>
+              <a:ext uri="{28A0092B-C50C-407E-A947-70E740481C1C}">
+                <a14:useLocalDpi xmlns:a14="http://schemas.microsoft.com/office/drawing/2010/main"/>
+              </a:ext>
+            </a:extLst>
+          </a:blip>
+          <a:stretch>
+            <a:fillRect/>
+          </a:stretch>
+        </p:blipFill>
+        <p:spPr>
+          <a:xfrm>
+            <a:off x="5718875" y="1773502"/>
+            <a:ext cx="3336300" cy="1471000"/>
           </a:xfrm>
           <a:prstGeom prst="rect">
             <a:avLst/>
@@ -43777,7 +44591,7 @@
   <p:cSld>
     <p:spTree>
       <p:nvGrpSpPr>
-        <p:cNvPr id="1" name="Shape 128"/>
+        <p:cNvPr id="1" name="Shape 129"/>
         <p:cNvGrpSpPr/>
         <p:nvPr/>
       </p:nvGrpSpPr>
@@ -43791,7 +44605,7 @@
       </p:grpSpPr>
       <p:sp>
         <p:nvSpPr>
-          <p:cNvPr id="129" name="Google Shape;129;p22"/>
+          <p:cNvPr id="130" name="Google Shape;130;p22"/>
           <p:cNvSpPr txBox="1"/>
           <p:nvPr/>
         </p:nvSpPr>
@@ -43857,7 +44671,7 @@
       </p:sp>
       <p:sp>
         <p:nvSpPr>
-          <p:cNvPr id="130" name="Google Shape;130;p22"/>
+          <p:cNvPr id="131" name="Google Shape;131;p22"/>
           <p:cNvSpPr txBox="1"/>
           <p:nvPr/>
         </p:nvSpPr>
@@ -44060,7 +44874,7 @@
       </p:sp>
       <p:pic>
         <p:nvPicPr>
-          <p:cNvPr id="131" name="Google Shape;131;p22"/>
+          <p:cNvPr id="132" name="Google Shape;132;p22"/>
           <p:cNvPicPr preferRelativeResize="0"/>
           <p:nvPr/>
         </p:nvPicPr>
@@ -44099,7 +44913,7 @@
       </p:pic>
       <p:sp>
         <p:nvSpPr>
-          <p:cNvPr id="132" name="Google Shape;132;p22"/>
+          <p:cNvPr id="133" name="Google Shape;133;p22"/>
           <p:cNvSpPr txBox="1"/>
           <p:nvPr/>
         </p:nvSpPr>
@@ -44428,7 +45242,7 @@
       </p:sp>
       <p:pic>
         <p:nvPicPr>
-          <p:cNvPr id="133" name="Google Shape;133;p22"/>
+          <p:cNvPr id="134" name="Google Shape;134;p22"/>
           <p:cNvPicPr preferRelativeResize="0"/>
           <p:nvPr/>
         </p:nvPicPr>
@@ -44467,7 +45281,7 @@
       </p:pic>
       <p:sp>
         <p:nvSpPr>
-          <p:cNvPr id="134" name="Google Shape;134;p22"/>
+          <p:cNvPr id="135" name="Google Shape;135;p22"/>
           <p:cNvSpPr txBox="1"/>
           <p:nvPr/>
         </p:nvSpPr>
@@ -44674,7 +45488,7 @@
       </p:sp>
       <p:pic>
         <p:nvPicPr>
-          <p:cNvPr id="135" name="Google Shape;135;p22"/>
+          <p:cNvPr id="136" name="Google Shape;136;p22"/>
           <p:cNvPicPr preferRelativeResize="0"/>
           <p:nvPr/>
         </p:nvPicPr>
@@ -44723,7 +45537,7 @@
   <p:cSld>
     <p:spTree>
       <p:nvGrpSpPr>
-        <p:cNvPr id="1" name="Shape 139"/>
+        <p:cNvPr id="1" name="Shape 140"/>
         <p:cNvGrpSpPr/>
         <p:nvPr/>
       </p:nvGrpSpPr>
@@ -44737,14 +45551,80 @@
       </p:grpSpPr>
       <p:sp>
         <p:nvSpPr>
-          <p:cNvPr id="140" name="Google Shape;140;p23"/>
+          <p:cNvPr id="141" name="Google Shape;141;p23"/>
           <p:cNvSpPr txBox="1"/>
           <p:nvPr/>
         </p:nvSpPr>
         <p:spPr>
           <a:xfrm>
-            <a:off x="102375" y="478350"/>
-            <a:ext cx="4161900" cy="4186800"/>
+            <a:off x="81775" y="0"/>
+            <a:ext cx="1899300" cy="326400"/>
+          </a:xfrm>
+          <a:prstGeom prst="rect">
+            <a:avLst/>
+          </a:prstGeom>
+          <a:noFill/>
+          <a:ln>
+            <a:noFill/>
+          </a:ln>
+        </p:spPr>
+        <p:txBody>
+          <a:bodyPr spcFirstLastPara="1" wrap="square" lIns="9125" tIns="9125" rIns="9125" bIns="9125" anchor="t" anchorCtr="0">
+            <a:spAutoFit/>
+          </a:bodyPr>
+          <a:lstStyle/>
+          <a:p>
+            <a:pPr marL="0" marR="0" lvl="0" indent="0" algn="l" rtl="0">
+              <a:lnSpc>
+                <a:spcPct val="100000"/>
+              </a:lnSpc>
+              <a:spcBef>
+                <a:spcPts val="0"/>
+              </a:spcBef>
+              <a:spcAft>
+                <a:spcPts val="0"/>
+              </a:spcAft>
+              <a:buClr>
+                <a:schemeClr val="dk1"/>
+              </a:buClr>
+              <a:buSzPts val="1100"/>
+              <a:buFont typeface="Arial"/>
+              <a:buNone/>
+            </a:pPr>
+            <a:r>
+              <a:rPr lang="en" sz="2000" b="1">
+                <a:solidFill>
+                  <a:schemeClr val="dk1"/>
+                </a:solidFill>
+                <a:latin typeface="Calibri"/>
+                <a:ea typeface="Calibri"/>
+                <a:cs typeface="Calibri"/>
+                <a:sym typeface="Calibri"/>
+              </a:rPr>
+              <a:t>Embodied AI</a:t>
+            </a:r>
+            <a:endParaRPr sz="2000" b="1">
+              <a:solidFill>
+                <a:schemeClr val="dk1"/>
+              </a:solidFill>
+              <a:latin typeface="Calibri"/>
+              <a:ea typeface="Calibri"/>
+              <a:cs typeface="Calibri"/>
+              <a:sym typeface="Calibri"/>
+            </a:endParaRPr>
+          </a:p>
+        </p:txBody>
+      </p:sp>
+      <p:sp>
+        <p:nvSpPr>
+          <p:cNvPr id="142" name="Google Shape;142;p23"/>
+          <p:cNvSpPr txBox="1"/>
+          <p:nvPr/>
+        </p:nvSpPr>
+        <p:spPr>
+          <a:xfrm>
+            <a:off x="81775" y="484600"/>
+            <a:ext cx="4766400" cy="3758700"/>
           </a:xfrm>
           <a:prstGeom prst="rect">
             <a:avLst/>
@@ -44763,41 +45643,93 @@
           </a:ln>
         </p:spPr>
         <p:txBody>
-          <a:bodyPr spcFirstLastPara="1" wrap="square" lIns="91425" tIns="91425" rIns="91425" bIns="91425" anchor="t" anchorCtr="0">
+          <a:bodyPr spcFirstLastPara="1" wrap="square" lIns="9125" tIns="9125" rIns="9125" bIns="9125" anchor="t" anchorCtr="0">
             <a:spAutoFit/>
           </a:bodyPr>
           <a:lstStyle/>
           <a:p>
-            <a:pPr marL="0" marR="0" lvl="0" indent="0" algn="l" rtl="0">
-              <a:lnSpc>
-                <a:spcPct val="100000"/>
-              </a:lnSpc>
-              <a:spcBef>
-                <a:spcPts val="0"/>
-              </a:spcBef>
-              <a:spcAft>
-                <a:spcPts val="0"/>
-              </a:spcAft>
-              <a:buClr>
-                <a:schemeClr val="dk1"/>
-              </a:buClr>
-              <a:buSzPts val="2500"/>
-              <a:buFont typeface="Arial"/>
-              <a:buNone/>
+            <a:pPr marL="171450" marR="0" lvl="0" indent="-114300" algn="l" rtl="0">
+              <a:lnSpc>
+                <a:spcPct val="100000"/>
+              </a:lnSpc>
+              <a:spcBef>
+                <a:spcPts val="0"/>
+              </a:spcBef>
+              <a:spcAft>
+                <a:spcPts val="0"/>
+              </a:spcAft>
+              <a:buClr>
+                <a:srgbClr val="FF0000"/>
+              </a:buClr>
+              <a:buSzPts val="900"/>
+              <a:buFont typeface="Calibri"/>
+              <a:buChar char="●"/>
             </a:pPr>
             <a:r>
-              <a:rPr lang="en" sz="2200">
-                <a:solidFill>
-                  <a:schemeClr val="dk1"/>
+              <a:rPr lang="en" sz="1200" b="1">
+                <a:solidFill>
+                  <a:srgbClr val="FF0000"/>
                 </a:solidFill>
                 <a:latin typeface="Calibri"/>
                 <a:ea typeface="Calibri"/>
                 <a:cs typeface="Calibri"/>
                 <a:sym typeface="Calibri"/>
               </a:rPr>
-              <a:t>Weekly videos every Friday</a:t>
+              <a:t>Embodied AI</a:t>
             </a:r>
-            <a:endParaRPr sz="2200">
+            <a:endParaRPr sz="1200" b="1">
+              <a:solidFill>
+                <a:srgbClr val="FF0000"/>
+              </a:solidFill>
+              <a:latin typeface="Calibri"/>
+              <a:ea typeface="Calibri"/>
+              <a:cs typeface="Calibri"/>
+              <a:sym typeface="Calibri"/>
+            </a:endParaRPr>
+          </a:p>
+          <a:p>
+            <a:pPr marL="171450" marR="0" lvl="0" indent="-114300" algn="l" rtl="0">
+              <a:lnSpc>
+                <a:spcPct val="100000"/>
+              </a:lnSpc>
+              <a:spcBef>
+                <a:spcPts val="0"/>
+              </a:spcBef>
+              <a:spcAft>
+                <a:spcPts val="0"/>
+              </a:spcAft>
+              <a:buClr>
+                <a:schemeClr val="dk1"/>
+              </a:buClr>
+              <a:buSzPts val="900"/>
+              <a:buFont typeface="Calibri"/>
+              <a:buChar char="●"/>
+            </a:pPr>
+            <a:r>
+              <a:rPr lang="en" sz="1200" b="1">
+                <a:solidFill>
+                  <a:srgbClr val="3C78D8"/>
+                </a:solidFill>
+                <a:latin typeface="Calibri"/>
+                <a:ea typeface="Calibri"/>
+                <a:cs typeface="Calibri"/>
+                <a:sym typeface="Calibri"/>
+              </a:rPr>
+              <a:t>China’s embodied-AI sector shifted from prototype competition toward deployment</a:t>
+            </a:r>
+            <a:r>
+              <a:rPr lang="en" sz="1200">
+                <a:solidFill>
+                  <a:schemeClr val="dk1"/>
+                </a:solidFill>
+                <a:latin typeface="Calibri"/>
+                <a:ea typeface="Calibri"/>
+                <a:cs typeface="Calibri"/>
+                <a:sym typeface="Calibri"/>
+              </a:rPr>
+              <a:t>: robot makers, manufacturers and local governments are targeting factories and services, where reliable task execution and scalable operations matter more than demos</a:t>
+            </a:r>
+            <a:endParaRPr sz="1200">
               <a:solidFill>
                 <a:schemeClr val="dk1"/>
               </a:solidFill>
@@ -44808,7 +45740,10 @@
             </a:endParaRPr>
           </a:p>
           <a:p>
-            <a:pPr marL="0" lvl="0" indent="0" algn="l" rtl="0">
+            <a:pPr marL="171450" marR="0" lvl="0" indent="-114300" algn="l" rtl="0">
+              <a:lnSpc>
+                <a:spcPct val="100000"/>
+              </a:lnSpc>
               <a:spcBef>
                 <a:spcPts val="0"/>
               </a:spcBef>
@@ -44818,23 +45753,35 @@
               <a:buClr>
                 <a:schemeClr val="dk1"/>
               </a:buClr>
-              <a:buSzPts val="2500"/>
-              <a:buFont typeface="Arial"/>
-              <a:buNone/>
+              <a:buSzPts val="900"/>
+              <a:buFont typeface="Calibri"/>
+              <a:buChar char="●"/>
             </a:pPr>
             <a:r>
-              <a:rPr lang="en" sz="2200">
-                <a:solidFill>
-                  <a:schemeClr val="dk1"/>
+              <a:rPr lang="en" sz="1200" b="1">
+                <a:solidFill>
+                  <a:srgbClr val="FF0000"/>
                 </a:solidFill>
                 <a:latin typeface="Calibri"/>
                 <a:ea typeface="Calibri"/>
                 <a:cs typeface="Calibri"/>
                 <a:sym typeface="Calibri"/>
               </a:rPr>
-              <a:t>7.46K subscribers, 333 videos</a:t>
+              <a:t>XPeng began an 80%-automated production line for its IRON humanoid</a:t>
             </a:r>
-            <a:endParaRPr sz="2200">
+            <a:r>
+              <a:rPr lang="en" sz="1200">
+                <a:solidFill>
+                  <a:schemeClr val="dk1"/>
+                </a:solidFill>
+                <a:latin typeface="Calibri"/>
+                <a:ea typeface="Calibri"/>
+                <a:cs typeface="Calibri"/>
+                <a:sym typeface="Calibri"/>
+              </a:rPr>
+              <a:t>, moving the challenge from building a capable robot to producing one economically at factory scale</a:t>
+            </a:r>
+            <a:endParaRPr sz="1200">
               <a:solidFill>
                 <a:schemeClr val="dk1"/>
               </a:solidFill>
@@ -44845,7 +45792,7 @@
             </a:endParaRPr>
           </a:p>
           <a:p>
-            <a:pPr marL="0" marR="0" lvl="0" indent="0" algn="l" rtl="0">
+            <a:pPr marL="171450" marR="0" lvl="0" indent="-114300" algn="l" rtl="0">
               <a:lnSpc>
                 <a:spcPct val="100000"/>
               </a:lnSpc>
@@ -44858,11 +45805,35 @@
               <a:buClr>
                 <a:schemeClr val="dk1"/>
               </a:buClr>
-              <a:buSzPts val="2500"/>
-              <a:buFont typeface="Arial"/>
-              <a:buNone/>
+              <a:buSzPts val="900"/>
+              <a:buFont typeface="Calibri"/>
+              <a:buChar char="●"/>
             </a:pPr>
-            <a:endParaRPr sz="2200">
+            <a:r>
+              <a:rPr lang="en" sz="1200" b="1">
+                <a:solidFill>
+                  <a:srgbClr val="FF0000"/>
+                </a:solidFill>
+                <a:latin typeface="Calibri"/>
+                <a:ea typeface="Calibri"/>
+                <a:cs typeface="Calibri"/>
+                <a:sym typeface="Calibri"/>
+              </a:rPr>
+              <a:t>Unitree open-sourced UnifoLM-WLA-1.0, a 6B humanoid foundation model</a:t>
+            </a:r>
+            <a:r>
+              <a:rPr lang="en" sz="1200">
+                <a:solidFill>
+                  <a:schemeClr val="dk1"/>
+                </a:solidFill>
+                <a:latin typeface="Calibri"/>
+                <a:ea typeface="Calibri"/>
+                <a:cs typeface="Calibri"/>
+                <a:sym typeface="Calibri"/>
+              </a:rPr>
+              <a:t>; open model availability could accelerate experimentation across robot bodies and labs</a:t>
+            </a:r>
+            <a:endParaRPr sz="1200">
               <a:solidFill>
                 <a:schemeClr val="dk1"/>
               </a:solidFill>
@@ -44873,7 +45844,10 @@
             </a:endParaRPr>
           </a:p>
           <a:p>
-            <a:pPr marL="0" lvl="0" indent="0" algn="l" rtl="0">
+            <a:pPr marL="171450" marR="0" lvl="0" indent="-114300" algn="l" rtl="0">
+              <a:lnSpc>
+                <a:spcPct val="100000"/>
+              </a:lnSpc>
               <a:spcBef>
                 <a:spcPts val="0"/>
               </a:spcBef>
@@ -44883,43 +45857,24 @@
               <a:buClr>
                 <a:schemeClr val="dk1"/>
               </a:buClr>
-              <a:buSzPts val="2500"/>
-              <a:buFont typeface="Arial"/>
-              <a:buNone/>
+              <a:buSzPts val="900"/>
+              <a:buFont typeface="Calibri"/>
+              <a:buChar char="●"/>
             </a:pPr>
             <a:r>
-              <a:rPr lang="en" sz="2200">
-                <a:solidFill>
-                  <a:schemeClr val="dk1"/>
+              <a:rPr lang="en" sz="1200" b="1">
+                <a:solidFill>
+                  <a:srgbClr val="3C78D8"/>
                 </a:solidFill>
                 <a:latin typeface="Calibri"/>
                 <a:ea typeface="Calibri"/>
                 <a:cs typeface="Calibri"/>
                 <a:sym typeface="Calibri"/>
               </a:rPr>
-              <a:t>1. Subscribe to this channel </a:t>
+              <a:t>Maven Robotics emerged from stealth with a $100M Series A to pursue deployment deals</a:t>
             </a:r>
             <a:r>
-              <a:rPr lang="en" sz="1800" b="1" u="sng">
-                <a:solidFill>
-                  <a:schemeClr val="accent5"/>
-                </a:solidFill>
-                <a:latin typeface="Calibri"/>
-                <a:ea typeface="Calibri"/>
-                <a:cs typeface="Calibri"/>
-                <a:sym typeface="Calibri"/>
-                <a:hlinkClick r:id="rId3">
-                  <a:extLst>
-                    <a:ext uri="{A12FA001-AC4F-418D-AE19-62706E023703}">
-                      <ahyp:hlinkClr xmlns:ahyp="http://schemas.microsoft.com/office/drawing/2018/hyperlinkcolor" val="tx"/>
-                    </a:ext>
-                  </a:extLst>
-                </a:hlinkClick>
-              </a:rPr>
-              <a:t>https://www.youtube.com/@lev-selector</a:t>
-            </a:r>
-            <a:r>
-              <a:rPr lang="en" sz="1800" b="1">
+              <a:rPr lang="en" sz="1200">
                 <a:solidFill>
                   <a:schemeClr val="dk1"/>
                 </a:solidFill>
@@ -44928,9 +45883,9 @@
                 <a:cs typeface="Calibri"/>
                 <a:sym typeface="Calibri"/>
               </a:rPr>
-              <a:t> </a:t>
+              <a:t>, highlighting sustained investor demand for commercial embodied-AI systems. </a:t>
             </a:r>
-            <a:endParaRPr sz="1800" b="1">
+            <a:endParaRPr sz="1200">
               <a:solidFill>
                 <a:schemeClr val="dk1"/>
               </a:solidFill>
@@ -44941,7 +45896,7 @@
             </a:endParaRPr>
           </a:p>
           <a:p>
-            <a:pPr marL="0" marR="0" lvl="0" indent="0" algn="l" rtl="0">
+            <a:pPr marL="171450" marR="0" lvl="0" indent="-114300" algn="l" rtl="0">
               <a:lnSpc>
                 <a:spcPct val="100000"/>
               </a:lnSpc>
@@ -44954,11 +45909,35 @@
               <a:buClr>
                 <a:schemeClr val="dk1"/>
               </a:buClr>
-              <a:buSzPts val="2500"/>
-              <a:buFont typeface="Arial"/>
-              <a:buNone/>
+              <a:buSzPts val="900"/>
+              <a:buFont typeface="Calibri"/>
+              <a:buChar char="●"/>
             </a:pPr>
-            <a:endParaRPr sz="2200">
+            <a:r>
+              <a:rPr lang="en" sz="1200" b="1">
+                <a:solidFill>
+                  <a:srgbClr val="FF0000"/>
+                </a:solidFill>
+                <a:latin typeface="Calibri"/>
+                <a:ea typeface="Calibri"/>
+                <a:cs typeface="Calibri"/>
+                <a:sym typeface="Calibri"/>
+              </a:rPr>
+              <a:t>Security became urgent: published Unitree G1 exploit chains reportedly enable unauthenticated root access</a:t>
+            </a:r>
+            <a:r>
+              <a:rPr lang="en" sz="1200">
+                <a:solidFill>
+                  <a:schemeClr val="dk1"/>
+                </a:solidFill>
+                <a:latin typeface="Calibri"/>
+                <a:ea typeface="Calibri"/>
+                <a:cs typeface="Calibri"/>
+                <a:sym typeface="Calibri"/>
+              </a:rPr>
+              <a:t>, including via Bluetooth range—dangerous because compromised systems control physical actuators</a:t>
+            </a:r>
+            <a:endParaRPr sz="1200">
               <a:solidFill>
                 <a:schemeClr val="dk1"/>
               </a:solidFill>
@@ -44969,7 +45948,7 @@
             </a:endParaRPr>
           </a:p>
           <a:p>
-            <a:pPr marL="0" marR="0" lvl="0" indent="0" algn="l" rtl="0">
+            <a:pPr marL="171450" marR="0" lvl="0" indent="-95250" algn="l" rtl="0">
               <a:lnSpc>
                 <a:spcPct val="100000"/>
               </a:lnSpc>
@@ -44982,23 +45961,24 @@
               <a:buClr>
                 <a:schemeClr val="dk1"/>
               </a:buClr>
-              <a:buSzPts val="2500"/>
-              <a:buFont typeface="Arial"/>
-              <a:buNone/>
+              <a:buSzPts val="600"/>
+              <a:buFont typeface="Calibri"/>
+              <a:buChar char="●"/>
             </a:pPr>
             <a:r>
-              <a:rPr lang="en" sz="2200">
-                <a:solidFill>
-                  <a:schemeClr val="dk1"/>
+              <a:rPr lang="en" sz="900" u="sng">
+                <a:solidFill>
+                  <a:schemeClr val="hlink"/>
                 </a:solidFill>
                 <a:latin typeface="Calibri"/>
                 <a:ea typeface="Calibri"/>
                 <a:cs typeface="Calibri"/>
                 <a:sym typeface="Calibri"/>
+                <a:hlinkClick r:id="rId3"/>
               </a:rPr>
-              <a:t>2. Download slides from GitHub using links under the videos</a:t>
+              <a:t>https://technode.global/2026/09/08/china-embodied-ai-race-deployment-era/</a:t>
             </a:r>
-            <a:endParaRPr sz="2200">
+            <a:endParaRPr sz="900">
               <a:solidFill>
                 <a:schemeClr val="dk1"/>
               </a:solidFill>
@@ -45009,7 +45989,10 @@
             </a:endParaRPr>
           </a:p>
           <a:p>
-            <a:pPr marL="0" lvl="0" indent="0" algn="l" rtl="0">
+            <a:pPr marL="171450" marR="0" lvl="0" indent="-95250" algn="l" rtl="0">
+              <a:lnSpc>
+                <a:spcPct val="100000"/>
+              </a:lnSpc>
               <a:spcBef>
                 <a:spcPts val="0"/>
               </a:spcBef>
@@ -45019,11 +46002,24 @@
               <a:buClr>
                 <a:schemeClr val="dk1"/>
               </a:buClr>
-              <a:buSzPts val="2500"/>
-              <a:buFont typeface="Arial"/>
-              <a:buNone/>
+              <a:buSzPts val="600"/>
+              <a:buFont typeface="Calibri"/>
+              <a:buChar char="●"/>
             </a:pPr>
-            <a:endParaRPr sz="2200">
+            <a:r>
+              <a:rPr lang="en" sz="900" u="sng">
+                <a:solidFill>
+                  <a:schemeClr val="hlink"/>
+                </a:solidFill>
+                <a:latin typeface="Calibri"/>
+                <a:ea typeface="Calibri"/>
+                <a:cs typeface="Calibri"/>
+                <a:sym typeface="Calibri"/>
+                <a:hlinkClick r:id="rId4"/>
+              </a:rPr>
+              <a:t>https://embodiedwire.com</a:t>
+            </a:r>
+            <a:endParaRPr sz="900">
               <a:solidFill>
                 <a:schemeClr val="dk1"/>
               </a:solidFill>
@@ -45034,7 +46030,10 @@
             </a:endParaRPr>
           </a:p>
           <a:p>
-            <a:pPr marL="0" lvl="0" indent="0" algn="l" rtl="0">
+            <a:pPr marL="171450" marR="0" lvl="0" indent="-95250" algn="l" rtl="0">
+              <a:lnSpc>
+                <a:spcPct val="100000"/>
+              </a:lnSpc>
               <a:spcBef>
                 <a:spcPts val="0"/>
               </a:spcBef>
@@ -45044,25 +46043,38 @@
               <a:buClr>
                 <a:schemeClr val="dk1"/>
               </a:buClr>
-              <a:buSzPts val="2500"/>
-              <a:buFont typeface="Arial"/>
-              <a:buNone/>
+              <a:buSzPts val="600"/>
+              <a:buFont typeface="Calibri"/>
+              <a:buChar char="●"/>
             </a:pPr>
             <a:r>
-              <a:rPr lang="en" sz="2200" b="1">
-                <a:solidFill>
-                  <a:srgbClr val="FF0000"/>
+              <a:rPr lang="en" sz="900" u="sng">
+                <a:solidFill>
+                  <a:schemeClr val="hlink"/>
+                </a:solidFill>
+                <a:latin typeface="Calibri"/>
+                <a:ea typeface="Calibri"/>
+                <a:cs typeface="Calibri"/>
+                <a:sym typeface="Calibri"/>
+                <a:hlinkClick r:id="rId5"/>
+              </a:rPr>
+              <a:t>https://agihunt.info/en/c/hardware</a:t>
+            </a:r>
+            <a:r>
+              <a:rPr lang="en" sz="900">
+                <a:solidFill>
+                  <a:schemeClr val="dk1"/>
                 </a:solidFill>
                 <a:latin typeface="Calibri"/>
                 <a:ea typeface="Calibri"/>
                 <a:cs typeface="Calibri"/>
                 <a:sym typeface="Calibri"/>
               </a:rPr>
-              <a:t>3. Please pause the video - and answer the pinned question in comments under the video</a:t>
+              <a:t> </a:t>
             </a:r>
-            <a:endParaRPr sz="1800" b="1" i="0" u="none" strike="noStrike" cap="none">
+            <a:endParaRPr sz="900">
               <a:solidFill>
-                <a:srgbClr val="FF0000"/>
+                <a:schemeClr val="dk1"/>
               </a:solidFill>
               <a:latin typeface="Calibri"/>
               <a:ea typeface="Calibri"/>
@@ -45074,12 +46086,12 @@
       </p:sp>
       <p:pic>
         <p:nvPicPr>
-          <p:cNvPr id="141" name="Google Shape;141;p23"/>
+          <p:cNvPr id="143" name="Google Shape;143;p23"/>
           <p:cNvPicPr preferRelativeResize="0"/>
           <p:nvPr/>
         </p:nvPicPr>
         <p:blipFill>
-          <a:blip r:embed="rId4" cstate="email">
+          <a:blip r:embed="rId6" cstate="email">
             <a:alphaModFix/>
             <a:extLst>
               <a:ext uri="{28A0092B-C50C-407E-A947-70E740481C1C}">
@@ -45093,8 +46105,8 @@
         </p:blipFill>
         <p:spPr>
           <a:xfrm>
-            <a:off x="4349500" y="263775"/>
-            <a:ext cx="2461825" cy="3154225"/>
+            <a:off x="4953000" y="484600"/>
+            <a:ext cx="1876425" cy="1876425"/>
           </a:xfrm>
           <a:prstGeom prst="rect">
             <a:avLst/>
@@ -45113,12 +46125,12 @@
       </p:pic>
       <p:pic>
         <p:nvPicPr>
-          <p:cNvPr id="142" name="Google Shape;142;p23"/>
+          <p:cNvPr id="144" name="Google Shape;144;p23"/>
           <p:cNvPicPr preferRelativeResize="0"/>
           <p:nvPr/>
         </p:nvPicPr>
         <p:blipFill>
-          <a:blip r:embed="rId5" cstate="email">
+          <a:blip r:embed="rId7" cstate="email">
             <a:alphaModFix/>
             <a:extLst>
               <a:ext uri="{28A0092B-C50C-407E-A947-70E740481C1C}">
@@ -45132,8 +46144,46 @@
         </p:blipFill>
         <p:spPr>
           <a:xfrm>
-            <a:off x="6896550" y="2823825"/>
-            <a:ext cx="2160975" cy="2243351"/>
+            <a:off x="7459349" y="609600"/>
+            <a:ext cx="1550700" cy="3092800"/>
+          </a:xfrm>
+          <a:prstGeom prst="rect">
+            <a:avLst/>
+          </a:prstGeom>
+          <a:noFill/>
+          <a:ln w="9525" cap="flat" cmpd="sng">
+            <a:solidFill>
+              <a:srgbClr val="FF0000"/>
+            </a:solidFill>
+            <a:prstDash val="solid"/>
+            <a:round/>
+            <a:headEnd type="none" w="sm" len="sm"/>
+            <a:tailEnd type="none" w="sm" len="sm"/>
+          </a:ln>
+        </p:spPr>
+      </p:pic>
+      <p:pic>
+        <p:nvPicPr>
+          <p:cNvPr id="145" name="Google Shape;145;p23"/>
+          <p:cNvPicPr preferRelativeResize="0"/>
+          <p:nvPr/>
+        </p:nvPicPr>
+        <p:blipFill rotWithShape="1">
+          <a:blip r:embed="rId8" cstate="email">
+            <a:alphaModFix/>
+            <a:extLst>
+              <a:ext uri="{28A0092B-C50C-407E-A947-70E740481C1C}">
+                <a14:useLocalDpi xmlns:a14="http://schemas.microsoft.com/office/drawing/2010/main"/>
+              </a:ext>
+            </a:extLst>
+          </a:blip>
+          <a:srcRect/>
+          <a:stretch/>
+        </p:blipFill>
+        <p:spPr>
+          <a:xfrm>
+            <a:off x="4941563" y="2731117"/>
+            <a:ext cx="1899299" cy="1055157"/>
           </a:xfrm>
           <a:prstGeom prst="rect">
             <a:avLst/>
